--- a/.work/r24/validated-first.pptx
+++ b/.work/r24/validated-first.pptx
@@ -2,26 +2,26 @@
 <file path=ppt/presentation.xml><?xml version="1.0" encoding="utf-8"?>
 <p:presentation xmlns:p="http://schemas.openxmlformats.org/presentationml/2006/main">
   <p:sldMasterIdLst>
-    <p:sldMasterId xmlns:r="http://schemas.openxmlformats.org/officeDocument/2006/relationships" id="2147483648" r:id="R755df7f8319d4fa8"/>
+    <p:sldMasterId xmlns:r="http://schemas.openxmlformats.org/officeDocument/2006/relationships" id="2147483648" r:id="R110421cc4c294886"/>
   </p:sldMasterIdLst>
   <p:notesMasterIdLst>
-    <p:notesMasterId xmlns:r="http://schemas.openxmlformats.org/officeDocument/2006/relationships" r:id="R05eddbc8ac9748c8"/>
+    <p:notesMasterId xmlns:r="http://schemas.openxmlformats.org/officeDocument/2006/relationships" r:id="Rde7a0fd987a543ad"/>
   </p:notesMasterIdLst>
   <p:sldIdLst>
-    <p:sldId xmlns:r="http://schemas.openxmlformats.org/officeDocument/2006/relationships" id="256" r:id="R4f943a1de4014c2a"/>
-    <p:sldId xmlns:r="http://schemas.openxmlformats.org/officeDocument/2006/relationships" id="257" r:id="R0c868923497d4896"/>
-    <p:sldId xmlns:r="http://schemas.openxmlformats.org/officeDocument/2006/relationships" id="258" r:id="R05ac9facb87a4751"/>
-    <p:sldId xmlns:r="http://schemas.openxmlformats.org/officeDocument/2006/relationships" id="259" r:id="Rf5b6614d08454a80"/>
-    <p:sldId xmlns:r="http://schemas.openxmlformats.org/officeDocument/2006/relationships" id="260" r:id="R7e3f9ff2e4fc4049"/>
-    <p:sldId xmlns:r="http://schemas.openxmlformats.org/officeDocument/2006/relationships" id="261" r:id="R08285a01f7314db9"/>
-    <p:sldId xmlns:r="http://schemas.openxmlformats.org/officeDocument/2006/relationships" id="262" r:id="R6321a3c664434eb5"/>
-    <p:sldId xmlns:r="http://schemas.openxmlformats.org/officeDocument/2006/relationships" id="263" r:id="Re776d4d1bf99489e"/>
-    <p:sldId xmlns:r="http://schemas.openxmlformats.org/officeDocument/2006/relationships" id="264" r:id="R932ddc1e61d0422d"/>
-    <p:sldId xmlns:r="http://schemas.openxmlformats.org/officeDocument/2006/relationships" id="265" r:id="Rfa5d52ea84f54859"/>
-    <p:sldId xmlns:r="http://schemas.openxmlformats.org/officeDocument/2006/relationships" id="266" r:id="Rbaf77d6a95c94f7c"/>
-    <p:sldId xmlns:r="http://schemas.openxmlformats.org/officeDocument/2006/relationships" id="267" r:id="R836d01768c4449cb"/>
-    <p:sldId xmlns:r="http://schemas.openxmlformats.org/officeDocument/2006/relationships" id="268" r:id="Rd288eaad492b494a"/>
-    <p:sldId xmlns:r="http://schemas.openxmlformats.org/officeDocument/2006/relationships" id="269" r:id="R4341e8598fc24694"/>
+    <p:sldId xmlns:r="http://schemas.openxmlformats.org/officeDocument/2006/relationships" id="256" r:id="R3793028934564c39"/>
+    <p:sldId xmlns:r="http://schemas.openxmlformats.org/officeDocument/2006/relationships" id="257" r:id="R7786f2adc01f4ff2"/>
+    <p:sldId xmlns:r="http://schemas.openxmlformats.org/officeDocument/2006/relationships" id="258" r:id="R361e45613e634269"/>
+    <p:sldId xmlns:r="http://schemas.openxmlformats.org/officeDocument/2006/relationships" id="259" r:id="R3239eada29e64ae7"/>
+    <p:sldId xmlns:r="http://schemas.openxmlformats.org/officeDocument/2006/relationships" id="260" r:id="R4243d01da984458e"/>
+    <p:sldId xmlns:r="http://schemas.openxmlformats.org/officeDocument/2006/relationships" id="261" r:id="Re174f6dc02f442d6"/>
+    <p:sldId xmlns:r="http://schemas.openxmlformats.org/officeDocument/2006/relationships" id="262" r:id="Rf4dc1d60dc874b50"/>
+    <p:sldId xmlns:r="http://schemas.openxmlformats.org/officeDocument/2006/relationships" id="263" r:id="Rf070c4f7bcaf4ab0"/>
+    <p:sldId xmlns:r="http://schemas.openxmlformats.org/officeDocument/2006/relationships" id="264" r:id="R7bcd3b90dcb74eb7"/>
+    <p:sldId xmlns:r="http://schemas.openxmlformats.org/officeDocument/2006/relationships" id="265" r:id="Rae0c7ada6ac04c12"/>
+    <p:sldId xmlns:r="http://schemas.openxmlformats.org/officeDocument/2006/relationships" id="266" r:id="R9a80440194ee4d13"/>
+    <p:sldId xmlns:r="http://schemas.openxmlformats.org/officeDocument/2006/relationships" id="267" r:id="Rb693439af80345f4"/>
+    <p:sldId xmlns:r="http://schemas.openxmlformats.org/officeDocument/2006/relationships" id="268" r:id="Rf6ce738a9d4a4f4f"/>
+    <p:sldId xmlns:r="http://schemas.openxmlformats.org/officeDocument/2006/relationships" id="269" r:id="Rd109a30048754d07"/>
   </p:sldIdLst>
   <p:sldSz cx="12192000" cy="6858000"/>
   <p:notesSz cx="6858000" cy="9144000"/>
@@ -1487,7 +1487,7 @@
   </p:cSld>
   <p:clrMap bg1="lt1" tx1="dk1" bg2="lt2" tx2="dk2" accent1="accent1" accent2="accent2" accent3="accent3" accent4="accent4" accent5="accent5" accent6="accent6" hlink="hlink" folHlink="folHlink"/>
   <p:sldLayoutIdLst>
-    <p:sldLayoutId xmlns:r="http://schemas.openxmlformats.org/officeDocument/2006/relationships" id="2147483649" r:id="R06fe92fd833a4ccb"/>
+    <p:sldLayoutId xmlns:r="http://schemas.openxmlformats.org/officeDocument/2006/relationships" id="2147483649" r:id="Rca99b149c4f34792"/>
   </p:sldLayoutIdLst>
   <p:hf sldNum="0" hdr="0" ftr="0" dt="0"/>
   <p:txStyles>
@@ -2058,7 +2058,7 @@
           <p:cNvPr id="2" name="Shape 0">
             <a:extLst xmlns:a="http://schemas.openxmlformats.org/drawingml/2006/main">
               <a:ext uri="{FF2B5EF4-FFF2-40B4-BE49-F238E27FC236}">
-                <a16:creationId xmlns:a16="http://schemas.microsoft.com/office/drawing/2014/main" id="{EBA027D7-BD20-4D86-BF91-71B1A637061D}"/>
+                <a16:creationId xmlns:a16="http://schemas.microsoft.com/office/drawing/2014/main" id="{646D9ED5-BE86-40FB-BF16-9A2EFE0D10D8}"/>
               </a:ext>
             </a:extLst>
           </p:cNvPr>
@@ -2091,7 +2091,7 @@
           <p:cNvPr id="3" name="Shape 1">
             <a:extLst xmlns:a="http://schemas.openxmlformats.org/drawingml/2006/main">
               <a:ext uri="{FF2B5EF4-FFF2-40B4-BE49-F238E27FC236}">
-                <a16:creationId xmlns:a16="http://schemas.microsoft.com/office/drawing/2014/main" id="{F9372D96-1F16-415B-B755-3322B745E7C4}"/>
+                <a16:creationId xmlns:a16="http://schemas.microsoft.com/office/drawing/2014/main" id="{642180D7-7E83-4534-B5D6-69AE70404637}"/>
               </a:ext>
             </a:extLst>
           </p:cNvPr>
@@ -2124,7 +2124,7 @@
           <p:cNvPr id="4" name="Text 2">
             <a:extLst xmlns:a="http://schemas.openxmlformats.org/drawingml/2006/main">
               <a:ext uri="{FF2B5EF4-FFF2-40B4-BE49-F238E27FC236}">
-                <a16:creationId xmlns:a16="http://schemas.microsoft.com/office/drawing/2014/main" id="{80F0184D-1975-42FA-9355-141DC9DBAA59}"/>
+                <a16:creationId xmlns:a16="http://schemas.microsoft.com/office/drawing/2014/main" id="{D0D40019-3515-4DDA-8E21-2AA8CF49F6E7}"/>
               </a:ext>
             </a:extLst>
           </p:cNvPr>
@@ -2170,7 +2170,7 @@
           <p:cNvPr id="5" name="Text 3">
             <a:extLst xmlns:a="http://schemas.openxmlformats.org/drawingml/2006/main">
               <a:ext uri="{FF2B5EF4-FFF2-40B4-BE49-F238E27FC236}">
-                <a16:creationId xmlns:a16="http://schemas.microsoft.com/office/drawing/2014/main" id="{434A25F3-7F13-4165-B27E-72D37A03A66D}"/>
+                <a16:creationId xmlns:a16="http://schemas.microsoft.com/office/drawing/2014/main" id="{55FF8C36-BEC6-4DC3-AAE3-38D255EB4805}"/>
               </a:ext>
             </a:extLst>
           </p:cNvPr>
@@ -2216,7 +2216,7 @@
           <p:cNvPr id="6" name="Text 4">
             <a:extLst xmlns:a="http://schemas.openxmlformats.org/drawingml/2006/main">
               <a:ext uri="{FF2B5EF4-FFF2-40B4-BE49-F238E27FC236}">
-                <a16:creationId xmlns:a16="http://schemas.microsoft.com/office/drawing/2014/main" id="{5B557A93-1C17-44B2-B1D0-A63903E98E45}"/>
+                <a16:creationId xmlns:a16="http://schemas.microsoft.com/office/drawing/2014/main" id="{06112AE0-9EC9-40B8-8320-53EF3DFD1773}"/>
               </a:ext>
             </a:extLst>
           </p:cNvPr>
@@ -2262,7 +2262,7 @@
           <p:cNvPr id="7" name="Text 5">
             <a:extLst xmlns:a="http://schemas.openxmlformats.org/drawingml/2006/main">
               <a:ext uri="{FF2B5EF4-FFF2-40B4-BE49-F238E27FC236}">
-                <a16:creationId xmlns:a16="http://schemas.microsoft.com/office/drawing/2014/main" id="{1FD55F44-2A0B-4AAD-9A60-0BE28A7E3B66}"/>
+                <a16:creationId xmlns:a16="http://schemas.microsoft.com/office/drawing/2014/main" id="{2CE81FED-00FE-469E-92E1-31E81E1591F7}"/>
               </a:ext>
             </a:extLst>
           </p:cNvPr>
@@ -2349,7 +2349,7 @@
     </p:spTree>
     <p:extLst>
       <p:ext uri="{BB962C8B-B14F-4D97-AF65-F5344CB8AC3E}">
-        <p14:creationId xmlns:p14="http://schemas.microsoft.com/office/powerpoint/2010/main" val="396286089"/>
+        <p14:creationId xmlns:p14="http://schemas.microsoft.com/office/powerpoint/2010/main" val="2100731000"/>
       </p:ext>
     </p:extLst>
   </p:cSld>
@@ -2380,7 +2380,7 @@
           <p:cNvPr id="2" name="Shape 0">
             <a:extLst xmlns:a="http://schemas.openxmlformats.org/drawingml/2006/main">
               <a:ext uri="{FF2B5EF4-FFF2-40B4-BE49-F238E27FC236}">
-                <a16:creationId xmlns:a16="http://schemas.microsoft.com/office/drawing/2014/main" id="{7528BE3A-4C66-450E-88A4-DD4DA61689B5}"/>
+                <a16:creationId xmlns:a16="http://schemas.microsoft.com/office/drawing/2014/main" id="{BC59B57D-2471-4449-9ED8-7D521A4A44B0}"/>
               </a:ext>
             </a:extLst>
           </p:cNvPr>
@@ -2417,7 +2417,7 @@
           <p:nvPr/>
         </p:nvPicPr>
         <p:blipFill>
-          <a:blip xmlns:r="http://schemas.openxmlformats.org/officeDocument/2006/relationships" xmlns:a="http://schemas.openxmlformats.org/drawingml/2006/main" r:embed="R901dea51037b4cef"/>
+          <a:blip xmlns:r="http://schemas.openxmlformats.org/officeDocument/2006/relationships" xmlns:a="http://schemas.openxmlformats.org/drawingml/2006/main" r:embed="Ra1e3ad76f0ce4810"/>
           <a:stretch xmlns:a="http://schemas.openxmlformats.org/drawingml/2006/main">
             <a:fillRect l="0" t="0" r="0" b="0"/>
           </a:stretch>
@@ -2437,7 +2437,7 @@
           <p:cNvPr id="4" name="Text 1">
             <a:extLst xmlns:a="http://schemas.openxmlformats.org/drawingml/2006/main">
               <a:ext uri="{FF2B5EF4-FFF2-40B4-BE49-F238E27FC236}">
-                <a16:creationId xmlns:a16="http://schemas.microsoft.com/office/drawing/2014/main" id="{6C623219-61F6-4C52-B25E-880F869E720C}"/>
+                <a16:creationId xmlns:a16="http://schemas.microsoft.com/office/drawing/2014/main" id="{7CC9267D-A8B7-474D-90B0-ECCD13FC0D6A}"/>
               </a:ext>
             </a:extLst>
           </p:cNvPr>
@@ -2483,7 +2483,7 @@
           <p:cNvPr id="5" name="Text 2">
             <a:extLst xmlns:a="http://schemas.openxmlformats.org/drawingml/2006/main">
               <a:ext uri="{FF2B5EF4-FFF2-40B4-BE49-F238E27FC236}">
-                <a16:creationId xmlns:a16="http://schemas.microsoft.com/office/drawing/2014/main" id="{F64DB0E5-8BE1-4231-8816-CE105348FCF1}"/>
+                <a16:creationId xmlns:a16="http://schemas.microsoft.com/office/drawing/2014/main" id="{FACE8274-2B66-457F-BAC2-E3900F3B2ACF}"/>
               </a:ext>
             </a:extLst>
           </p:cNvPr>
@@ -2533,7 +2533,7 @@
           <p:nvPr/>
         </p:nvPicPr>
         <p:blipFill>
-          <a:blip xmlns:r="http://schemas.openxmlformats.org/officeDocument/2006/relationships" xmlns:a="http://schemas.openxmlformats.org/drawingml/2006/main" r:embed="Rccc04d622f624caf"/>
+          <a:blip xmlns:r="http://schemas.openxmlformats.org/officeDocument/2006/relationships" xmlns:a="http://schemas.openxmlformats.org/drawingml/2006/main" r:embed="R84d8c95631c64923"/>
           <a:stretch xmlns:a="http://schemas.openxmlformats.org/drawingml/2006/main">
             <a:fillRect l="0" t="0" r="0" b="0"/>
           </a:stretch>
@@ -2553,7 +2553,7 @@
           <p:cNvPr id="7" name="Text 3">
             <a:extLst xmlns:a="http://schemas.openxmlformats.org/drawingml/2006/main">
               <a:ext uri="{FF2B5EF4-FFF2-40B4-BE49-F238E27FC236}">
-                <a16:creationId xmlns:a16="http://schemas.microsoft.com/office/drawing/2014/main" id="{16EF7412-DF21-475A-BC7C-7BFF774AF351}"/>
+                <a16:creationId xmlns:a16="http://schemas.microsoft.com/office/drawing/2014/main" id="{0E4DDDA9-096A-4CB6-9F29-8DA7D6D272DC}"/>
               </a:ext>
             </a:extLst>
           </p:cNvPr>
@@ -2599,7 +2599,7 @@
           <p:cNvPr id="8" name="Text 4">
             <a:extLst xmlns:a="http://schemas.openxmlformats.org/drawingml/2006/main">
               <a:ext uri="{FF2B5EF4-FFF2-40B4-BE49-F238E27FC236}">
-                <a16:creationId xmlns:a16="http://schemas.microsoft.com/office/drawing/2014/main" id="{804E3F3E-3594-4170-BB6D-85060F11C141}"/>
+                <a16:creationId xmlns:a16="http://schemas.microsoft.com/office/drawing/2014/main" id="{752FC835-9B63-4E83-9B91-806511BA8911}"/>
               </a:ext>
             </a:extLst>
           </p:cNvPr>
@@ -2691,7 +2691,7 @@
           <p:cNvPr id="9" name="Shape 5">
             <a:extLst xmlns:a="http://schemas.openxmlformats.org/drawingml/2006/main">
               <a:ext uri="{FF2B5EF4-FFF2-40B4-BE49-F238E27FC236}">
-                <a16:creationId xmlns:a16="http://schemas.microsoft.com/office/drawing/2014/main" id="{8FF53A82-6683-4BBC-A6DE-713C2B5AEB36}"/>
+                <a16:creationId xmlns:a16="http://schemas.microsoft.com/office/drawing/2014/main" id="{7111348C-C5F0-48E5-B552-BA75184E6286}"/>
               </a:ext>
             </a:extLst>
           </p:cNvPr>
@@ -2726,7 +2726,7 @@
           <p:cNvPr id="10" name="Shape 6">
             <a:extLst xmlns:a="http://schemas.openxmlformats.org/drawingml/2006/main">
               <a:ext uri="{FF2B5EF4-FFF2-40B4-BE49-F238E27FC236}">
-                <a16:creationId xmlns:a16="http://schemas.microsoft.com/office/drawing/2014/main" id="{59CA921D-2989-4C31-AE8B-9F884044A11A}"/>
+                <a16:creationId xmlns:a16="http://schemas.microsoft.com/office/drawing/2014/main" id="{19C22EE7-826E-49AE-9D1B-422ECFCA3DC2}"/>
               </a:ext>
             </a:extLst>
           </p:cNvPr>
@@ -2763,7 +2763,7 @@
           <p:nvPr/>
         </p:nvPicPr>
         <p:blipFill>
-          <a:blip xmlns:r="http://schemas.openxmlformats.org/officeDocument/2006/relationships" xmlns:a="http://schemas.openxmlformats.org/drawingml/2006/main" r:embed="Rbe205a700bf849ae"/>
+          <a:blip xmlns:r="http://schemas.openxmlformats.org/officeDocument/2006/relationships" xmlns:a="http://schemas.openxmlformats.org/drawingml/2006/main" r:embed="R06ae71dab1ef4147"/>
           <a:stretch xmlns:a="http://schemas.openxmlformats.org/drawingml/2006/main">
             <a:fillRect l="0" t="0" r="0" b="0"/>
           </a:stretch>
@@ -2783,7 +2783,7 @@
           <p:cNvPr id="12" name="Text 7">
             <a:extLst xmlns:a="http://schemas.openxmlformats.org/drawingml/2006/main">
               <a:ext uri="{FF2B5EF4-FFF2-40B4-BE49-F238E27FC236}">
-                <a16:creationId xmlns:a16="http://schemas.microsoft.com/office/drawing/2014/main" id="{A00A5728-3ACC-4DE4-B3CA-B48569121356}"/>
+                <a16:creationId xmlns:a16="http://schemas.microsoft.com/office/drawing/2014/main" id="{41CFA016-F4C8-4DE1-B6C1-484637DF818A}"/>
               </a:ext>
             </a:extLst>
           </p:cNvPr>
@@ -2829,7 +2829,7 @@
           <p:cNvPr id="13" name="Text 8">
             <a:extLst xmlns:a="http://schemas.openxmlformats.org/drawingml/2006/main">
               <a:ext uri="{FF2B5EF4-FFF2-40B4-BE49-F238E27FC236}">
-                <a16:creationId xmlns:a16="http://schemas.microsoft.com/office/drawing/2014/main" id="{D2772F1F-3196-4D1F-9FF1-4064F1C63967}"/>
+                <a16:creationId xmlns:a16="http://schemas.microsoft.com/office/drawing/2014/main" id="{DB3E8E78-AD51-41EB-87E5-9215C07D471F}"/>
               </a:ext>
             </a:extLst>
           </p:cNvPr>
@@ -2946,7 +2946,7 @@
           <p:cNvPr id="14" name="Text 9">
             <a:extLst xmlns:a="http://schemas.openxmlformats.org/drawingml/2006/main">
               <a:ext uri="{FF2B5EF4-FFF2-40B4-BE49-F238E27FC236}">
-                <a16:creationId xmlns:a16="http://schemas.microsoft.com/office/drawing/2014/main" id="{923B8383-1B8D-4C98-8526-28DD3C464DCD}"/>
+                <a16:creationId xmlns:a16="http://schemas.microsoft.com/office/drawing/2014/main" id="{A60BEB2F-B1E2-4ED7-9D5A-82EA67F8D856}"/>
               </a:ext>
             </a:extLst>
           </p:cNvPr>
@@ -2992,7 +2992,7 @@
           <p:cNvPr id="15" name="Text 10">
             <a:extLst xmlns:a="http://schemas.openxmlformats.org/drawingml/2006/main">
               <a:ext uri="{FF2B5EF4-FFF2-40B4-BE49-F238E27FC236}">
-                <a16:creationId xmlns:a16="http://schemas.microsoft.com/office/drawing/2014/main" id="{E310C3A4-0112-489B-83BC-A55B5FE04AF3}"/>
+                <a16:creationId xmlns:a16="http://schemas.microsoft.com/office/drawing/2014/main" id="{A322C90D-839D-42C3-B9D3-3C8D19A19542}"/>
               </a:ext>
             </a:extLst>
           </p:cNvPr>
@@ -3038,7 +3038,7 @@
           <p:cNvPr id="16" name="Text 11">
             <a:extLst xmlns:a="http://schemas.openxmlformats.org/drawingml/2006/main">
               <a:ext uri="{FF2B5EF4-FFF2-40B4-BE49-F238E27FC236}">
-                <a16:creationId xmlns:a16="http://schemas.microsoft.com/office/drawing/2014/main" id="{723D2FB1-3E57-4D04-B253-A8445295274F}"/>
+                <a16:creationId xmlns:a16="http://schemas.microsoft.com/office/drawing/2014/main" id="{020F7B02-F7D2-40E6-AD4C-09917EB6D657}"/>
               </a:ext>
             </a:extLst>
           </p:cNvPr>
@@ -3082,7 +3082,7 @@
     </p:spTree>
     <p:extLst>
       <p:ext uri="{BB962C8B-B14F-4D97-AF65-F5344CB8AC3E}">
-        <p14:creationId xmlns:p14="http://schemas.microsoft.com/office/powerpoint/2010/main" val="97274198"/>
+        <p14:creationId xmlns:p14="http://schemas.microsoft.com/office/powerpoint/2010/main" val="1931525031"/>
       </p:ext>
     </p:extLst>
   </p:cSld>
@@ -3113,7 +3113,7 @@
           <p:cNvPr id="2" name="Shape 0">
             <a:extLst xmlns:a="http://schemas.openxmlformats.org/drawingml/2006/main">
               <a:ext uri="{FF2B5EF4-FFF2-40B4-BE49-F238E27FC236}">
-                <a16:creationId xmlns:a16="http://schemas.microsoft.com/office/drawing/2014/main" id="{7BD0CAE9-01E7-4F6E-BB98-AAA918699969}"/>
+                <a16:creationId xmlns:a16="http://schemas.microsoft.com/office/drawing/2014/main" id="{4E4AE89C-B451-4CF0-86B4-EC5987843FEE}"/>
               </a:ext>
             </a:extLst>
           </p:cNvPr>
@@ -3150,7 +3150,7 @@
           <p:nvPr/>
         </p:nvPicPr>
         <p:blipFill>
-          <a:blip xmlns:r="http://schemas.openxmlformats.org/officeDocument/2006/relationships" xmlns:a="http://schemas.openxmlformats.org/drawingml/2006/main" r:embed="Re58e07171ded4b9a"/>
+          <a:blip xmlns:r="http://schemas.openxmlformats.org/officeDocument/2006/relationships" xmlns:a="http://schemas.openxmlformats.org/drawingml/2006/main" r:embed="R2679c3d760814065"/>
           <a:stretch xmlns:a="http://schemas.openxmlformats.org/drawingml/2006/main">
             <a:fillRect l="0" t="0" r="0" b="0"/>
           </a:stretch>
@@ -3170,7 +3170,7 @@
           <p:cNvPr id="4" name="Text 1">
             <a:extLst xmlns:a="http://schemas.openxmlformats.org/drawingml/2006/main">
               <a:ext uri="{FF2B5EF4-FFF2-40B4-BE49-F238E27FC236}">
-                <a16:creationId xmlns:a16="http://schemas.microsoft.com/office/drawing/2014/main" id="{7E2CD32C-E307-4118-8C02-F0B8C06D0432}"/>
+                <a16:creationId xmlns:a16="http://schemas.microsoft.com/office/drawing/2014/main" id="{DF9DE587-7D35-4BDF-966A-D49EE8AD663A}"/>
               </a:ext>
             </a:extLst>
           </p:cNvPr>
@@ -3216,7 +3216,7 @@
           <p:cNvPr id="5" name="Text 2">
             <a:extLst xmlns:a="http://schemas.openxmlformats.org/drawingml/2006/main">
               <a:ext uri="{FF2B5EF4-FFF2-40B4-BE49-F238E27FC236}">
-                <a16:creationId xmlns:a16="http://schemas.microsoft.com/office/drawing/2014/main" id="{F0AE24C7-DC1D-4C10-869B-E5579ACE2AC8}"/>
+                <a16:creationId xmlns:a16="http://schemas.microsoft.com/office/drawing/2014/main" id="{4BAE314A-7A22-408D-AE10-CC2A6EDE423C}"/>
               </a:ext>
             </a:extLst>
           </p:cNvPr>
@@ -3266,7 +3266,7 @@
           <p:nvPr/>
         </p:nvPicPr>
         <p:blipFill>
-          <a:blip xmlns:r="http://schemas.openxmlformats.org/officeDocument/2006/relationships" xmlns:a="http://schemas.openxmlformats.org/drawingml/2006/main" r:embed="R1f928bb8a0014df7"/>
+          <a:blip xmlns:r="http://schemas.openxmlformats.org/officeDocument/2006/relationships" xmlns:a="http://schemas.openxmlformats.org/drawingml/2006/main" r:embed="Rb00e9b915c7f481b"/>
           <a:stretch xmlns:a="http://schemas.openxmlformats.org/drawingml/2006/main">
             <a:fillRect l="0" t="0" r="0" b="0"/>
           </a:stretch>
@@ -3286,7 +3286,7 @@
           <p:cNvPr id="7" name="Text 3">
             <a:extLst xmlns:a="http://schemas.openxmlformats.org/drawingml/2006/main">
               <a:ext uri="{FF2B5EF4-FFF2-40B4-BE49-F238E27FC236}">
-                <a16:creationId xmlns:a16="http://schemas.microsoft.com/office/drawing/2014/main" id="{17421D28-BA2E-4CBB-8C30-92E60513DA9E}"/>
+                <a16:creationId xmlns:a16="http://schemas.microsoft.com/office/drawing/2014/main" id="{FE8ED109-C0A0-4AC2-9D40-CA5960DD0B85}"/>
               </a:ext>
             </a:extLst>
           </p:cNvPr>
@@ -3332,7 +3332,7 @@
           <p:cNvPr id="8" name="Text 4">
             <a:extLst xmlns:a="http://schemas.openxmlformats.org/drawingml/2006/main">
               <a:ext uri="{FF2B5EF4-FFF2-40B4-BE49-F238E27FC236}">
-                <a16:creationId xmlns:a16="http://schemas.microsoft.com/office/drawing/2014/main" id="{0590CD8D-222F-4278-A92A-0491970328A3}"/>
+                <a16:creationId xmlns:a16="http://schemas.microsoft.com/office/drawing/2014/main" id="{E2E5F610-F700-496C-B00C-916AABD2897E}"/>
               </a:ext>
             </a:extLst>
           </p:cNvPr>
@@ -3424,7 +3424,7 @@
           <p:cNvPr id="9" name="Shape 5">
             <a:extLst xmlns:a="http://schemas.openxmlformats.org/drawingml/2006/main">
               <a:ext uri="{FF2B5EF4-FFF2-40B4-BE49-F238E27FC236}">
-                <a16:creationId xmlns:a16="http://schemas.microsoft.com/office/drawing/2014/main" id="{42A51818-00EB-4C70-AA57-51AA393B626A}"/>
+                <a16:creationId xmlns:a16="http://schemas.microsoft.com/office/drawing/2014/main" id="{FB17D073-527A-4F96-8CB4-EEBA83533BC2}"/>
               </a:ext>
             </a:extLst>
           </p:cNvPr>
@@ -3459,7 +3459,7 @@
           <p:cNvPr id="10" name="Shape 6">
             <a:extLst xmlns:a="http://schemas.openxmlformats.org/drawingml/2006/main">
               <a:ext uri="{FF2B5EF4-FFF2-40B4-BE49-F238E27FC236}">
-                <a16:creationId xmlns:a16="http://schemas.microsoft.com/office/drawing/2014/main" id="{3430D019-6D42-4263-935A-9FF5DA50E1DE}"/>
+                <a16:creationId xmlns:a16="http://schemas.microsoft.com/office/drawing/2014/main" id="{50FEF867-F4E0-44CB-A41C-483C990066C4}"/>
               </a:ext>
             </a:extLst>
           </p:cNvPr>
@@ -3496,7 +3496,7 @@
           <p:nvPr/>
         </p:nvPicPr>
         <p:blipFill>
-          <a:blip xmlns:r="http://schemas.openxmlformats.org/officeDocument/2006/relationships" xmlns:a="http://schemas.openxmlformats.org/drawingml/2006/main" r:embed="R0ad4b222a052428b"/>
+          <a:blip xmlns:r="http://schemas.openxmlformats.org/officeDocument/2006/relationships" xmlns:a="http://schemas.openxmlformats.org/drawingml/2006/main" r:embed="R92cddc44a8e94d0e"/>
           <a:stretch xmlns:a="http://schemas.openxmlformats.org/drawingml/2006/main">
             <a:fillRect l="0" t="0" r="0" b="0"/>
           </a:stretch>
@@ -3516,7 +3516,7 @@
           <p:cNvPr id="12" name="Text 7">
             <a:extLst xmlns:a="http://schemas.openxmlformats.org/drawingml/2006/main">
               <a:ext uri="{FF2B5EF4-FFF2-40B4-BE49-F238E27FC236}">
-                <a16:creationId xmlns:a16="http://schemas.microsoft.com/office/drawing/2014/main" id="{D5B010AA-EF02-45B3-8AB5-ADA3E90B03BC}"/>
+                <a16:creationId xmlns:a16="http://schemas.microsoft.com/office/drawing/2014/main" id="{647D1B44-BD5E-45C3-8E5B-61E50C718619}"/>
               </a:ext>
             </a:extLst>
           </p:cNvPr>
@@ -3562,7 +3562,7 @@
           <p:cNvPr id="13" name="Text 8">
             <a:extLst xmlns:a="http://schemas.openxmlformats.org/drawingml/2006/main">
               <a:ext uri="{FF2B5EF4-FFF2-40B4-BE49-F238E27FC236}">
-                <a16:creationId xmlns:a16="http://schemas.microsoft.com/office/drawing/2014/main" id="{2B47E891-CCDE-4F2A-B858-1E5568BF5007}"/>
+                <a16:creationId xmlns:a16="http://schemas.microsoft.com/office/drawing/2014/main" id="{7AAAAAF9-51E3-4A15-B44D-9EE04019FE33}"/>
               </a:ext>
             </a:extLst>
           </p:cNvPr>
@@ -3679,7 +3679,7 @@
           <p:cNvPr id="14" name="Text 9">
             <a:extLst xmlns:a="http://schemas.openxmlformats.org/drawingml/2006/main">
               <a:ext uri="{FF2B5EF4-FFF2-40B4-BE49-F238E27FC236}">
-                <a16:creationId xmlns:a16="http://schemas.microsoft.com/office/drawing/2014/main" id="{C4A29272-80B3-4AC2-8244-AF85F0AC26B3}"/>
+                <a16:creationId xmlns:a16="http://schemas.microsoft.com/office/drawing/2014/main" id="{3FB39403-B96F-4374-A20C-1E787D75517A}"/>
               </a:ext>
             </a:extLst>
           </p:cNvPr>
@@ -3725,7 +3725,7 @@
           <p:cNvPr id="15" name="Text 10">
             <a:extLst xmlns:a="http://schemas.openxmlformats.org/drawingml/2006/main">
               <a:ext uri="{FF2B5EF4-FFF2-40B4-BE49-F238E27FC236}">
-                <a16:creationId xmlns:a16="http://schemas.microsoft.com/office/drawing/2014/main" id="{809C8379-C24E-4E3B-A193-206A09EC794B}"/>
+                <a16:creationId xmlns:a16="http://schemas.microsoft.com/office/drawing/2014/main" id="{1A64AD50-A816-49D5-8C5F-BF0D95B1EE01}"/>
               </a:ext>
             </a:extLst>
           </p:cNvPr>
@@ -3771,7 +3771,7 @@
           <p:cNvPr id="16" name="Text 11">
             <a:extLst xmlns:a="http://schemas.openxmlformats.org/drawingml/2006/main">
               <a:ext uri="{FF2B5EF4-FFF2-40B4-BE49-F238E27FC236}">
-                <a16:creationId xmlns:a16="http://schemas.microsoft.com/office/drawing/2014/main" id="{EE6BE635-BF59-41D6-8CB8-071144338063}"/>
+                <a16:creationId xmlns:a16="http://schemas.microsoft.com/office/drawing/2014/main" id="{F96FD61F-D20D-4FB0-9992-F1611F282144}"/>
               </a:ext>
             </a:extLst>
           </p:cNvPr>
@@ -3815,7 +3815,7 @@
     </p:spTree>
     <p:extLst>
       <p:ext uri="{BB962C8B-B14F-4D97-AF65-F5344CB8AC3E}">
-        <p14:creationId xmlns:p14="http://schemas.microsoft.com/office/powerpoint/2010/main" val="1764075020"/>
+        <p14:creationId xmlns:p14="http://schemas.microsoft.com/office/powerpoint/2010/main" val="1079283811"/>
       </p:ext>
     </p:extLst>
   </p:cSld>
@@ -3846,7 +3846,7 @@
           <p:cNvPr id="2" name="Shape 0">
             <a:extLst xmlns:a="http://schemas.openxmlformats.org/drawingml/2006/main">
               <a:ext uri="{FF2B5EF4-FFF2-40B4-BE49-F238E27FC236}">
-                <a16:creationId xmlns:a16="http://schemas.microsoft.com/office/drawing/2014/main" id="{C56FF234-32EA-4CC6-88C1-7BC4059F5E5B}"/>
+                <a16:creationId xmlns:a16="http://schemas.microsoft.com/office/drawing/2014/main" id="{E3C10E29-E055-4866-86FC-AAD3A518B217}"/>
               </a:ext>
             </a:extLst>
           </p:cNvPr>
@@ -3883,7 +3883,7 @@
           <p:nvPr/>
         </p:nvPicPr>
         <p:blipFill>
-          <a:blip xmlns:r="http://schemas.openxmlformats.org/officeDocument/2006/relationships" xmlns:a="http://schemas.openxmlformats.org/drawingml/2006/main" r:embed="R1394a59f41d64747"/>
+          <a:blip xmlns:r="http://schemas.openxmlformats.org/officeDocument/2006/relationships" xmlns:a="http://schemas.openxmlformats.org/drawingml/2006/main" r:embed="R40b29ed2fbe34e6e"/>
           <a:stretch xmlns:a="http://schemas.openxmlformats.org/drawingml/2006/main">
             <a:fillRect l="0" t="0" r="0" b="0"/>
           </a:stretch>
@@ -3903,7 +3903,7 @@
           <p:cNvPr id="4" name="Text 1">
             <a:extLst xmlns:a="http://schemas.openxmlformats.org/drawingml/2006/main">
               <a:ext uri="{FF2B5EF4-FFF2-40B4-BE49-F238E27FC236}">
-                <a16:creationId xmlns:a16="http://schemas.microsoft.com/office/drawing/2014/main" id="{8D236DBE-6381-42B1-975E-F21E8E0D7C45}"/>
+                <a16:creationId xmlns:a16="http://schemas.microsoft.com/office/drawing/2014/main" id="{FFE0DCEF-A38B-4FBB-A15A-C0C621E841D3}"/>
               </a:ext>
             </a:extLst>
           </p:cNvPr>
@@ -3949,7 +3949,7 @@
           <p:cNvPr id="5" name="Text 2">
             <a:extLst xmlns:a="http://schemas.openxmlformats.org/drawingml/2006/main">
               <a:ext uri="{FF2B5EF4-FFF2-40B4-BE49-F238E27FC236}">
-                <a16:creationId xmlns:a16="http://schemas.microsoft.com/office/drawing/2014/main" id="{A6F3DB92-9A0A-494B-A726-4A3E68502FD6}"/>
+                <a16:creationId xmlns:a16="http://schemas.microsoft.com/office/drawing/2014/main" id="{E00C56DF-26D7-4C7F-8072-BF2FFAC08B19}"/>
               </a:ext>
             </a:extLst>
           </p:cNvPr>
@@ -3999,7 +3999,7 @@
           <p:nvPr/>
         </p:nvPicPr>
         <p:blipFill>
-          <a:blip xmlns:r="http://schemas.openxmlformats.org/officeDocument/2006/relationships" xmlns:a="http://schemas.openxmlformats.org/drawingml/2006/main" r:embed="R0be66e3ab8e04dba"/>
+          <a:blip xmlns:r="http://schemas.openxmlformats.org/officeDocument/2006/relationships" xmlns:a="http://schemas.openxmlformats.org/drawingml/2006/main" r:embed="Rc48b6a9dbeef4caf"/>
           <a:stretch xmlns:a="http://schemas.openxmlformats.org/drawingml/2006/main">
             <a:fillRect l="0" t="0" r="0" b="0"/>
           </a:stretch>
@@ -4019,7 +4019,7 @@
           <p:cNvPr id="7" name="Text 3">
             <a:extLst xmlns:a="http://schemas.openxmlformats.org/drawingml/2006/main">
               <a:ext uri="{FF2B5EF4-FFF2-40B4-BE49-F238E27FC236}">
-                <a16:creationId xmlns:a16="http://schemas.microsoft.com/office/drawing/2014/main" id="{93D87945-A93F-468F-AE97-A9827A4BCB79}"/>
+                <a16:creationId xmlns:a16="http://schemas.microsoft.com/office/drawing/2014/main" id="{E3DA30FC-024D-4B7B-B7A6-A74F6402C9C5}"/>
               </a:ext>
             </a:extLst>
           </p:cNvPr>
@@ -4065,7 +4065,7 @@
           <p:cNvPr id="8" name="Text 4">
             <a:extLst xmlns:a="http://schemas.openxmlformats.org/drawingml/2006/main">
               <a:ext uri="{FF2B5EF4-FFF2-40B4-BE49-F238E27FC236}">
-                <a16:creationId xmlns:a16="http://schemas.microsoft.com/office/drawing/2014/main" id="{82FFEB43-28F8-4A23-85BB-EE7F29F4BF78}"/>
+                <a16:creationId xmlns:a16="http://schemas.microsoft.com/office/drawing/2014/main" id="{C32E0E15-599E-419B-9B9B-401F22D1A165}"/>
               </a:ext>
             </a:extLst>
           </p:cNvPr>
@@ -4157,7 +4157,7 @@
           <p:cNvPr id="9" name="Shape 5">
             <a:extLst xmlns:a="http://schemas.openxmlformats.org/drawingml/2006/main">
               <a:ext uri="{FF2B5EF4-FFF2-40B4-BE49-F238E27FC236}">
-                <a16:creationId xmlns:a16="http://schemas.microsoft.com/office/drawing/2014/main" id="{70790AB8-9CCA-444F-B827-0DA286348353}"/>
+                <a16:creationId xmlns:a16="http://schemas.microsoft.com/office/drawing/2014/main" id="{63C4549F-07DB-4B32-BD7E-52EDFC6EA6B9}"/>
               </a:ext>
             </a:extLst>
           </p:cNvPr>
@@ -4192,7 +4192,7 @@
           <p:cNvPr id="10" name="Shape 6">
             <a:extLst xmlns:a="http://schemas.openxmlformats.org/drawingml/2006/main">
               <a:ext uri="{FF2B5EF4-FFF2-40B4-BE49-F238E27FC236}">
-                <a16:creationId xmlns:a16="http://schemas.microsoft.com/office/drawing/2014/main" id="{44DA3D9E-4DA9-48E9-91E4-12955D09B238}"/>
+                <a16:creationId xmlns:a16="http://schemas.microsoft.com/office/drawing/2014/main" id="{D908347C-6660-46C4-A3B9-D8F4888B97FB}"/>
               </a:ext>
             </a:extLst>
           </p:cNvPr>
@@ -4229,7 +4229,7 @@
           <p:nvPr/>
         </p:nvPicPr>
         <p:blipFill>
-          <a:blip xmlns:r="http://schemas.openxmlformats.org/officeDocument/2006/relationships" xmlns:a="http://schemas.openxmlformats.org/drawingml/2006/main" r:embed="Rf77873f62e104b17"/>
+          <a:blip xmlns:r="http://schemas.openxmlformats.org/officeDocument/2006/relationships" xmlns:a="http://schemas.openxmlformats.org/drawingml/2006/main" r:embed="R780b6a3cff5e45a9"/>
           <a:stretch xmlns:a="http://schemas.openxmlformats.org/drawingml/2006/main">
             <a:fillRect l="0" t="0" r="0" b="0"/>
           </a:stretch>
@@ -4249,7 +4249,7 @@
           <p:cNvPr id="12" name="Text 7">
             <a:extLst xmlns:a="http://schemas.openxmlformats.org/drawingml/2006/main">
               <a:ext uri="{FF2B5EF4-FFF2-40B4-BE49-F238E27FC236}">
-                <a16:creationId xmlns:a16="http://schemas.microsoft.com/office/drawing/2014/main" id="{BD97BD32-2F3D-4CC8-8FCB-914CB3899A27}"/>
+                <a16:creationId xmlns:a16="http://schemas.microsoft.com/office/drawing/2014/main" id="{D6C7ED2A-FC65-453F-81DB-605042E7522A}"/>
               </a:ext>
             </a:extLst>
           </p:cNvPr>
@@ -4295,7 +4295,7 @@
           <p:cNvPr id="13" name="Text 8">
             <a:extLst xmlns:a="http://schemas.openxmlformats.org/drawingml/2006/main">
               <a:ext uri="{FF2B5EF4-FFF2-40B4-BE49-F238E27FC236}">
-                <a16:creationId xmlns:a16="http://schemas.microsoft.com/office/drawing/2014/main" id="{829FF966-30DF-4C1C-B03D-6D220FE89259}"/>
+                <a16:creationId xmlns:a16="http://schemas.microsoft.com/office/drawing/2014/main" id="{2D9799B0-4297-412B-A037-75357151C5BE}"/>
               </a:ext>
             </a:extLst>
           </p:cNvPr>
@@ -4412,7 +4412,7 @@
           <p:cNvPr id="14" name="Text 9">
             <a:extLst xmlns:a="http://schemas.openxmlformats.org/drawingml/2006/main">
               <a:ext uri="{FF2B5EF4-FFF2-40B4-BE49-F238E27FC236}">
-                <a16:creationId xmlns:a16="http://schemas.microsoft.com/office/drawing/2014/main" id="{6DCEBBFD-61BF-47AA-8D4D-AE0247BA4C0A}"/>
+                <a16:creationId xmlns:a16="http://schemas.microsoft.com/office/drawing/2014/main" id="{60D803D5-A028-4E55-825D-0FE028477A2F}"/>
               </a:ext>
             </a:extLst>
           </p:cNvPr>
@@ -4458,7 +4458,7 @@
           <p:cNvPr id="15" name="Text 10">
             <a:extLst xmlns:a="http://schemas.openxmlformats.org/drawingml/2006/main">
               <a:ext uri="{FF2B5EF4-FFF2-40B4-BE49-F238E27FC236}">
-                <a16:creationId xmlns:a16="http://schemas.microsoft.com/office/drawing/2014/main" id="{69EBDC0F-2AF8-486B-8156-D33AACD7570A}"/>
+                <a16:creationId xmlns:a16="http://schemas.microsoft.com/office/drawing/2014/main" id="{049CF628-6E27-4A21-B3F4-D56303A046AC}"/>
               </a:ext>
             </a:extLst>
           </p:cNvPr>
@@ -4504,7 +4504,7 @@
           <p:cNvPr id="16" name="Text 11">
             <a:extLst xmlns:a="http://schemas.openxmlformats.org/drawingml/2006/main">
               <a:ext uri="{FF2B5EF4-FFF2-40B4-BE49-F238E27FC236}">
-                <a16:creationId xmlns:a16="http://schemas.microsoft.com/office/drawing/2014/main" id="{92512A91-28D6-4782-AC26-0A362E9CB311}"/>
+                <a16:creationId xmlns:a16="http://schemas.microsoft.com/office/drawing/2014/main" id="{B016A084-02E8-4656-B860-5648929EB5A3}"/>
               </a:ext>
             </a:extLst>
           </p:cNvPr>
@@ -4548,7 +4548,7 @@
     </p:spTree>
     <p:extLst>
       <p:ext uri="{BB962C8B-B14F-4D97-AF65-F5344CB8AC3E}">
-        <p14:creationId xmlns:p14="http://schemas.microsoft.com/office/powerpoint/2010/main" val="1327110727"/>
+        <p14:creationId xmlns:p14="http://schemas.microsoft.com/office/powerpoint/2010/main" val="1876053176"/>
       </p:ext>
     </p:extLst>
   </p:cSld>
@@ -4579,7 +4579,7 @@
           <p:cNvPr id="2" name="Shape 0">
             <a:extLst xmlns:a="http://schemas.openxmlformats.org/drawingml/2006/main">
               <a:ext uri="{FF2B5EF4-FFF2-40B4-BE49-F238E27FC236}">
-                <a16:creationId xmlns:a16="http://schemas.microsoft.com/office/drawing/2014/main" id="{958A8C41-E5D4-43F9-956E-908EA88BC760}"/>
+                <a16:creationId xmlns:a16="http://schemas.microsoft.com/office/drawing/2014/main" id="{A45BF138-EC78-43FD-B73D-39DA63B6B8EA}"/>
               </a:ext>
             </a:extLst>
           </p:cNvPr>
@@ -4616,7 +4616,7 @@
           <p:nvPr/>
         </p:nvPicPr>
         <p:blipFill>
-          <a:blip xmlns:r="http://schemas.openxmlformats.org/officeDocument/2006/relationships" xmlns:a="http://schemas.openxmlformats.org/drawingml/2006/main" r:embed="R228b965cc93b447c"/>
+          <a:blip xmlns:r="http://schemas.openxmlformats.org/officeDocument/2006/relationships" xmlns:a="http://schemas.openxmlformats.org/drawingml/2006/main" r:embed="R30683c8593d140a5"/>
           <a:stretch xmlns:a="http://schemas.openxmlformats.org/drawingml/2006/main">
             <a:fillRect l="0" t="0" r="0" b="0"/>
           </a:stretch>
@@ -4636,7 +4636,7 @@
           <p:cNvPr id="4" name="Text 1">
             <a:extLst xmlns:a="http://schemas.openxmlformats.org/drawingml/2006/main">
               <a:ext uri="{FF2B5EF4-FFF2-40B4-BE49-F238E27FC236}">
-                <a16:creationId xmlns:a16="http://schemas.microsoft.com/office/drawing/2014/main" id="{457EC5BA-D028-4EAA-8988-60E9047E6537}"/>
+                <a16:creationId xmlns:a16="http://schemas.microsoft.com/office/drawing/2014/main" id="{D5C94CBB-B891-41A8-AB9A-940A51F2ADBA}"/>
               </a:ext>
             </a:extLst>
           </p:cNvPr>
@@ -4682,7 +4682,7 @@
           <p:cNvPr id="5" name="Text 2">
             <a:extLst xmlns:a="http://schemas.openxmlformats.org/drawingml/2006/main">
               <a:ext uri="{FF2B5EF4-FFF2-40B4-BE49-F238E27FC236}">
-                <a16:creationId xmlns:a16="http://schemas.microsoft.com/office/drawing/2014/main" id="{35040DCE-2021-4EB3-99C5-095B92E6A1FE}"/>
+                <a16:creationId xmlns:a16="http://schemas.microsoft.com/office/drawing/2014/main" id="{518370B5-92FD-4B0D-B491-FAFBF6BB4C35}"/>
               </a:ext>
             </a:extLst>
           </p:cNvPr>
@@ -4732,7 +4732,7 @@
           <p:nvPr/>
         </p:nvPicPr>
         <p:blipFill>
-          <a:blip xmlns:r="http://schemas.openxmlformats.org/officeDocument/2006/relationships" xmlns:a="http://schemas.openxmlformats.org/drawingml/2006/main" r:embed="R7c571821a73d48bb"/>
+          <a:blip xmlns:r="http://schemas.openxmlformats.org/officeDocument/2006/relationships" xmlns:a="http://schemas.openxmlformats.org/drawingml/2006/main" r:embed="Rff9765460cd249c0"/>
           <a:stretch xmlns:a="http://schemas.openxmlformats.org/drawingml/2006/main">
             <a:fillRect l="0" t="0" r="0" b="0"/>
           </a:stretch>
@@ -4752,7 +4752,7 @@
           <p:cNvPr id="7" name="Text 3">
             <a:extLst xmlns:a="http://schemas.openxmlformats.org/drawingml/2006/main">
               <a:ext uri="{FF2B5EF4-FFF2-40B4-BE49-F238E27FC236}">
-                <a16:creationId xmlns:a16="http://schemas.microsoft.com/office/drawing/2014/main" id="{BCD30946-18FA-4808-8A69-6EA1CA983F63}"/>
+                <a16:creationId xmlns:a16="http://schemas.microsoft.com/office/drawing/2014/main" id="{45AF5493-6A9A-48BA-86B1-C50F4883A3B3}"/>
               </a:ext>
             </a:extLst>
           </p:cNvPr>
@@ -4798,7 +4798,7 @@
           <p:cNvPr id="8" name="Text 4">
             <a:extLst xmlns:a="http://schemas.openxmlformats.org/drawingml/2006/main">
               <a:ext uri="{FF2B5EF4-FFF2-40B4-BE49-F238E27FC236}">
-                <a16:creationId xmlns:a16="http://schemas.microsoft.com/office/drawing/2014/main" id="{96A60042-E642-43C0-AEF9-4E0DCD066D57}"/>
+                <a16:creationId xmlns:a16="http://schemas.microsoft.com/office/drawing/2014/main" id="{455E3CFB-B280-40DD-813E-926B9728DB9B}"/>
               </a:ext>
             </a:extLst>
           </p:cNvPr>
@@ -4890,7 +4890,7 @@
           <p:cNvPr id="9" name="Shape 5">
             <a:extLst xmlns:a="http://schemas.openxmlformats.org/drawingml/2006/main">
               <a:ext uri="{FF2B5EF4-FFF2-40B4-BE49-F238E27FC236}">
-                <a16:creationId xmlns:a16="http://schemas.microsoft.com/office/drawing/2014/main" id="{9DA66B12-4CDC-49CE-A985-FB721499FA5C}"/>
+                <a16:creationId xmlns:a16="http://schemas.microsoft.com/office/drawing/2014/main" id="{EC2135BC-B656-4A5F-B66D-0BBFC1F3185C}"/>
               </a:ext>
             </a:extLst>
           </p:cNvPr>
@@ -4925,7 +4925,7 @@
           <p:cNvPr id="10" name="Shape 6">
             <a:extLst xmlns:a="http://schemas.openxmlformats.org/drawingml/2006/main">
               <a:ext uri="{FF2B5EF4-FFF2-40B4-BE49-F238E27FC236}">
-                <a16:creationId xmlns:a16="http://schemas.microsoft.com/office/drawing/2014/main" id="{87FE0B55-8B13-45F2-80D1-AE072DAC8A88}"/>
+                <a16:creationId xmlns:a16="http://schemas.microsoft.com/office/drawing/2014/main" id="{9BF1FF14-9A05-49E6-9386-6E2926A32D0A}"/>
               </a:ext>
             </a:extLst>
           </p:cNvPr>
@@ -4962,7 +4962,7 @@
           <p:nvPr/>
         </p:nvPicPr>
         <p:blipFill>
-          <a:blip xmlns:r="http://schemas.openxmlformats.org/officeDocument/2006/relationships" xmlns:a="http://schemas.openxmlformats.org/drawingml/2006/main" r:embed="R4f79791309594264"/>
+          <a:blip xmlns:r="http://schemas.openxmlformats.org/officeDocument/2006/relationships" xmlns:a="http://schemas.openxmlformats.org/drawingml/2006/main" r:embed="Ra9ab250f76044057"/>
           <a:stretch xmlns:a="http://schemas.openxmlformats.org/drawingml/2006/main">
             <a:fillRect l="0" t="0" r="0" b="0"/>
           </a:stretch>
@@ -4982,7 +4982,7 @@
           <p:cNvPr id="12" name="Text 7">
             <a:extLst xmlns:a="http://schemas.openxmlformats.org/drawingml/2006/main">
               <a:ext uri="{FF2B5EF4-FFF2-40B4-BE49-F238E27FC236}">
-                <a16:creationId xmlns:a16="http://schemas.microsoft.com/office/drawing/2014/main" id="{856C4051-F514-49E4-A3CC-46D8ABDBE819}"/>
+                <a16:creationId xmlns:a16="http://schemas.microsoft.com/office/drawing/2014/main" id="{D4E42240-02F7-4044-A4B2-7325A34A6F81}"/>
               </a:ext>
             </a:extLst>
           </p:cNvPr>
@@ -5028,7 +5028,7 @@
           <p:cNvPr id="13" name="Text 8">
             <a:extLst xmlns:a="http://schemas.openxmlformats.org/drawingml/2006/main">
               <a:ext uri="{FF2B5EF4-FFF2-40B4-BE49-F238E27FC236}">
-                <a16:creationId xmlns:a16="http://schemas.microsoft.com/office/drawing/2014/main" id="{6AE0BBAB-52FA-454D-9A8A-0A8B275A6069}"/>
+                <a16:creationId xmlns:a16="http://schemas.microsoft.com/office/drawing/2014/main" id="{C332D386-3F7C-47F8-A6AE-EE0FE3F9ABDE}"/>
               </a:ext>
             </a:extLst>
           </p:cNvPr>
@@ -5145,7 +5145,7 @@
           <p:cNvPr id="14" name="Text 9">
             <a:extLst xmlns:a="http://schemas.openxmlformats.org/drawingml/2006/main">
               <a:ext uri="{FF2B5EF4-FFF2-40B4-BE49-F238E27FC236}">
-                <a16:creationId xmlns:a16="http://schemas.microsoft.com/office/drawing/2014/main" id="{DF43C3AF-F775-4F23-B3F8-6CCC0130D016}"/>
+                <a16:creationId xmlns:a16="http://schemas.microsoft.com/office/drawing/2014/main" id="{4F2DDB6D-432B-4E98-B528-09A28DAD0E89}"/>
               </a:ext>
             </a:extLst>
           </p:cNvPr>
@@ -5191,7 +5191,7 @@
           <p:cNvPr id="15" name="Text 10">
             <a:extLst xmlns:a="http://schemas.openxmlformats.org/drawingml/2006/main">
               <a:ext uri="{FF2B5EF4-FFF2-40B4-BE49-F238E27FC236}">
-                <a16:creationId xmlns:a16="http://schemas.microsoft.com/office/drawing/2014/main" id="{DA839A29-FC30-4433-A53A-906470AF78C5}"/>
+                <a16:creationId xmlns:a16="http://schemas.microsoft.com/office/drawing/2014/main" id="{4DF2CFF5-EDB2-42B9-A73F-FF17B84429E8}"/>
               </a:ext>
             </a:extLst>
           </p:cNvPr>
@@ -5237,7 +5237,7 @@
           <p:cNvPr id="16" name="Text 11">
             <a:extLst xmlns:a="http://schemas.openxmlformats.org/drawingml/2006/main">
               <a:ext uri="{FF2B5EF4-FFF2-40B4-BE49-F238E27FC236}">
-                <a16:creationId xmlns:a16="http://schemas.microsoft.com/office/drawing/2014/main" id="{D8BADDCD-C112-4ABC-BBA9-CB8605AB3A98}"/>
+                <a16:creationId xmlns:a16="http://schemas.microsoft.com/office/drawing/2014/main" id="{9DEECCF6-C91A-4A3C-B7C5-89B652B6920B}"/>
               </a:ext>
             </a:extLst>
           </p:cNvPr>
@@ -5281,7 +5281,7 @@
     </p:spTree>
     <p:extLst>
       <p:ext uri="{BB962C8B-B14F-4D97-AF65-F5344CB8AC3E}">
-        <p14:creationId xmlns:p14="http://schemas.microsoft.com/office/powerpoint/2010/main" val="1819634323"/>
+        <p14:creationId xmlns:p14="http://schemas.microsoft.com/office/powerpoint/2010/main" val="1350409983"/>
       </p:ext>
     </p:extLst>
   </p:cSld>
@@ -5312,7 +5312,7 @@
           <p:cNvPr id="2" name="Shape 0">
             <a:extLst xmlns:a="http://schemas.openxmlformats.org/drawingml/2006/main">
               <a:ext uri="{FF2B5EF4-FFF2-40B4-BE49-F238E27FC236}">
-                <a16:creationId xmlns:a16="http://schemas.microsoft.com/office/drawing/2014/main" id="{E9B2BC48-743A-45D3-9371-B061B15D2942}"/>
+                <a16:creationId xmlns:a16="http://schemas.microsoft.com/office/drawing/2014/main" id="{4BFFEC7E-B310-458C-B379-B95201A78052}"/>
               </a:ext>
             </a:extLst>
           </p:cNvPr>
@@ -5345,7 +5345,7 @@
           <p:cNvPr id="3" name="Text 1">
             <a:extLst xmlns:a="http://schemas.openxmlformats.org/drawingml/2006/main">
               <a:ext uri="{FF2B5EF4-FFF2-40B4-BE49-F238E27FC236}">
-                <a16:creationId xmlns:a16="http://schemas.microsoft.com/office/drawing/2014/main" id="{B7647E1A-2DFD-4A4B-B9CA-FAD6D33AAB31}"/>
+                <a16:creationId xmlns:a16="http://schemas.microsoft.com/office/drawing/2014/main" id="{49BD7D62-3049-4D3F-BAA6-A809F8C6A7AE}"/>
               </a:ext>
             </a:extLst>
           </p:cNvPr>
@@ -5391,7 +5391,7 @@
           <p:cNvPr id="4" name="Shape 2">
             <a:extLst xmlns:a="http://schemas.openxmlformats.org/drawingml/2006/main">
               <a:ext uri="{FF2B5EF4-FFF2-40B4-BE49-F238E27FC236}">
-                <a16:creationId xmlns:a16="http://schemas.microsoft.com/office/drawing/2014/main" id="{729AC6AD-429E-42CD-8F0F-238B5DBC73A9}"/>
+                <a16:creationId xmlns:a16="http://schemas.microsoft.com/office/drawing/2014/main" id="{0432B37F-F9DF-40BA-880F-C7014D282A44}"/>
               </a:ext>
             </a:extLst>
           </p:cNvPr>
@@ -5428,7 +5428,7 @@
           <p:nvPr/>
         </p:nvPicPr>
         <p:blipFill>
-          <a:blip xmlns:r="http://schemas.openxmlformats.org/officeDocument/2006/relationships" xmlns:a="http://schemas.openxmlformats.org/drawingml/2006/main" r:embed="Rcbec9a528ea64248"/>
+          <a:blip xmlns:r="http://schemas.openxmlformats.org/officeDocument/2006/relationships" xmlns:a="http://schemas.openxmlformats.org/drawingml/2006/main" r:embed="R9dbffa86fba64c20"/>
           <a:stretch xmlns:a="http://schemas.openxmlformats.org/drawingml/2006/main">
             <a:fillRect l="0" t="0" r="0" b="0"/>
           </a:stretch>
@@ -5448,7 +5448,7 @@
           <p:cNvPr id="6" name="Text 3">
             <a:extLst xmlns:a="http://schemas.openxmlformats.org/drawingml/2006/main">
               <a:ext uri="{FF2B5EF4-FFF2-40B4-BE49-F238E27FC236}">
-                <a16:creationId xmlns:a16="http://schemas.microsoft.com/office/drawing/2014/main" id="{DEE76798-37A3-47A1-B4F4-8F1E43DF01E0}"/>
+                <a16:creationId xmlns:a16="http://schemas.microsoft.com/office/drawing/2014/main" id="{B34683BA-E3B2-484F-B02B-0983CB1AD83C}"/>
               </a:ext>
             </a:extLst>
           </p:cNvPr>
@@ -5494,7 +5494,7 @@
           <p:cNvPr id="7" name="Text 4">
             <a:extLst xmlns:a="http://schemas.openxmlformats.org/drawingml/2006/main">
               <a:ext uri="{FF2B5EF4-FFF2-40B4-BE49-F238E27FC236}">
-                <a16:creationId xmlns:a16="http://schemas.microsoft.com/office/drawing/2014/main" id="{2488A93C-94A3-49F1-BDCB-FB3F27B0DF5D}"/>
+                <a16:creationId xmlns:a16="http://schemas.microsoft.com/office/drawing/2014/main" id="{71EB75AC-7B52-4B16-9987-8B6B82CB6BCF}"/>
               </a:ext>
             </a:extLst>
           </p:cNvPr>
@@ -5540,7 +5540,7 @@
           <p:cNvPr id="8" name="Shape 5">
             <a:extLst xmlns:a="http://schemas.openxmlformats.org/drawingml/2006/main">
               <a:ext uri="{FF2B5EF4-FFF2-40B4-BE49-F238E27FC236}">
-                <a16:creationId xmlns:a16="http://schemas.microsoft.com/office/drawing/2014/main" id="{8AE53356-D257-4FC5-95B2-FA51CD38CB9D}"/>
+                <a16:creationId xmlns:a16="http://schemas.microsoft.com/office/drawing/2014/main" id="{134E81F4-B935-4D3A-98D5-8D290F780D86}"/>
               </a:ext>
             </a:extLst>
           </p:cNvPr>
@@ -5577,7 +5577,7 @@
           <p:nvPr/>
         </p:nvPicPr>
         <p:blipFill>
-          <a:blip xmlns:r="http://schemas.openxmlformats.org/officeDocument/2006/relationships" xmlns:a="http://schemas.openxmlformats.org/drawingml/2006/main" r:embed="R53f4772886d94f5e"/>
+          <a:blip xmlns:r="http://schemas.openxmlformats.org/officeDocument/2006/relationships" xmlns:a="http://schemas.openxmlformats.org/drawingml/2006/main" r:embed="R6fa863da010d4e4a"/>
           <a:stretch xmlns:a="http://schemas.openxmlformats.org/drawingml/2006/main">
             <a:fillRect l="0" t="0" r="0" b="0"/>
           </a:stretch>
@@ -5597,7 +5597,7 @@
           <p:cNvPr id="10" name="Text 6">
             <a:extLst xmlns:a="http://schemas.openxmlformats.org/drawingml/2006/main">
               <a:ext uri="{FF2B5EF4-FFF2-40B4-BE49-F238E27FC236}">
-                <a16:creationId xmlns:a16="http://schemas.microsoft.com/office/drawing/2014/main" id="{C0B403F4-8FFA-440A-89CC-31236CBFE731}"/>
+                <a16:creationId xmlns:a16="http://schemas.microsoft.com/office/drawing/2014/main" id="{6E8D1EBD-658B-412C-B0F3-ECF40F85C29F}"/>
               </a:ext>
             </a:extLst>
           </p:cNvPr>
@@ -5643,7 +5643,7 @@
           <p:cNvPr id="11" name="Text 7">
             <a:extLst xmlns:a="http://schemas.openxmlformats.org/drawingml/2006/main">
               <a:ext uri="{FF2B5EF4-FFF2-40B4-BE49-F238E27FC236}">
-                <a16:creationId xmlns:a16="http://schemas.microsoft.com/office/drawing/2014/main" id="{1D718803-3F22-4B08-BD03-A805F7624596}"/>
+                <a16:creationId xmlns:a16="http://schemas.microsoft.com/office/drawing/2014/main" id="{6F41A71F-802A-48F3-8F90-619A1D488173}"/>
               </a:ext>
             </a:extLst>
           </p:cNvPr>
@@ -5689,7 +5689,7 @@
           <p:cNvPr id="12" name="Shape 8">
             <a:extLst xmlns:a="http://schemas.openxmlformats.org/drawingml/2006/main">
               <a:ext uri="{FF2B5EF4-FFF2-40B4-BE49-F238E27FC236}">
-                <a16:creationId xmlns:a16="http://schemas.microsoft.com/office/drawing/2014/main" id="{B2164EB9-CE7B-4D79-9717-34303094D453}"/>
+                <a16:creationId xmlns:a16="http://schemas.microsoft.com/office/drawing/2014/main" id="{C63C9BD6-C72B-4CC5-BE55-4A830B839422}"/>
               </a:ext>
             </a:extLst>
           </p:cNvPr>
@@ -5726,7 +5726,7 @@
           <p:nvPr/>
         </p:nvPicPr>
         <p:blipFill>
-          <a:blip xmlns:r="http://schemas.openxmlformats.org/officeDocument/2006/relationships" xmlns:a="http://schemas.openxmlformats.org/drawingml/2006/main" r:embed="R03f21d3077d941b1"/>
+          <a:blip xmlns:r="http://schemas.openxmlformats.org/officeDocument/2006/relationships" xmlns:a="http://schemas.openxmlformats.org/drawingml/2006/main" r:embed="Re9a08b2588474246"/>
           <a:stretch xmlns:a="http://schemas.openxmlformats.org/drawingml/2006/main">
             <a:fillRect l="0" t="0" r="0" b="0"/>
           </a:stretch>
@@ -5746,7 +5746,7 @@
           <p:cNvPr id="14" name="Text 9">
             <a:extLst xmlns:a="http://schemas.openxmlformats.org/drawingml/2006/main">
               <a:ext uri="{FF2B5EF4-FFF2-40B4-BE49-F238E27FC236}">
-                <a16:creationId xmlns:a16="http://schemas.microsoft.com/office/drawing/2014/main" id="{ADF2B843-B542-4DB0-AD8E-875CDE5FDAA9}"/>
+                <a16:creationId xmlns:a16="http://schemas.microsoft.com/office/drawing/2014/main" id="{96E2C558-C3E5-41AF-ACF7-FC239DAEDDAA}"/>
               </a:ext>
             </a:extLst>
           </p:cNvPr>
@@ -5792,7 +5792,7 @@
           <p:cNvPr id="15" name="Text 10">
             <a:extLst xmlns:a="http://schemas.openxmlformats.org/drawingml/2006/main">
               <a:ext uri="{FF2B5EF4-FFF2-40B4-BE49-F238E27FC236}">
-                <a16:creationId xmlns:a16="http://schemas.microsoft.com/office/drawing/2014/main" id="{AF8156C5-ADFC-43BA-87ED-411C2ECB6D59}"/>
+                <a16:creationId xmlns:a16="http://schemas.microsoft.com/office/drawing/2014/main" id="{D358CEB1-94EF-4303-AEB6-08C47868E25A}"/>
               </a:ext>
             </a:extLst>
           </p:cNvPr>
@@ -5843,7 +5843,7 @@
           <p:cNvPr id="16" name="Shape 11">
             <a:extLst xmlns:a="http://schemas.openxmlformats.org/drawingml/2006/main">
               <a:ext uri="{FF2B5EF4-FFF2-40B4-BE49-F238E27FC236}">
-                <a16:creationId xmlns:a16="http://schemas.microsoft.com/office/drawing/2014/main" id="{19BF71F0-EFB3-4D32-AA29-ADCA2E380D09}"/>
+                <a16:creationId xmlns:a16="http://schemas.microsoft.com/office/drawing/2014/main" id="{88B620B5-F0A8-41CC-A15F-D224A4C28AA1}"/>
               </a:ext>
             </a:extLst>
           </p:cNvPr>
@@ -5880,7 +5880,7 @@
           <p:nvPr/>
         </p:nvPicPr>
         <p:blipFill>
-          <a:blip xmlns:r="http://schemas.openxmlformats.org/officeDocument/2006/relationships" xmlns:a="http://schemas.openxmlformats.org/drawingml/2006/main" r:embed="Rd18eec7412be4745"/>
+          <a:blip xmlns:r="http://schemas.openxmlformats.org/officeDocument/2006/relationships" xmlns:a="http://schemas.openxmlformats.org/drawingml/2006/main" r:embed="Rd991831accc246d4"/>
           <a:stretch xmlns:a="http://schemas.openxmlformats.org/drawingml/2006/main">
             <a:fillRect l="0" t="0" r="0" b="0"/>
           </a:stretch>
@@ -5900,7 +5900,7 @@
           <p:cNvPr id="18" name="Text 12">
             <a:extLst xmlns:a="http://schemas.openxmlformats.org/drawingml/2006/main">
               <a:ext uri="{FF2B5EF4-FFF2-40B4-BE49-F238E27FC236}">
-                <a16:creationId xmlns:a16="http://schemas.microsoft.com/office/drawing/2014/main" id="{87119D4C-5574-4F71-8DB5-086D72D4B8C3}"/>
+                <a16:creationId xmlns:a16="http://schemas.microsoft.com/office/drawing/2014/main" id="{047A8771-1A41-47E9-8C31-D584E3D755D5}"/>
               </a:ext>
             </a:extLst>
           </p:cNvPr>
@@ -5946,7 +5946,7 @@
           <p:cNvPr id="19" name="Text 13">
             <a:extLst xmlns:a="http://schemas.openxmlformats.org/drawingml/2006/main">
               <a:ext uri="{FF2B5EF4-FFF2-40B4-BE49-F238E27FC236}">
-                <a16:creationId xmlns:a16="http://schemas.microsoft.com/office/drawing/2014/main" id="{30208B8B-C76B-4C23-B0C0-C85731E9B810}"/>
+                <a16:creationId xmlns:a16="http://schemas.microsoft.com/office/drawing/2014/main" id="{70D55BF1-116A-4CE6-BDAA-57B69B889CDA}"/>
               </a:ext>
             </a:extLst>
           </p:cNvPr>
@@ -5992,7 +5992,7 @@
           <p:cNvPr id="20" name="Shape 14">
             <a:extLst xmlns:a="http://schemas.openxmlformats.org/drawingml/2006/main">
               <a:ext uri="{FF2B5EF4-FFF2-40B4-BE49-F238E27FC236}">
-                <a16:creationId xmlns:a16="http://schemas.microsoft.com/office/drawing/2014/main" id="{F75C6729-11B9-4042-8D54-664D4D232C05}"/>
+                <a16:creationId xmlns:a16="http://schemas.microsoft.com/office/drawing/2014/main" id="{478F364A-5921-4E6B-A995-D0E5BB352216}"/>
               </a:ext>
             </a:extLst>
           </p:cNvPr>
@@ -6029,7 +6029,7 @@
           <p:nvPr/>
         </p:nvPicPr>
         <p:blipFill>
-          <a:blip xmlns:r="http://schemas.openxmlformats.org/officeDocument/2006/relationships" xmlns:a="http://schemas.openxmlformats.org/drawingml/2006/main" r:embed="R96804d37021e4815"/>
+          <a:blip xmlns:r="http://schemas.openxmlformats.org/officeDocument/2006/relationships" xmlns:a="http://schemas.openxmlformats.org/drawingml/2006/main" r:embed="R075d4a226cd84460"/>
           <a:stretch xmlns:a="http://schemas.openxmlformats.org/drawingml/2006/main">
             <a:fillRect l="0" t="0" r="0" b="0"/>
           </a:stretch>
@@ -6049,7 +6049,7 @@
           <p:cNvPr id="22" name="Text 15">
             <a:extLst xmlns:a="http://schemas.openxmlformats.org/drawingml/2006/main">
               <a:ext uri="{FF2B5EF4-FFF2-40B4-BE49-F238E27FC236}">
-                <a16:creationId xmlns:a16="http://schemas.microsoft.com/office/drawing/2014/main" id="{49DAEB17-C066-40FC-9FB4-8C610A312956}"/>
+                <a16:creationId xmlns:a16="http://schemas.microsoft.com/office/drawing/2014/main" id="{A704875F-2659-40D8-8762-FF19545E9808}"/>
               </a:ext>
             </a:extLst>
           </p:cNvPr>
@@ -6095,7 +6095,7 @@
           <p:cNvPr id="23" name="Text 16">
             <a:extLst xmlns:a="http://schemas.openxmlformats.org/drawingml/2006/main">
               <a:ext uri="{FF2B5EF4-FFF2-40B4-BE49-F238E27FC236}">
-                <a16:creationId xmlns:a16="http://schemas.microsoft.com/office/drawing/2014/main" id="{47AF4175-93D6-45F8-B97F-22253BB8ACD9}"/>
+                <a16:creationId xmlns:a16="http://schemas.microsoft.com/office/drawing/2014/main" id="{C2EF0250-182C-494B-8F76-14EB719A1539}"/>
               </a:ext>
             </a:extLst>
           </p:cNvPr>
@@ -6146,7 +6146,7 @@
           <p:cNvPr id="24" name="Shape 17">
             <a:extLst xmlns:a="http://schemas.openxmlformats.org/drawingml/2006/main">
               <a:ext uri="{FF2B5EF4-FFF2-40B4-BE49-F238E27FC236}">
-                <a16:creationId xmlns:a16="http://schemas.microsoft.com/office/drawing/2014/main" id="{EE82A764-972D-43B3-AB6B-6334A84ED344}"/>
+                <a16:creationId xmlns:a16="http://schemas.microsoft.com/office/drawing/2014/main" id="{A8986055-D077-4753-ACCB-CC8E24669C94}"/>
               </a:ext>
             </a:extLst>
           </p:cNvPr>
@@ -6183,7 +6183,7 @@
           <p:nvPr/>
         </p:nvPicPr>
         <p:blipFill>
-          <a:blip xmlns:r="http://schemas.openxmlformats.org/officeDocument/2006/relationships" xmlns:a="http://schemas.openxmlformats.org/drawingml/2006/main" r:embed="R6f3b675011c34607"/>
+          <a:blip xmlns:r="http://schemas.openxmlformats.org/officeDocument/2006/relationships" xmlns:a="http://schemas.openxmlformats.org/drawingml/2006/main" r:embed="R4001d22a1ec54330"/>
           <a:stretch xmlns:a="http://schemas.openxmlformats.org/drawingml/2006/main">
             <a:fillRect l="0" t="0" r="0" b="0"/>
           </a:stretch>
@@ -6203,7 +6203,7 @@
           <p:cNvPr id="26" name="Text 18">
             <a:extLst xmlns:a="http://schemas.openxmlformats.org/drawingml/2006/main">
               <a:ext uri="{FF2B5EF4-FFF2-40B4-BE49-F238E27FC236}">
-                <a16:creationId xmlns:a16="http://schemas.microsoft.com/office/drawing/2014/main" id="{B049D394-E2F3-46F7-B8D7-D359D832EE49}"/>
+                <a16:creationId xmlns:a16="http://schemas.microsoft.com/office/drawing/2014/main" id="{F05FF227-5B74-469B-B06D-6269BAEFA8D3}"/>
               </a:ext>
             </a:extLst>
           </p:cNvPr>
@@ -6249,7 +6249,7 @@
           <p:cNvPr id="27" name="Text 19">
             <a:extLst xmlns:a="http://schemas.openxmlformats.org/drawingml/2006/main">
               <a:ext uri="{FF2B5EF4-FFF2-40B4-BE49-F238E27FC236}">
-                <a16:creationId xmlns:a16="http://schemas.microsoft.com/office/drawing/2014/main" id="{A2951275-A80A-4972-B55D-43F73A42700E}"/>
+                <a16:creationId xmlns:a16="http://schemas.microsoft.com/office/drawing/2014/main" id="{259E34C1-0F94-44F5-9345-97459483769E}"/>
               </a:ext>
             </a:extLst>
           </p:cNvPr>
@@ -6295,7 +6295,7 @@
           <p:cNvPr id="28" name="Shape 20">
             <a:extLst xmlns:a="http://schemas.openxmlformats.org/drawingml/2006/main">
               <a:ext uri="{FF2B5EF4-FFF2-40B4-BE49-F238E27FC236}">
-                <a16:creationId xmlns:a16="http://schemas.microsoft.com/office/drawing/2014/main" id="{AF9FADD6-C7AF-472E-B93D-9FA2610B8B2B}"/>
+                <a16:creationId xmlns:a16="http://schemas.microsoft.com/office/drawing/2014/main" id="{43D916A4-2721-4885-9D7D-46B68A8F4D02}"/>
               </a:ext>
             </a:extLst>
           </p:cNvPr>
@@ -6332,7 +6332,7 @@
           <p:nvPr/>
         </p:nvPicPr>
         <p:blipFill>
-          <a:blip xmlns:r="http://schemas.openxmlformats.org/officeDocument/2006/relationships" xmlns:a="http://schemas.openxmlformats.org/drawingml/2006/main" r:embed="R2aa1f7584d054d17"/>
+          <a:blip xmlns:r="http://schemas.openxmlformats.org/officeDocument/2006/relationships" xmlns:a="http://schemas.openxmlformats.org/drawingml/2006/main" r:embed="R3ff99103c1d34823"/>
           <a:stretch xmlns:a="http://schemas.openxmlformats.org/drawingml/2006/main">
             <a:fillRect l="0" t="0" r="0" b="0"/>
           </a:stretch>
@@ -6352,7 +6352,7 @@
           <p:cNvPr id="30" name="Text 21">
             <a:extLst xmlns:a="http://schemas.openxmlformats.org/drawingml/2006/main">
               <a:ext uri="{FF2B5EF4-FFF2-40B4-BE49-F238E27FC236}">
-                <a16:creationId xmlns:a16="http://schemas.microsoft.com/office/drawing/2014/main" id="{553A3473-3215-40AB-BC61-3D824EE18D60}"/>
+                <a16:creationId xmlns:a16="http://schemas.microsoft.com/office/drawing/2014/main" id="{634DD78F-192F-43DC-BF38-7E79F8DF6B5F}"/>
               </a:ext>
             </a:extLst>
           </p:cNvPr>
@@ -6398,7 +6398,7 @@
           <p:cNvPr id="31" name="Text 22">
             <a:extLst xmlns:a="http://schemas.openxmlformats.org/drawingml/2006/main">
               <a:ext uri="{FF2B5EF4-FFF2-40B4-BE49-F238E27FC236}">
-                <a16:creationId xmlns:a16="http://schemas.microsoft.com/office/drawing/2014/main" id="{AF927AF6-50A9-4C38-AB9A-440281E7428D}"/>
+                <a16:creationId xmlns:a16="http://schemas.microsoft.com/office/drawing/2014/main" id="{0894F2E3-722A-4A27-B69D-AEFC421C9E32}"/>
               </a:ext>
             </a:extLst>
           </p:cNvPr>
@@ -6444,7 +6444,7 @@
           <p:cNvPr id="32" name="Shape 23">
             <a:extLst xmlns:a="http://schemas.openxmlformats.org/drawingml/2006/main">
               <a:ext uri="{FF2B5EF4-FFF2-40B4-BE49-F238E27FC236}">
-                <a16:creationId xmlns:a16="http://schemas.microsoft.com/office/drawing/2014/main" id="{830BC47C-0055-4568-9A36-3EA22E005C9B}"/>
+                <a16:creationId xmlns:a16="http://schemas.microsoft.com/office/drawing/2014/main" id="{0A932352-3036-498C-BC77-415FCA165615}"/>
               </a:ext>
             </a:extLst>
           </p:cNvPr>
@@ -6481,7 +6481,7 @@
           <p:nvPr/>
         </p:nvPicPr>
         <p:blipFill>
-          <a:blip xmlns:r="http://schemas.openxmlformats.org/officeDocument/2006/relationships" xmlns:a="http://schemas.openxmlformats.org/drawingml/2006/main" r:embed="Re48c445ba20a4621"/>
+          <a:blip xmlns:r="http://schemas.openxmlformats.org/officeDocument/2006/relationships" xmlns:a="http://schemas.openxmlformats.org/drawingml/2006/main" r:embed="R46754e8fcdae484b"/>
           <a:stretch xmlns:a="http://schemas.openxmlformats.org/drawingml/2006/main">
             <a:fillRect l="0" t="0" r="0" b="0"/>
           </a:stretch>
@@ -6501,7 +6501,7 @@
           <p:cNvPr id="34" name="Text 24">
             <a:extLst xmlns:a="http://schemas.openxmlformats.org/drawingml/2006/main">
               <a:ext uri="{FF2B5EF4-FFF2-40B4-BE49-F238E27FC236}">
-                <a16:creationId xmlns:a16="http://schemas.microsoft.com/office/drawing/2014/main" id="{ECB00F7A-52E5-468A-B5F7-799511FCE5D1}"/>
+                <a16:creationId xmlns:a16="http://schemas.microsoft.com/office/drawing/2014/main" id="{91E72941-C763-4C69-865D-EDADA6247764}"/>
               </a:ext>
             </a:extLst>
           </p:cNvPr>
@@ -6547,7 +6547,7 @@
           <p:cNvPr id="35" name="Text 25">
             <a:extLst xmlns:a="http://schemas.openxmlformats.org/drawingml/2006/main">
               <a:ext uri="{FF2B5EF4-FFF2-40B4-BE49-F238E27FC236}">
-                <a16:creationId xmlns:a16="http://schemas.microsoft.com/office/drawing/2014/main" id="{5BCFC1C7-E571-46CE-BF30-458A2D78D7F6}"/>
+                <a16:creationId xmlns:a16="http://schemas.microsoft.com/office/drawing/2014/main" id="{0F639A2F-90CA-4A7A-8356-973F44D02844}"/>
               </a:ext>
             </a:extLst>
           </p:cNvPr>
@@ -6593,7 +6593,7 @@
           <p:cNvPr id="36" name="Shape 26">
             <a:extLst xmlns:a="http://schemas.openxmlformats.org/drawingml/2006/main">
               <a:ext uri="{FF2B5EF4-FFF2-40B4-BE49-F238E27FC236}">
-                <a16:creationId xmlns:a16="http://schemas.microsoft.com/office/drawing/2014/main" id="{6DD6AD00-2311-4D2D-A689-086CE204493C}"/>
+                <a16:creationId xmlns:a16="http://schemas.microsoft.com/office/drawing/2014/main" id="{ABB88C21-2DAD-4990-A451-78D8E1DDFF3F}"/>
               </a:ext>
             </a:extLst>
           </p:cNvPr>
@@ -6630,7 +6630,7 @@
           <p:nvPr/>
         </p:nvPicPr>
         <p:blipFill>
-          <a:blip xmlns:r="http://schemas.openxmlformats.org/officeDocument/2006/relationships" xmlns:a="http://schemas.openxmlformats.org/drawingml/2006/main" r:embed="R6d80f612445e40d2"/>
+          <a:blip xmlns:r="http://schemas.openxmlformats.org/officeDocument/2006/relationships" xmlns:a="http://schemas.openxmlformats.org/drawingml/2006/main" r:embed="Re85cbd7d16084b42"/>
           <a:stretch xmlns:a="http://schemas.openxmlformats.org/drawingml/2006/main">
             <a:fillRect l="0" t="0" r="0" b="0"/>
           </a:stretch>
@@ -6650,7 +6650,7 @@
           <p:cNvPr id="38" name="Text 27">
             <a:extLst xmlns:a="http://schemas.openxmlformats.org/drawingml/2006/main">
               <a:ext uri="{FF2B5EF4-FFF2-40B4-BE49-F238E27FC236}">
-                <a16:creationId xmlns:a16="http://schemas.microsoft.com/office/drawing/2014/main" id="{1926D1C7-31BC-4654-A0ED-6EE5FF2CCAA6}"/>
+                <a16:creationId xmlns:a16="http://schemas.microsoft.com/office/drawing/2014/main" id="{34383764-0DFB-4438-97E2-D63996FFE7C0}"/>
               </a:ext>
             </a:extLst>
           </p:cNvPr>
@@ -6696,7 +6696,7 @@
           <p:cNvPr id="39" name="Text 28">
             <a:extLst xmlns:a="http://schemas.openxmlformats.org/drawingml/2006/main">
               <a:ext uri="{FF2B5EF4-FFF2-40B4-BE49-F238E27FC236}">
-                <a16:creationId xmlns:a16="http://schemas.microsoft.com/office/drawing/2014/main" id="{BFD39E94-E5CB-4914-8EEA-6B2ED4219153}"/>
+                <a16:creationId xmlns:a16="http://schemas.microsoft.com/office/drawing/2014/main" id="{0CB34843-E6DB-4D5E-B65C-08E84ACF12F8}"/>
               </a:ext>
             </a:extLst>
           </p:cNvPr>
@@ -6742,7 +6742,7 @@
           <p:cNvPr id="40" name="Shape 29">
             <a:extLst xmlns:a="http://schemas.openxmlformats.org/drawingml/2006/main">
               <a:ext uri="{FF2B5EF4-FFF2-40B4-BE49-F238E27FC236}">
-                <a16:creationId xmlns:a16="http://schemas.microsoft.com/office/drawing/2014/main" id="{99D49FE9-D51F-4521-AE95-1B8E1586D0D9}"/>
+                <a16:creationId xmlns:a16="http://schemas.microsoft.com/office/drawing/2014/main" id="{D9395482-0902-4C3D-8162-ADE6060E7A07}"/>
               </a:ext>
             </a:extLst>
           </p:cNvPr>
@@ -6779,7 +6779,7 @@
           <p:nvPr/>
         </p:nvPicPr>
         <p:blipFill>
-          <a:blip xmlns:r="http://schemas.openxmlformats.org/officeDocument/2006/relationships" xmlns:a="http://schemas.openxmlformats.org/drawingml/2006/main" r:embed="Rfe4979cd0f964185"/>
+          <a:blip xmlns:r="http://schemas.openxmlformats.org/officeDocument/2006/relationships" xmlns:a="http://schemas.openxmlformats.org/drawingml/2006/main" r:embed="Rb0c80f6c6ee944ab"/>
           <a:stretch xmlns:a="http://schemas.openxmlformats.org/drawingml/2006/main">
             <a:fillRect l="0" t="0" r="0" b="0"/>
           </a:stretch>
@@ -6799,7 +6799,7 @@
           <p:cNvPr id="42" name="Text 30">
             <a:extLst xmlns:a="http://schemas.openxmlformats.org/drawingml/2006/main">
               <a:ext uri="{FF2B5EF4-FFF2-40B4-BE49-F238E27FC236}">
-                <a16:creationId xmlns:a16="http://schemas.microsoft.com/office/drawing/2014/main" id="{52FD01F5-487C-417A-A058-247F6F09CDE7}"/>
+                <a16:creationId xmlns:a16="http://schemas.microsoft.com/office/drawing/2014/main" id="{00EE851A-48D0-47D0-BD1C-79DB09BF230F}"/>
               </a:ext>
             </a:extLst>
           </p:cNvPr>
@@ -6845,7 +6845,7 @@
           <p:cNvPr id="43" name="Text 31">
             <a:extLst xmlns:a="http://schemas.openxmlformats.org/drawingml/2006/main">
               <a:ext uri="{FF2B5EF4-FFF2-40B4-BE49-F238E27FC236}">
-                <a16:creationId xmlns:a16="http://schemas.microsoft.com/office/drawing/2014/main" id="{44DFA49D-6372-4F83-8C24-FDF613ABC0A1}"/>
+                <a16:creationId xmlns:a16="http://schemas.microsoft.com/office/drawing/2014/main" id="{441090A9-3E25-46CB-82E3-744121C6E735}"/>
               </a:ext>
             </a:extLst>
           </p:cNvPr>
@@ -6891,7 +6891,7 @@
           <p:cNvPr id="44" name="Text 32">
             <a:extLst xmlns:a="http://schemas.openxmlformats.org/drawingml/2006/main">
               <a:ext uri="{FF2B5EF4-FFF2-40B4-BE49-F238E27FC236}">
-                <a16:creationId xmlns:a16="http://schemas.microsoft.com/office/drawing/2014/main" id="{9D054095-7B11-4D7C-AE51-B547DFED21DC}"/>
+                <a16:creationId xmlns:a16="http://schemas.microsoft.com/office/drawing/2014/main" id="{C5767487-5895-4763-9756-3C9E6C009435}"/>
               </a:ext>
             </a:extLst>
           </p:cNvPr>
@@ -6935,7 +6935,7 @@
     </p:spTree>
     <p:extLst>
       <p:ext uri="{BB962C8B-B14F-4D97-AF65-F5344CB8AC3E}">
-        <p14:creationId xmlns:p14="http://schemas.microsoft.com/office/powerpoint/2010/main" val="508401018"/>
+        <p14:creationId xmlns:p14="http://schemas.microsoft.com/office/powerpoint/2010/main" val="801592352"/>
       </p:ext>
     </p:extLst>
   </p:cSld>
@@ -6966,7 +6966,7 @@
           <p:cNvPr id="2" name="Text 0">
             <a:extLst xmlns:a="http://schemas.openxmlformats.org/drawingml/2006/main">
               <a:ext uri="{FF2B5EF4-FFF2-40B4-BE49-F238E27FC236}">
-                <a16:creationId xmlns:a16="http://schemas.microsoft.com/office/drawing/2014/main" id="{C179BD9C-0E66-425B-A5B2-2E8A9B4A245D}"/>
+                <a16:creationId xmlns:a16="http://schemas.microsoft.com/office/drawing/2014/main" id="{0D2B254E-5B5A-4CAC-8DE0-76E9C3FC8FAF}"/>
               </a:ext>
             </a:extLst>
           </p:cNvPr>
@@ -7012,7 +7012,7 @@
           <p:cNvPr id="3" name="Text 1">
             <a:extLst xmlns:a="http://schemas.openxmlformats.org/drawingml/2006/main">
               <a:ext uri="{FF2B5EF4-FFF2-40B4-BE49-F238E27FC236}">
-                <a16:creationId xmlns:a16="http://schemas.microsoft.com/office/drawing/2014/main" id="{1B12702F-3D29-4850-B052-EE466261C319}"/>
+                <a16:creationId xmlns:a16="http://schemas.microsoft.com/office/drawing/2014/main" id="{8D38C2C3-8D42-412B-A5CD-3F0A6CF396A9}"/>
               </a:ext>
             </a:extLst>
           </p:cNvPr>
@@ -7047,7 +7047,29 @@
                 <a:ea typeface="Calibri"/>
                 <a:cs typeface="Calibri"/>
               </a:rPr>
-              <a:t>Already closed: no E-stop (vending machine) · table-door actuator out of scope · MAINCTRL and DOORIO are off-the-shelf boards.</a:t>
+              <a:t>Already closed: no E-stop (vending machine) · table-door actuator out of scope · MAINCTRL and </a:t>
+            </a:r>
+            <a:r>
+              <a:rPr sz="1400">
+                <a:solidFill>
+                  <a:srgbClr val="6B7480"/>
+                </a:solidFill>
+                <a:latin typeface="Calibri"/>
+                <a:ea typeface="Calibri"/>
+                <a:cs typeface="Calibri"/>
+              </a:rPr>
+              <a:t>IOCTRL</a:t>
+            </a:r>
+            <a:r>
+              <a:rPr sz="1400">
+                <a:solidFill>
+                  <a:srgbClr val="6B7480"/>
+                </a:solidFill>
+                <a:latin typeface="Calibri"/>
+                <a:ea typeface="Calibri"/>
+                <a:cs typeface="Calibri"/>
+              </a:rPr>
+              <a:t> are off-the-shelf boards.</a:t>
             </a:r>
             <a:endParaRPr sz="1400"/>
           </a:p>
@@ -7058,7 +7080,7 @@
           <p:cNvPr id="4" name="Shape 2">
             <a:extLst xmlns:a="http://schemas.openxmlformats.org/drawingml/2006/main">
               <a:ext uri="{FF2B5EF4-FFF2-40B4-BE49-F238E27FC236}">
-                <a16:creationId xmlns:a16="http://schemas.microsoft.com/office/drawing/2014/main" id="{4C4DFA79-AC37-4B97-8438-97351EAF44FC}"/>
+                <a16:creationId xmlns:a16="http://schemas.microsoft.com/office/drawing/2014/main" id="{3B79DED9-C4DD-44BB-B0F6-B8F80FFFE2E6}"/>
               </a:ext>
             </a:extLst>
           </p:cNvPr>
@@ -7093,7 +7115,7 @@
           <p:cNvPr id="5" name="Shape 3">
             <a:extLst xmlns:a="http://schemas.openxmlformats.org/drawingml/2006/main">
               <a:ext uri="{FF2B5EF4-FFF2-40B4-BE49-F238E27FC236}">
-                <a16:creationId xmlns:a16="http://schemas.microsoft.com/office/drawing/2014/main" id="{5F0EBE9D-4990-46AA-AE02-BCE890023057}"/>
+                <a16:creationId xmlns:a16="http://schemas.microsoft.com/office/drawing/2014/main" id="{D68B254E-1832-4ADF-85E1-E84D8E213226}"/>
               </a:ext>
             </a:extLst>
           </p:cNvPr>
@@ -7130,7 +7152,7 @@
           <p:nvPr/>
         </p:nvPicPr>
         <p:blipFill>
-          <a:blip xmlns:r="http://schemas.openxmlformats.org/officeDocument/2006/relationships" xmlns:a="http://schemas.openxmlformats.org/drawingml/2006/main" r:embed="R7d9fbdb282ec49de"/>
+          <a:blip xmlns:r="http://schemas.openxmlformats.org/officeDocument/2006/relationships" xmlns:a="http://schemas.openxmlformats.org/drawingml/2006/main" r:embed="R76b8cc27f4324683"/>
           <a:stretch xmlns:a="http://schemas.openxmlformats.org/drawingml/2006/main">
             <a:fillRect l="0" t="0" r="0" b="0"/>
           </a:stretch>
@@ -7150,7 +7172,7 @@
           <p:cNvPr id="7" name="Text 4">
             <a:extLst xmlns:a="http://schemas.openxmlformats.org/drawingml/2006/main">
               <a:ext uri="{FF2B5EF4-FFF2-40B4-BE49-F238E27FC236}">
-                <a16:creationId xmlns:a16="http://schemas.microsoft.com/office/drawing/2014/main" id="{B7F6D07C-48CB-45B1-9879-DB0F0C78A365}"/>
+                <a16:creationId xmlns:a16="http://schemas.microsoft.com/office/drawing/2014/main" id="{EBD95B82-F195-4129-AD81-E86F719C7077}"/>
               </a:ext>
             </a:extLst>
           </p:cNvPr>
@@ -7196,7 +7218,7 @@
           <p:cNvPr id="8" name="Text 5">
             <a:extLst xmlns:a="http://schemas.openxmlformats.org/drawingml/2006/main">
               <a:ext uri="{FF2B5EF4-FFF2-40B4-BE49-F238E27FC236}">
-                <a16:creationId xmlns:a16="http://schemas.microsoft.com/office/drawing/2014/main" id="{E22EEE47-27D4-4EC5-9467-505C97227EFB}"/>
+                <a16:creationId xmlns:a16="http://schemas.microsoft.com/office/drawing/2014/main" id="{FCFEBD87-1107-4083-98C7-A0F598B43BF1}"/>
               </a:ext>
             </a:extLst>
           </p:cNvPr>
@@ -7242,7 +7264,7 @@
           <p:cNvPr id="9" name="Shape 6">
             <a:extLst xmlns:a="http://schemas.openxmlformats.org/drawingml/2006/main">
               <a:ext uri="{FF2B5EF4-FFF2-40B4-BE49-F238E27FC236}">
-                <a16:creationId xmlns:a16="http://schemas.microsoft.com/office/drawing/2014/main" id="{BD102214-2A82-4F12-9B7B-240002C1FD44}"/>
+                <a16:creationId xmlns:a16="http://schemas.microsoft.com/office/drawing/2014/main" id="{F92BC77F-DCDF-40E4-A393-8459E72002C7}"/>
               </a:ext>
             </a:extLst>
           </p:cNvPr>
@@ -7277,7 +7299,7 @@
           <p:cNvPr id="10" name="Shape 7">
             <a:extLst xmlns:a="http://schemas.openxmlformats.org/drawingml/2006/main">
               <a:ext uri="{FF2B5EF4-FFF2-40B4-BE49-F238E27FC236}">
-                <a16:creationId xmlns:a16="http://schemas.microsoft.com/office/drawing/2014/main" id="{810BAA35-57C9-40A6-AA52-85CC9A307BB3}"/>
+                <a16:creationId xmlns:a16="http://schemas.microsoft.com/office/drawing/2014/main" id="{541FA2F8-F5B6-45C2-9121-6B7D852801FE}"/>
               </a:ext>
             </a:extLst>
           </p:cNvPr>
@@ -7314,7 +7336,7 @@
           <p:nvPr/>
         </p:nvPicPr>
         <p:blipFill>
-          <a:blip xmlns:r="http://schemas.openxmlformats.org/officeDocument/2006/relationships" xmlns:a="http://schemas.openxmlformats.org/drawingml/2006/main" r:embed="R91e2565489b54d44"/>
+          <a:blip xmlns:r="http://schemas.openxmlformats.org/officeDocument/2006/relationships" xmlns:a="http://schemas.openxmlformats.org/drawingml/2006/main" r:embed="Rdd273d0a59eb4ad3"/>
           <a:stretch xmlns:a="http://schemas.openxmlformats.org/drawingml/2006/main">
             <a:fillRect l="0" t="0" r="0" b="0"/>
           </a:stretch>
@@ -7334,7 +7356,7 @@
           <p:cNvPr id="12" name="Text 8">
             <a:extLst xmlns:a="http://schemas.openxmlformats.org/drawingml/2006/main">
               <a:ext uri="{FF2B5EF4-FFF2-40B4-BE49-F238E27FC236}">
-                <a16:creationId xmlns:a16="http://schemas.microsoft.com/office/drawing/2014/main" id="{9D0F436F-BDBB-4EDA-BF4A-EE6D882A7C0D}"/>
+                <a16:creationId xmlns:a16="http://schemas.microsoft.com/office/drawing/2014/main" id="{B2C07C9B-9498-4818-A2D7-EB6D4D83BD2B}"/>
               </a:ext>
             </a:extLst>
           </p:cNvPr>
@@ -7380,7 +7402,7 @@
           <p:cNvPr id="13" name="Text 9">
             <a:extLst xmlns:a="http://schemas.openxmlformats.org/drawingml/2006/main">
               <a:ext uri="{FF2B5EF4-FFF2-40B4-BE49-F238E27FC236}">
-                <a16:creationId xmlns:a16="http://schemas.microsoft.com/office/drawing/2014/main" id="{6E91E623-CCAA-4451-874F-50078B391638}"/>
+                <a16:creationId xmlns:a16="http://schemas.microsoft.com/office/drawing/2014/main" id="{EA1DD12B-ACA2-439D-A47F-FBA5BF19019B}"/>
               </a:ext>
             </a:extLst>
           </p:cNvPr>
@@ -7426,7 +7448,7 @@
           <p:cNvPr id="14" name="Shape 10">
             <a:extLst xmlns:a="http://schemas.openxmlformats.org/drawingml/2006/main">
               <a:ext uri="{FF2B5EF4-FFF2-40B4-BE49-F238E27FC236}">
-                <a16:creationId xmlns:a16="http://schemas.microsoft.com/office/drawing/2014/main" id="{1716D7F9-EEAE-4945-9630-08182B241029}"/>
+                <a16:creationId xmlns:a16="http://schemas.microsoft.com/office/drawing/2014/main" id="{D5545B46-D722-4136-8AA3-E0D04B326B22}"/>
               </a:ext>
             </a:extLst>
           </p:cNvPr>
@@ -7461,7 +7483,7 @@
           <p:cNvPr id="15" name="Shape 11">
             <a:extLst xmlns:a="http://schemas.openxmlformats.org/drawingml/2006/main">
               <a:ext uri="{FF2B5EF4-FFF2-40B4-BE49-F238E27FC236}">
-                <a16:creationId xmlns:a16="http://schemas.microsoft.com/office/drawing/2014/main" id="{9FB08CA2-87FD-438E-A3DF-392E5A3A91A6}"/>
+                <a16:creationId xmlns:a16="http://schemas.microsoft.com/office/drawing/2014/main" id="{F53C24B4-301E-42F5-84A3-72C553B7DE3F}"/>
               </a:ext>
             </a:extLst>
           </p:cNvPr>
@@ -7498,7 +7520,7 @@
           <p:nvPr/>
         </p:nvPicPr>
         <p:blipFill>
-          <a:blip xmlns:r="http://schemas.openxmlformats.org/officeDocument/2006/relationships" xmlns:a="http://schemas.openxmlformats.org/drawingml/2006/main" r:embed="R1e63e0184c674d4a"/>
+          <a:blip xmlns:r="http://schemas.openxmlformats.org/officeDocument/2006/relationships" xmlns:a="http://schemas.openxmlformats.org/drawingml/2006/main" r:embed="R5939e9f70f8041a7"/>
           <a:stretch xmlns:a="http://schemas.openxmlformats.org/drawingml/2006/main">
             <a:fillRect l="0" t="0" r="0" b="0"/>
           </a:stretch>
@@ -7518,7 +7540,7 @@
           <p:cNvPr id="17" name="Text 12">
             <a:extLst xmlns:a="http://schemas.openxmlformats.org/drawingml/2006/main">
               <a:ext uri="{FF2B5EF4-FFF2-40B4-BE49-F238E27FC236}">
-                <a16:creationId xmlns:a16="http://schemas.microsoft.com/office/drawing/2014/main" id="{DF538700-2DA3-448E-9BB6-D1997DD96B37}"/>
+                <a16:creationId xmlns:a16="http://schemas.microsoft.com/office/drawing/2014/main" id="{BCC2302F-52CF-4D90-8B0E-05FE732DFB8C}"/>
               </a:ext>
             </a:extLst>
           </p:cNvPr>
@@ -7564,7 +7586,7 @@
           <p:cNvPr id="18" name="Text 13">
             <a:extLst xmlns:a="http://schemas.openxmlformats.org/drawingml/2006/main">
               <a:ext uri="{FF2B5EF4-FFF2-40B4-BE49-F238E27FC236}">
-                <a16:creationId xmlns:a16="http://schemas.microsoft.com/office/drawing/2014/main" id="{6461AF42-3300-4500-917A-FD18FD0C2E46}"/>
+                <a16:creationId xmlns:a16="http://schemas.microsoft.com/office/drawing/2014/main" id="{A5E77484-AABD-42DC-8CD5-BAC93976C8A4}"/>
               </a:ext>
             </a:extLst>
           </p:cNvPr>
@@ -7615,7 +7637,7 @@
           <p:cNvPr id="19" name="Shape 14">
             <a:extLst xmlns:a="http://schemas.openxmlformats.org/drawingml/2006/main">
               <a:ext uri="{FF2B5EF4-FFF2-40B4-BE49-F238E27FC236}">
-                <a16:creationId xmlns:a16="http://schemas.microsoft.com/office/drawing/2014/main" id="{B10DCB02-1940-4065-8F4E-C661D1DDC5B1}"/>
+                <a16:creationId xmlns:a16="http://schemas.microsoft.com/office/drawing/2014/main" id="{D9118E52-9AA8-43B3-9E60-8431B91EF7E4}"/>
               </a:ext>
             </a:extLst>
           </p:cNvPr>
@@ -7650,7 +7672,7 @@
           <p:cNvPr id="20" name="Shape 15">
             <a:extLst xmlns:a="http://schemas.openxmlformats.org/drawingml/2006/main">
               <a:ext uri="{FF2B5EF4-FFF2-40B4-BE49-F238E27FC236}">
-                <a16:creationId xmlns:a16="http://schemas.microsoft.com/office/drawing/2014/main" id="{48E2A1FB-4AE3-41A1-9B36-F356B4128AF7}"/>
+                <a16:creationId xmlns:a16="http://schemas.microsoft.com/office/drawing/2014/main" id="{AFAF9D91-9B3D-4F5F-B55D-76C751F3B849}"/>
               </a:ext>
             </a:extLst>
           </p:cNvPr>
@@ -7687,7 +7709,7 @@
           <p:nvPr/>
         </p:nvPicPr>
         <p:blipFill>
-          <a:blip xmlns:r="http://schemas.openxmlformats.org/officeDocument/2006/relationships" xmlns:a="http://schemas.openxmlformats.org/drawingml/2006/main" r:embed="R8a6e4bdf9fe24f86"/>
+          <a:blip xmlns:r="http://schemas.openxmlformats.org/officeDocument/2006/relationships" xmlns:a="http://schemas.openxmlformats.org/drawingml/2006/main" r:embed="R63de8c047f6948e7"/>
           <a:stretch xmlns:a="http://schemas.openxmlformats.org/drawingml/2006/main">
             <a:fillRect l="0" t="0" r="0" b="0"/>
           </a:stretch>
@@ -7707,7 +7729,7 @@
           <p:cNvPr id="22" name="Text 16">
             <a:extLst xmlns:a="http://schemas.openxmlformats.org/drawingml/2006/main">
               <a:ext uri="{FF2B5EF4-FFF2-40B4-BE49-F238E27FC236}">
-                <a16:creationId xmlns:a16="http://schemas.microsoft.com/office/drawing/2014/main" id="{174673E1-02BC-42BC-A8CC-C7D5D541706B}"/>
+                <a16:creationId xmlns:a16="http://schemas.microsoft.com/office/drawing/2014/main" id="{311E3111-2295-47AB-89BE-727DC7D44BB1}"/>
               </a:ext>
             </a:extLst>
           </p:cNvPr>
@@ -7753,7 +7775,7 @@
           <p:cNvPr id="23" name="Text 17">
             <a:extLst xmlns:a="http://schemas.openxmlformats.org/drawingml/2006/main">
               <a:ext uri="{FF2B5EF4-FFF2-40B4-BE49-F238E27FC236}">
-                <a16:creationId xmlns:a16="http://schemas.microsoft.com/office/drawing/2014/main" id="{49BCA37C-E462-4CA3-8434-32EFD96CAB4E}"/>
+                <a16:creationId xmlns:a16="http://schemas.microsoft.com/office/drawing/2014/main" id="{0237E5E6-13FE-4EB9-BA3A-1E704E3AB35C}"/>
               </a:ext>
             </a:extLst>
           </p:cNvPr>
@@ -7799,7 +7821,7 @@
           <p:cNvPr id="24" name="Shape 18">
             <a:extLst xmlns:a="http://schemas.openxmlformats.org/drawingml/2006/main">
               <a:ext uri="{FF2B5EF4-FFF2-40B4-BE49-F238E27FC236}">
-                <a16:creationId xmlns:a16="http://schemas.microsoft.com/office/drawing/2014/main" id="{01D0740E-DFFA-4509-8DE2-A5E0BE220F05}"/>
+                <a16:creationId xmlns:a16="http://schemas.microsoft.com/office/drawing/2014/main" id="{56581ECD-8D20-471C-AF87-9717B7F99311}"/>
               </a:ext>
             </a:extLst>
           </p:cNvPr>
@@ -7834,7 +7856,7 @@
           <p:cNvPr id="25" name="Shape 19">
             <a:extLst xmlns:a="http://schemas.openxmlformats.org/drawingml/2006/main">
               <a:ext uri="{FF2B5EF4-FFF2-40B4-BE49-F238E27FC236}">
-                <a16:creationId xmlns:a16="http://schemas.microsoft.com/office/drawing/2014/main" id="{09D66443-0D55-4547-ADB3-70446EA83EAA}"/>
+                <a16:creationId xmlns:a16="http://schemas.microsoft.com/office/drawing/2014/main" id="{C86D00F9-1AE5-413F-8CB3-DEB4FDB74F3E}"/>
               </a:ext>
             </a:extLst>
           </p:cNvPr>
@@ -7871,7 +7893,7 @@
           <p:nvPr/>
         </p:nvPicPr>
         <p:blipFill>
-          <a:blip xmlns:r="http://schemas.openxmlformats.org/officeDocument/2006/relationships" xmlns:a="http://schemas.openxmlformats.org/drawingml/2006/main" r:embed="R5edd658ad5dc4d25"/>
+          <a:blip xmlns:r="http://schemas.openxmlformats.org/officeDocument/2006/relationships" xmlns:a="http://schemas.openxmlformats.org/drawingml/2006/main" r:embed="R4233c6aede9c4034"/>
           <a:stretch xmlns:a="http://schemas.openxmlformats.org/drawingml/2006/main">
             <a:fillRect l="0" t="0" r="0" b="0"/>
           </a:stretch>
@@ -7891,7 +7913,7 @@
           <p:cNvPr id="27" name="Text 20">
             <a:extLst xmlns:a="http://schemas.openxmlformats.org/drawingml/2006/main">
               <a:ext uri="{FF2B5EF4-FFF2-40B4-BE49-F238E27FC236}">
-                <a16:creationId xmlns:a16="http://schemas.microsoft.com/office/drawing/2014/main" id="{BD1E08A5-64A1-48A1-ABE4-A09ABA475AEF}"/>
+                <a16:creationId xmlns:a16="http://schemas.microsoft.com/office/drawing/2014/main" id="{1A6AB510-F661-4ED1-A79B-D0F217C6D452}"/>
               </a:ext>
             </a:extLst>
           </p:cNvPr>
@@ -7937,7 +7959,7 @@
           <p:cNvPr id="28" name="Text 21">
             <a:extLst xmlns:a="http://schemas.openxmlformats.org/drawingml/2006/main">
               <a:ext uri="{FF2B5EF4-FFF2-40B4-BE49-F238E27FC236}">
-                <a16:creationId xmlns:a16="http://schemas.microsoft.com/office/drawing/2014/main" id="{7077D31D-A880-46F6-807B-8C3A4B13A5FA}"/>
+                <a16:creationId xmlns:a16="http://schemas.microsoft.com/office/drawing/2014/main" id="{3C647C9C-3B43-45D8-A398-8EF428DB03A3}"/>
               </a:ext>
             </a:extLst>
           </p:cNvPr>
@@ -7988,7 +8010,7 @@
           <p:cNvPr id="29" name="Shape 22">
             <a:extLst xmlns:a="http://schemas.openxmlformats.org/drawingml/2006/main">
               <a:ext uri="{FF2B5EF4-FFF2-40B4-BE49-F238E27FC236}">
-                <a16:creationId xmlns:a16="http://schemas.microsoft.com/office/drawing/2014/main" id="{771971C6-4093-45E0-A9D8-60E9E64E46CF}"/>
+                <a16:creationId xmlns:a16="http://schemas.microsoft.com/office/drawing/2014/main" id="{2BC8FA37-7651-4559-8779-5EDF08D7F4C1}"/>
               </a:ext>
             </a:extLst>
           </p:cNvPr>
@@ -8023,7 +8045,7 @@
           <p:cNvPr id="30" name="Shape 23">
             <a:extLst xmlns:a="http://schemas.openxmlformats.org/drawingml/2006/main">
               <a:ext uri="{FF2B5EF4-FFF2-40B4-BE49-F238E27FC236}">
-                <a16:creationId xmlns:a16="http://schemas.microsoft.com/office/drawing/2014/main" id="{04A352FF-C9FC-4AE5-AB15-633194712020}"/>
+                <a16:creationId xmlns:a16="http://schemas.microsoft.com/office/drawing/2014/main" id="{A157E260-957E-4E43-AD9E-F363F5D031A3}"/>
               </a:ext>
             </a:extLst>
           </p:cNvPr>
@@ -8060,7 +8082,7 @@
           <p:nvPr/>
         </p:nvPicPr>
         <p:blipFill>
-          <a:blip xmlns:r="http://schemas.openxmlformats.org/officeDocument/2006/relationships" xmlns:a="http://schemas.openxmlformats.org/drawingml/2006/main" r:embed="R3a46a4703178401f"/>
+          <a:blip xmlns:r="http://schemas.openxmlformats.org/officeDocument/2006/relationships" xmlns:a="http://schemas.openxmlformats.org/drawingml/2006/main" r:embed="R712421b76c444dca"/>
           <a:stretch xmlns:a="http://schemas.openxmlformats.org/drawingml/2006/main">
             <a:fillRect l="0" t="0" r="0" b="0"/>
           </a:stretch>
@@ -8080,7 +8102,7 @@
           <p:cNvPr id="32" name="Text 24">
             <a:extLst xmlns:a="http://schemas.openxmlformats.org/drawingml/2006/main">
               <a:ext uri="{FF2B5EF4-FFF2-40B4-BE49-F238E27FC236}">
-                <a16:creationId xmlns:a16="http://schemas.microsoft.com/office/drawing/2014/main" id="{67DB7DDA-1425-432D-9751-0F18239F03FD}"/>
+                <a16:creationId xmlns:a16="http://schemas.microsoft.com/office/drawing/2014/main" id="{7758A562-BA5A-4DC0-87CB-DD8176E7189F}"/>
               </a:ext>
             </a:extLst>
           </p:cNvPr>
@@ -8126,7 +8148,7 @@
           <p:cNvPr id="33" name="Text 25">
             <a:extLst xmlns:a="http://schemas.openxmlformats.org/drawingml/2006/main">
               <a:ext uri="{FF2B5EF4-FFF2-40B4-BE49-F238E27FC236}">
-                <a16:creationId xmlns:a16="http://schemas.microsoft.com/office/drawing/2014/main" id="{AE8BFAE9-56D3-4519-9172-538654B61FF0}"/>
+                <a16:creationId xmlns:a16="http://schemas.microsoft.com/office/drawing/2014/main" id="{98A467CB-7404-42A9-B5CA-B4C4FEBD8912}"/>
               </a:ext>
             </a:extLst>
           </p:cNvPr>
@@ -8172,7 +8194,7 @@
           <p:cNvPr id="34" name="Shape 26">
             <a:extLst xmlns:a="http://schemas.openxmlformats.org/drawingml/2006/main">
               <a:ext uri="{FF2B5EF4-FFF2-40B4-BE49-F238E27FC236}">
-                <a16:creationId xmlns:a16="http://schemas.microsoft.com/office/drawing/2014/main" id="{70BBF923-F5E8-4036-9922-53C1AC27C9F7}"/>
+                <a16:creationId xmlns:a16="http://schemas.microsoft.com/office/drawing/2014/main" id="{13D48605-C190-4B68-8FB8-881633094B61}"/>
               </a:ext>
             </a:extLst>
           </p:cNvPr>
@@ -8207,7 +8229,7 @@
           <p:cNvPr id="35" name="Shape 27">
             <a:extLst xmlns:a="http://schemas.openxmlformats.org/drawingml/2006/main">
               <a:ext uri="{FF2B5EF4-FFF2-40B4-BE49-F238E27FC236}">
-                <a16:creationId xmlns:a16="http://schemas.microsoft.com/office/drawing/2014/main" id="{94297B03-226C-42C3-9B4C-678F405A4B4F}"/>
+                <a16:creationId xmlns:a16="http://schemas.microsoft.com/office/drawing/2014/main" id="{648EDAFF-D131-4533-A86A-0381148ACA8D}"/>
               </a:ext>
             </a:extLst>
           </p:cNvPr>
@@ -8244,7 +8266,7 @@
           <p:nvPr/>
         </p:nvPicPr>
         <p:blipFill>
-          <a:blip xmlns:r="http://schemas.openxmlformats.org/officeDocument/2006/relationships" xmlns:a="http://schemas.openxmlformats.org/drawingml/2006/main" r:embed="R55478ee92324445f"/>
+          <a:blip xmlns:r="http://schemas.openxmlformats.org/officeDocument/2006/relationships" xmlns:a="http://schemas.openxmlformats.org/drawingml/2006/main" r:embed="R89891dc9a3e54604"/>
           <a:stretch xmlns:a="http://schemas.openxmlformats.org/drawingml/2006/main">
             <a:fillRect l="0" t="0" r="0" b="0"/>
           </a:stretch>
@@ -8264,7 +8286,7 @@
           <p:cNvPr id="37" name="Text 28">
             <a:extLst xmlns:a="http://schemas.openxmlformats.org/drawingml/2006/main">
               <a:ext uri="{FF2B5EF4-FFF2-40B4-BE49-F238E27FC236}">
-                <a16:creationId xmlns:a16="http://schemas.microsoft.com/office/drawing/2014/main" id="{FE12B476-836E-4BF3-B99C-D1B2CF42729C}"/>
+                <a16:creationId xmlns:a16="http://schemas.microsoft.com/office/drawing/2014/main" id="{0346DADC-6ABE-4A59-9E82-4CF44874835C}"/>
               </a:ext>
             </a:extLst>
           </p:cNvPr>
@@ -8310,7 +8332,7 @@
           <p:cNvPr id="38" name="Text 29">
             <a:extLst xmlns:a="http://schemas.openxmlformats.org/drawingml/2006/main">
               <a:ext uri="{FF2B5EF4-FFF2-40B4-BE49-F238E27FC236}">
-                <a16:creationId xmlns:a16="http://schemas.microsoft.com/office/drawing/2014/main" id="{BF370E1F-AE9D-421F-941E-0B498ACCCBC6}"/>
+                <a16:creationId xmlns:a16="http://schemas.microsoft.com/office/drawing/2014/main" id="{150FB53D-9CA0-4921-907D-6904717DB468}"/>
               </a:ext>
             </a:extLst>
           </p:cNvPr>
@@ -8356,7 +8378,7 @@
           <p:cNvPr id="39" name="Shape 30">
             <a:extLst xmlns:a="http://schemas.openxmlformats.org/drawingml/2006/main">
               <a:ext uri="{FF2B5EF4-FFF2-40B4-BE49-F238E27FC236}">
-                <a16:creationId xmlns:a16="http://schemas.microsoft.com/office/drawing/2014/main" id="{E622D951-64F5-4A96-8D69-AB17C93DE3ED}"/>
+                <a16:creationId xmlns:a16="http://schemas.microsoft.com/office/drawing/2014/main" id="{82B14BCF-30F3-4EFE-8118-224EDB840AEF}"/>
               </a:ext>
             </a:extLst>
           </p:cNvPr>
@@ -8391,7 +8413,7 @@
           <p:cNvPr id="40" name="Shape 31">
             <a:extLst xmlns:a="http://schemas.openxmlformats.org/drawingml/2006/main">
               <a:ext uri="{FF2B5EF4-FFF2-40B4-BE49-F238E27FC236}">
-                <a16:creationId xmlns:a16="http://schemas.microsoft.com/office/drawing/2014/main" id="{30381B8E-C83D-4AC6-B1C5-5E1CB419D763}"/>
+                <a16:creationId xmlns:a16="http://schemas.microsoft.com/office/drawing/2014/main" id="{AE48327B-3EF3-4F32-BDDE-72D3893EE471}"/>
               </a:ext>
             </a:extLst>
           </p:cNvPr>
@@ -8428,7 +8450,7 @@
           <p:nvPr/>
         </p:nvPicPr>
         <p:blipFill>
-          <a:blip xmlns:r="http://schemas.openxmlformats.org/officeDocument/2006/relationships" xmlns:a="http://schemas.openxmlformats.org/drawingml/2006/main" r:embed="Rfbc1862fc52741c4"/>
+          <a:blip xmlns:r="http://schemas.openxmlformats.org/officeDocument/2006/relationships" xmlns:a="http://schemas.openxmlformats.org/drawingml/2006/main" r:embed="Rcb91fd99be364b44"/>
           <a:stretch xmlns:a="http://schemas.openxmlformats.org/drawingml/2006/main">
             <a:fillRect l="0" t="0" r="0" b="0"/>
           </a:stretch>
@@ -8448,7 +8470,7 @@
           <p:cNvPr id="42" name="Text 32">
             <a:extLst xmlns:a="http://schemas.openxmlformats.org/drawingml/2006/main">
               <a:ext uri="{FF2B5EF4-FFF2-40B4-BE49-F238E27FC236}">
-                <a16:creationId xmlns:a16="http://schemas.microsoft.com/office/drawing/2014/main" id="{6364B750-036A-476E-8BA3-CEF8BCB48F32}"/>
+                <a16:creationId xmlns:a16="http://schemas.microsoft.com/office/drawing/2014/main" id="{89A8ECFE-4991-4111-8D0C-3F0AD6B82BBC}"/>
               </a:ext>
             </a:extLst>
           </p:cNvPr>
@@ -8494,7 +8516,7 @@
           <p:cNvPr id="43" name="Text 33">
             <a:extLst xmlns:a="http://schemas.openxmlformats.org/drawingml/2006/main">
               <a:ext uri="{FF2B5EF4-FFF2-40B4-BE49-F238E27FC236}">
-                <a16:creationId xmlns:a16="http://schemas.microsoft.com/office/drawing/2014/main" id="{835DFBB8-5437-4115-85B6-8626B5E703A3}"/>
+                <a16:creationId xmlns:a16="http://schemas.microsoft.com/office/drawing/2014/main" id="{CB234850-BB9B-4BF2-8DA0-282D98D0076D}"/>
               </a:ext>
             </a:extLst>
           </p:cNvPr>
@@ -8540,7 +8562,7 @@
           <p:cNvPr id="44" name="Shape 34">
             <a:extLst xmlns:a="http://schemas.openxmlformats.org/drawingml/2006/main">
               <a:ext uri="{FF2B5EF4-FFF2-40B4-BE49-F238E27FC236}">
-                <a16:creationId xmlns:a16="http://schemas.microsoft.com/office/drawing/2014/main" id="{911D91E8-B041-4FCC-B95E-4B449F67A704}"/>
+                <a16:creationId xmlns:a16="http://schemas.microsoft.com/office/drawing/2014/main" id="{E7AC99AC-3EE0-439A-B825-0A51252F3BF8}"/>
               </a:ext>
             </a:extLst>
           </p:cNvPr>
@@ -8575,7 +8597,7 @@
           <p:cNvPr id="45" name="Shape 35">
             <a:extLst xmlns:a="http://schemas.openxmlformats.org/drawingml/2006/main">
               <a:ext uri="{FF2B5EF4-FFF2-40B4-BE49-F238E27FC236}">
-                <a16:creationId xmlns:a16="http://schemas.microsoft.com/office/drawing/2014/main" id="{7AF44A0F-79D0-4FA0-982F-C2AA0C2B2039}"/>
+                <a16:creationId xmlns:a16="http://schemas.microsoft.com/office/drawing/2014/main" id="{6518A0F2-1F57-4583-8177-564AA8F21BF8}"/>
               </a:ext>
             </a:extLst>
           </p:cNvPr>
@@ -8612,7 +8634,7 @@
           <p:nvPr/>
         </p:nvPicPr>
         <p:blipFill>
-          <a:blip xmlns:r="http://schemas.openxmlformats.org/officeDocument/2006/relationships" xmlns:a="http://schemas.openxmlformats.org/drawingml/2006/main" r:embed="Rc8ec9e871dde468e"/>
+          <a:blip xmlns:r="http://schemas.openxmlformats.org/officeDocument/2006/relationships" xmlns:a="http://schemas.openxmlformats.org/drawingml/2006/main" r:embed="R7c526dea5d264404"/>
           <a:stretch xmlns:a="http://schemas.openxmlformats.org/drawingml/2006/main">
             <a:fillRect l="0" t="0" r="0" b="0"/>
           </a:stretch>
@@ -8632,7 +8654,7 @@
           <p:cNvPr id="47" name="Text 36">
             <a:extLst xmlns:a="http://schemas.openxmlformats.org/drawingml/2006/main">
               <a:ext uri="{FF2B5EF4-FFF2-40B4-BE49-F238E27FC236}">
-                <a16:creationId xmlns:a16="http://schemas.microsoft.com/office/drawing/2014/main" id="{CD2CD91E-6913-481B-B9ED-E3E949BB9CF7}"/>
+                <a16:creationId xmlns:a16="http://schemas.microsoft.com/office/drawing/2014/main" id="{5E296353-7512-42DB-87BB-B0AFA4306847}"/>
               </a:ext>
             </a:extLst>
           </p:cNvPr>
@@ -8678,7 +8700,7 @@
           <p:cNvPr id="48" name="Text 37">
             <a:extLst xmlns:a="http://schemas.openxmlformats.org/drawingml/2006/main">
               <a:ext uri="{FF2B5EF4-FFF2-40B4-BE49-F238E27FC236}">
-                <a16:creationId xmlns:a16="http://schemas.microsoft.com/office/drawing/2014/main" id="{F977873E-5B8E-49EF-892A-E6B601CA12FF}"/>
+                <a16:creationId xmlns:a16="http://schemas.microsoft.com/office/drawing/2014/main" id="{2E7EC0CB-3D05-4E2B-90C3-30C608879C1A}"/>
               </a:ext>
             </a:extLst>
           </p:cNvPr>
@@ -8724,7 +8746,7 @@
           <p:cNvPr id="49" name="Shape 38">
             <a:extLst xmlns:a="http://schemas.openxmlformats.org/drawingml/2006/main">
               <a:ext uri="{FF2B5EF4-FFF2-40B4-BE49-F238E27FC236}">
-                <a16:creationId xmlns:a16="http://schemas.microsoft.com/office/drawing/2014/main" id="{CCF2B650-644E-4B64-A943-304A6BB6BAD1}"/>
+                <a16:creationId xmlns:a16="http://schemas.microsoft.com/office/drawing/2014/main" id="{38AB4E29-93C3-480B-BAD1-7FBD2EB9E053}"/>
               </a:ext>
             </a:extLst>
           </p:cNvPr>
@@ -8759,7 +8781,7 @@
           <p:cNvPr id="50" name="Shape 39">
             <a:extLst xmlns:a="http://schemas.openxmlformats.org/drawingml/2006/main">
               <a:ext uri="{FF2B5EF4-FFF2-40B4-BE49-F238E27FC236}">
-                <a16:creationId xmlns:a16="http://schemas.microsoft.com/office/drawing/2014/main" id="{5C89D03F-F370-47C1-898F-265B8870D8EC}"/>
+                <a16:creationId xmlns:a16="http://schemas.microsoft.com/office/drawing/2014/main" id="{B58F6EF6-620C-470D-8617-6455BEC485EE}"/>
               </a:ext>
             </a:extLst>
           </p:cNvPr>
@@ -8796,7 +8818,7 @@
           <p:nvPr/>
         </p:nvPicPr>
         <p:blipFill>
-          <a:blip xmlns:r="http://schemas.openxmlformats.org/officeDocument/2006/relationships" xmlns:a="http://schemas.openxmlformats.org/drawingml/2006/main" r:embed="Rcb58053e2cf34e24"/>
+          <a:blip xmlns:r="http://schemas.openxmlformats.org/officeDocument/2006/relationships" xmlns:a="http://schemas.openxmlformats.org/drawingml/2006/main" r:embed="R6f4bf7d0a7984201"/>
           <a:stretch xmlns:a="http://schemas.openxmlformats.org/drawingml/2006/main">
             <a:fillRect l="0" t="0" r="0" b="0"/>
           </a:stretch>
@@ -8816,7 +8838,7 @@
           <p:cNvPr id="52" name="Text 40">
             <a:extLst xmlns:a="http://schemas.openxmlformats.org/drawingml/2006/main">
               <a:ext uri="{FF2B5EF4-FFF2-40B4-BE49-F238E27FC236}">
-                <a16:creationId xmlns:a16="http://schemas.microsoft.com/office/drawing/2014/main" id="{AE6680B7-D79A-43FF-908D-435992DE77F5}"/>
+                <a16:creationId xmlns:a16="http://schemas.microsoft.com/office/drawing/2014/main" id="{F0EB91CD-F618-4468-BEC0-42AA30D268ED}"/>
               </a:ext>
             </a:extLst>
           </p:cNvPr>
@@ -8862,7 +8884,7 @@
           <p:cNvPr id="53" name="Text 41">
             <a:extLst xmlns:a="http://schemas.openxmlformats.org/drawingml/2006/main">
               <a:ext uri="{FF2B5EF4-FFF2-40B4-BE49-F238E27FC236}">
-                <a16:creationId xmlns:a16="http://schemas.microsoft.com/office/drawing/2014/main" id="{9FA1BD54-47E5-4BE4-A636-3E74F4F4CE4C}"/>
+                <a16:creationId xmlns:a16="http://schemas.microsoft.com/office/drawing/2014/main" id="{BE851B35-5A5E-4883-BBF0-EBEF6E54314D}"/>
               </a:ext>
             </a:extLst>
           </p:cNvPr>
@@ -8908,7 +8930,7 @@
           <p:cNvPr id="54" name="Text 42">
             <a:extLst xmlns:a="http://schemas.openxmlformats.org/drawingml/2006/main">
               <a:ext uri="{FF2B5EF4-FFF2-40B4-BE49-F238E27FC236}">
-                <a16:creationId xmlns:a16="http://schemas.microsoft.com/office/drawing/2014/main" id="{C0E50FB5-9257-4C54-A60C-CC7C1BCBE795}"/>
+                <a16:creationId xmlns:a16="http://schemas.microsoft.com/office/drawing/2014/main" id="{67BA34BC-C010-4161-ADFA-936E7CB49C1F}"/>
               </a:ext>
             </a:extLst>
           </p:cNvPr>
@@ -8954,7 +8976,7 @@
           <p:cNvPr id="55" name="Text 43">
             <a:extLst xmlns:a="http://schemas.openxmlformats.org/drawingml/2006/main">
               <a:ext uri="{FF2B5EF4-FFF2-40B4-BE49-F238E27FC236}">
-                <a16:creationId xmlns:a16="http://schemas.microsoft.com/office/drawing/2014/main" id="{1931BCA8-D902-42D0-9427-18615882B031}"/>
+                <a16:creationId xmlns:a16="http://schemas.microsoft.com/office/drawing/2014/main" id="{C1750C33-4395-40C5-8CD9-DBA7F5E358B5}"/>
               </a:ext>
             </a:extLst>
           </p:cNvPr>
@@ -8998,7 +9020,7 @@
     </p:spTree>
     <p:extLst>
       <p:ext uri="{BB962C8B-B14F-4D97-AF65-F5344CB8AC3E}">
-        <p14:creationId xmlns:p14="http://schemas.microsoft.com/office/powerpoint/2010/main" val="257095150"/>
+        <p14:creationId xmlns:p14="http://schemas.microsoft.com/office/powerpoint/2010/main" val="1709021387"/>
       </p:ext>
     </p:extLst>
   </p:cSld>
@@ -9029,7 +9051,7 @@
           <p:cNvPr id="2" name="Text 0">
             <a:extLst xmlns:a="http://schemas.openxmlformats.org/drawingml/2006/main">
               <a:ext uri="{FF2B5EF4-FFF2-40B4-BE49-F238E27FC236}">
-                <a16:creationId xmlns:a16="http://schemas.microsoft.com/office/drawing/2014/main" id="{ACD1C703-12D8-4C00-AF60-43374F6D705D}"/>
+                <a16:creationId xmlns:a16="http://schemas.microsoft.com/office/drawing/2014/main" id="{58B91585-76C7-4F18-B891-98873E818E74}"/>
               </a:ext>
             </a:extLst>
           </p:cNvPr>
@@ -9075,7 +9097,7 @@
           <p:cNvPr id="3" name="Shape 1">
             <a:extLst xmlns:a="http://schemas.openxmlformats.org/drawingml/2006/main">
               <a:ext uri="{FF2B5EF4-FFF2-40B4-BE49-F238E27FC236}">
-                <a16:creationId xmlns:a16="http://schemas.microsoft.com/office/drawing/2014/main" id="{643EC9EB-3D23-4FD7-A341-750ADF0F72E4}"/>
+                <a16:creationId xmlns:a16="http://schemas.microsoft.com/office/drawing/2014/main" id="{442EA075-54CE-415E-A23C-476E28A707CE}"/>
               </a:ext>
             </a:extLst>
           </p:cNvPr>
@@ -9110,7 +9132,7 @@
           <p:cNvPr id="4" name="Text 2">
             <a:extLst xmlns:a="http://schemas.openxmlformats.org/drawingml/2006/main">
               <a:ext uri="{FF2B5EF4-FFF2-40B4-BE49-F238E27FC236}">
-                <a16:creationId xmlns:a16="http://schemas.microsoft.com/office/drawing/2014/main" id="{58B22437-128A-434F-834F-93DEE49F9B5C}"/>
+                <a16:creationId xmlns:a16="http://schemas.microsoft.com/office/drawing/2014/main" id="{579A0680-B6F3-4B3B-B79B-5A42D3DA94EC}"/>
               </a:ext>
             </a:extLst>
           </p:cNvPr>
@@ -9156,7 +9178,7 @@
           <p:cNvPr id="5" name="Text 3">
             <a:extLst xmlns:a="http://schemas.openxmlformats.org/drawingml/2006/main">
               <a:ext uri="{FF2B5EF4-FFF2-40B4-BE49-F238E27FC236}">
-                <a16:creationId xmlns:a16="http://schemas.microsoft.com/office/drawing/2014/main" id="{02633241-3EDB-4626-A926-5FA6EAD25B31}"/>
+                <a16:creationId xmlns:a16="http://schemas.microsoft.com/office/drawing/2014/main" id="{71471C5D-0815-472C-9F62-5DDD7DD1FA7E}"/>
               </a:ext>
             </a:extLst>
           </p:cNvPr>
@@ -9219,7 +9241,7 @@
           <p:cNvPr id="6" name="Shape 4">
             <a:extLst xmlns:a="http://schemas.openxmlformats.org/drawingml/2006/main">
               <a:ext uri="{FF2B5EF4-FFF2-40B4-BE49-F238E27FC236}">
-                <a16:creationId xmlns:a16="http://schemas.microsoft.com/office/drawing/2014/main" id="{D819C5B5-06B8-4D63-90B1-4FD6B243AB6A}"/>
+                <a16:creationId xmlns:a16="http://schemas.microsoft.com/office/drawing/2014/main" id="{DD067D9A-D0E8-4093-8B52-EF67151854FD}"/>
               </a:ext>
             </a:extLst>
           </p:cNvPr>
@@ -9254,7 +9276,7 @@
           <p:cNvPr id="7" name="Text 5">
             <a:extLst xmlns:a="http://schemas.openxmlformats.org/drawingml/2006/main">
               <a:ext uri="{FF2B5EF4-FFF2-40B4-BE49-F238E27FC236}">
-                <a16:creationId xmlns:a16="http://schemas.microsoft.com/office/drawing/2014/main" id="{4C5ABFFF-2537-4491-AEBF-748352395D00}"/>
+                <a16:creationId xmlns:a16="http://schemas.microsoft.com/office/drawing/2014/main" id="{1FA711FF-CF7D-458E-908D-C87596CE6DB8}"/>
               </a:ext>
             </a:extLst>
           </p:cNvPr>
@@ -9300,7 +9322,7 @@
           <p:cNvPr id="8" name="Text 6">
             <a:extLst xmlns:a="http://schemas.openxmlformats.org/drawingml/2006/main">
               <a:ext uri="{FF2B5EF4-FFF2-40B4-BE49-F238E27FC236}">
-                <a16:creationId xmlns:a16="http://schemas.microsoft.com/office/drawing/2014/main" id="{AE2A2BD7-10BA-4529-B8C3-A6413FB39BC1}"/>
+                <a16:creationId xmlns:a16="http://schemas.microsoft.com/office/drawing/2014/main" id="{96132184-A8AE-4441-918C-DB747D069550}"/>
               </a:ext>
             </a:extLst>
           </p:cNvPr>
@@ -9363,7 +9385,7 @@
           <p:cNvPr id="9" name="Shape 7">
             <a:extLst xmlns:a="http://schemas.openxmlformats.org/drawingml/2006/main">
               <a:ext uri="{FF2B5EF4-FFF2-40B4-BE49-F238E27FC236}">
-                <a16:creationId xmlns:a16="http://schemas.microsoft.com/office/drawing/2014/main" id="{E94AA3CF-768F-4965-92B4-D31F681C8931}"/>
+                <a16:creationId xmlns:a16="http://schemas.microsoft.com/office/drawing/2014/main" id="{990988E7-B4F8-402A-ABE7-6C7890AF770D}"/>
               </a:ext>
             </a:extLst>
           </p:cNvPr>
@@ -9398,7 +9420,7 @@
           <p:cNvPr id="10" name="Text 8">
             <a:extLst xmlns:a="http://schemas.openxmlformats.org/drawingml/2006/main">
               <a:ext uri="{FF2B5EF4-FFF2-40B4-BE49-F238E27FC236}">
-                <a16:creationId xmlns:a16="http://schemas.microsoft.com/office/drawing/2014/main" id="{A63D6F4A-46A9-4997-AEB6-C58B8FF4BAAA}"/>
+                <a16:creationId xmlns:a16="http://schemas.microsoft.com/office/drawing/2014/main" id="{7C37EE27-B702-47B8-9487-E24ED818035B}"/>
               </a:ext>
             </a:extLst>
           </p:cNvPr>
@@ -9444,7 +9466,7 @@
           <p:cNvPr id="11" name="Text 9">
             <a:extLst xmlns:a="http://schemas.openxmlformats.org/drawingml/2006/main">
               <a:ext uri="{FF2B5EF4-FFF2-40B4-BE49-F238E27FC236}">
-                <a16:creationId xmlns:a16="http://schemas.microsoft.com/office/drawing/2014/main" id="{432BAB7A-C7BC-4AF4-BA99-D6FAB549C243}"/>
+                <a16:creationId xmlns:a16="http://schemas.microsoft.com/office/drawing/2014/main" id="{213C1A34-09FC-4A26-BDD5-7511969D61D6}"/>
               </a:ext>
             </a:extLst>
           </p:cNvPr>
@@ -9496,7 +9518,18 @@
                 <a:ea typeface="Calibri"/>
                 <a:cs typeface="Calibri"/>
               </a:rPr>
-              <a:t>MAINCTRL · DOORIO</a:t>
+              <a:t>MAINCTRL · </a:t>
+            </a:r>
+            <a:r>
+              <a:rPr sz="1100">
+                <a:solidFill>
+                  <a:srgbClr val="CADCFC"/>
+                </a:solidFill>
+                <a:latin typeface="Calibri"/>
+                <a:ea typeface="Calibri"/>
+                <a:cs typeface="Calibri"/>
+              </a:rPr>
+              <a:t>IOCTRL</a:t>
             </a:r>
             <a:endParaRPr sz="1100"/>
           </a:p>
@@ -9507,7 +9540,7 @@
           <p:cNvPr id="12" name="Shape 10">
             <a:extLst xmlns:a="http://schemas.openxmlformats.org/drawingml/2006/main">
               <a:ext uri="{FF2B5EF4-FFF2-40B4-BE49-F238E27FC236}">
-                <a16:creationId xmlns:a16="http://schemas.microsoft.com/office/drawing/2014/main" id="{A0588597-AF42-4E13-97CE-752CD8CFEC34}"/>
+                <a16:creationId xmlns:a16="http://schemas.microsoft.com/office/drawing/2014/main" id="{18A8B518-E668-4B65-82A9-090005576408}"/>
               </a:ext>
             </a:extLst>
           </p:cNvPr>
@@ -9542,7 +9575,7 @@
           <p:cNvPr id="13" name="Text 11">
             <a:extLst xmlns:a="http://schemas.openxmlformats.org/drawingml/2006/main">
               <a:ext uri="{FF2B5EF4-FFF2-40B4-BE49-F238E27FC236}">
-                <a16:creationId xmlns:a16="http://schemas.microsoft.com/office/drawing/2014/main" id="{C358EF05-AB40-4A4A-8127-2240F57D053E}"/>
+                <a16:creationId xmlns:a16="http://schemas.microsoft.com/office/drawing/2014/main" id="{33F42E25-BA6B-475D-B68E-307FB1AE9232}"/>
               </a:ext>
             </a:extLst>
           </p:cNvPr>
@@ -9588,7 +9621,7 @@
           <p:cNvPr id="14" name="Text 12">
             <a:extLst xmlns:a="http://schemas.openxmlformats.org/drawingml/2006/main">
               <a:ext uri="{FF2B5EF4-FFF2-40B4-BE49-F238E27FC236}">
-                <a16:creationId xmlns:a16="http://schemas.microsoft.com/office/drawing/2014/main" id="{73C6BCC6-AB76-4FE0-BD03-DB2DD1A37A9B}"/>
+                <a16:creationId xmlns:a16="http://schemas.microsoft.com/office/drawing/2014/main" id="{B2CEC1D6-3383-44EA-AE3A-9C2255307736}"/>
               </a:ext>
             </a:extLst>
           </p:cNvPr>
@@ -9651,7 +9684,7 @@
           <p:cNvPr id="15" name="Shape 13">
             <a:extLst xmlns:a="http://schemas.openxmlformats.org/drawingml/2006/main">
               <a:ext uri="{FF2B5EF4-FFF2-40B4-BE49-F238E27FC236}">
-                <a16:creationId xmlns:a16="http://schemas.microsoft.com/office/drawing/2014/main" id="{7C459015-51B9-4328-A013-A345DFC9B3DE}"/>
+                <a16:creationId xmlns:a16="http://schemas.microsoft.com/office/drawing/2014/main" id="{F3731E4D-17D4-43DC-AF27-020FC3B83EDC}"/>
               </a:ext>
             </a:extLst>
           </p:cNvPr>
@@ -9688,7 +9721,7 @@
           <p:nvPr/>
         </p:nvPicPr>
         <p:blipFill>
-          <a:blip xmlns:r="http://schemas.openxmlformats.org/officeDocument/2006/relationships" xmlns:a="http://schemas.openxmlformats.org/drawingml/2006/main" r:embed="Rb7d6a63cff794b05"/>
+          <a:blip xmlns:r="http://schemas.openxmlformats.org/officeDocument/2006/relationships" xmlns:a="http://schemas.openxmlformats.org/drawingml/2006/main" r:embed="Rf6a3274e78b94346"/>
           <a:stretch xmlns:a="http://schemas.openxmlformats.org/drawingml/2006/main">
             <a:fillRect l="0" t="0" r="0" b="0"/>
           </a:stretch>
@@ -9708,7 +9741,7 @@
           <p:cNvPr id="17" name="Text 14">
             <a:extLst xmlns:a="http://schemas.openxmlformats.org/drawingml/2006/main">
               <a:ext uri="{FF2B5EF4-FFF2-40B4-BE49-F238E27FC236}">
-                <a16:creationId xmlns:a16="http://schemas.microsoft.com/office/drawing/2014/main" id="{D5864C74-65C5-4735-BC46-4AA7D52C0100}"/>
+                <a16:creationId xmlns:a16="http://schemas.microsoft.com/office/drawing/2014/main" id="{60B5376C-A770-42BE-ACD9-596C96338F39}"/>
               </a:ext>
             </a:extLst>
           </p:cNvPr>
@@ -9754,7 +9787,7 @@
           <p:cNvPr id="18" name="Text 15">
             <a:extLst xmlns:a="http://schemas.openxmlformats.org/drawingml/2006/main">
               <a:ext uri="{FF2B5EF4-FFF2-40B4-BE49-F238E27FC236}">
-                <a16:creationId xmlns:a16="http://schemas.microsoft.com/office/drawing/2014/main" id="{E47357E4-3850-48A1-9A73-1CE2E1D88BC9}"/>
+                <a16:creationId xmlns:a16="http://schemas.microsoft.com/office/drawing/2014/main" id="{E2F6957E-7A55-4F65-AE7B-6ED3C597FFFC}"/>
               </a:ext>
             </a:extLst>
           </p:cNvPr>
@@ -9789,7 +9822,29 @@
                 <a:ea typeface="Calibri"/>
                 <a:cs typeface="Calibri"/>
               </a:rPr>
-              <a:t>MAINCTRL = COTS MYIR MYD-YF13X (STM32MP135, Linux) · SYSCTRL custom STM32 (gantry + labeling) · DOORIO = COTS relay / IO module on RS485 · LANECTRL ×10 custom, our design, with the lane buttons and LEDs on the board.</a:t>
+              <a:t>MAINCTRL = COTS MYIR MYD-YF13X (STM32MP135, Linux) · SYSCTRL custom STM32 (gantry + labeling) · </a:t>
+            </a:r>
+            <a:r>
+              <a:rPr sz="1100">
+                <a:solidFill>
+                  <a:srgbClr val="1A1F24"/>
+                </a:solidFill>
+                <a:latin typeface="Calibri"/>
+                <a:ea typeface="Calibri"/>
+                <a:cs typeface="Calibri"/>
+              </a:rPr>
+              <a:t>IOCTRL</a:t>
+            </a:r>
+            <a:r>
+              <a:rPr sz="1100">
+                <a:solidFill>
+                  <a:srgbClr val="1A1F24"/>
+                </a:solidFill>
+                <a:latin typeface="Calibri"/>
+                <a:ea typeface="Calibri"/>
+                <a:cs typeface="Calibri"/>
+              </a:rPr>
+              <a:t> = COTS relay / IO module on RS485 · LANECTRL ×10 custom, our design, with the lane buttons and LEDs on the board.</a:t>
             </a:r>
             <a:endParaRPr sz="1100"/>
           </a:p>
@@ -9800,7 +9855,7 @@
           <p:cNvPr id="19" name="Shape 16">
             <a:extLst xmlns:a="http://schemas.openxmlformats.org/drawingml/2006/main">
               <a:ext uri="{FF2B5EF4-FFF2-40B4-BE49-F238E27FC236}">
-                <a16:creationId xmlns:a16="http://schemas.microsoft.com/office/drawing/2014/main" id="{7C6CE06C-C94C-4C80-B66B-75926E1B70B2}"/>
+                <a16:creationId xmlns:a16="http://schemas.microsoft.com/office/drawing/2014/main" id="{85EAEA85-2736-481A-8998-16D1791A9C84}"/>
               </a:ext>
             </a:extLst>
           </p:cNvPr>
@@ -9837,7 +9892,7 @@
           <p:nvPr/>
         </p:nvPicPr>
         <p:blipFill>
-          <a:blip xmlns:r="http://schemas.openxmlformats.org/officeDocument/2006/relationships" xmlns:a="http://schemas.openxmlformats.org/drawingml/2006/main" r:embed="Ra0917482171e4136"/>
+          <a:blip xmlns:r="http://schemas.openxmlformats.org/officeDocument/2006/relationships" xmlns:a="http://schemas.openxmlformats.org/drawingml/2006/main" r:embed="R713e257c794c4e6d"/>
           <a:stretch xmlns:a="http://schemas.openxmlformats.org/drawingml/2006/main">
             <a:fillRect l="0" t="0" r="0" b="0"/>
           </a:stretch>
@@ -9857,7 +9912,7 @@
           <p:cNvPr id="21" name="Text 17">
             <a:extLst xmlns:a="http://schemas.openxmlformats.org/drawingml/2006/main">
               <a:ext uri="{FF2B5EF4-FFF2-40B4-BE49-F238E27FC236}">
-                <a16:creationId xmlns:a16="http://schemas.microsoft.com/office/drawing/2014/main" id="{0ABC9D41-BDA1-4766-87C5-6F0EC289CAB3}"/>
+                <a16:creationId xmlns:a16="http://schemas.microsoft.com/office/drawing/2014/main" id="{7D4B2DF5-5E7B-4662-982B-E63F6AEED10A}"/>
               </a:ext>
             </a:extLst>
           </p:cNvPr>
@@ -9903,7 +9958,7 @@
           <p:cNvPr id="22" name="Text 18">
             <a:extLst xmlns:a="http://schemas.openxmlformats.org/drawingml/2006/main">
               <a:ext uri="{FF2B5EF4-FFF2-40B4-BE49-F238E27FC236}">
-                <a16:creationId xmlns:a16="http://schemas.microsoft.com/office/drawing/2014/main" id="{DF92681C-56B5-46FC-A192-78A63D6D0972}"/>
+                <a16:creationId xmlns:a16="http://schemas.microsoft.com/office/drawing/2014/main" id="{9BA74461-0BDA-44BC-99EB-B3D5A52BEEB0}"/>
               </a:ext>
             </a:extLst>
           </p:cNvPr>
@@ -9949,7 +10004,7 @@
           <p:cNvPr id="23" name="Shape 19">
             <a:extLst xmlns:a="http://schemas.openxmlformats.org/drawingml/2006/main">
               <a:ext uri="{FF2B5EF4-FFF2-40B4-BE49-F238E27FC236}">
-                <a16:creationId xmlns:a16="http://schemas.microsoft.com/office/drawing/2014/main" id="{B83241CB-F94D-46E5-AB95-30F6071AA3FB}"/>
+                <a16:creationId xmlns:a16="http://schemas.microsoft.com/office/drawing/2014/main" id="{EBDE644F-0484-47AB-BA7E-DAB03639CEE5}"/>
               </a:ext>
             </a:extLst>
           </p:cNvPr>
@@ -9986,7 +10041,7 @@
           <p:nvPr/>
         </p:nvPicPr>
         <p:blipFill>
-          <a:blip xmlns:r="http://schemas.openxmlformats.org/officeDocument/2006/relationships" xmlns:a="http://schemas.openxmlformats.org/drawingml/2006/main" r:embed="R5badb06b2ae14ed3"/>
+          <a:blip xmlns:r="http://schemas.openxmlformats.org/officeDocument/2006/relationships" xmlns:a="http://schemas.openxmlformats.org/drawingml/2006/main" r:embed="Re471d80dfe654ad8"/>
           <a:stretch xmlns:a="http://schemas.openxmlformats.org/drawingml/2006/main">
             <a:fillRect l="0" t="0" r="0" b="0"/>
           </a:stretch>
@@ -10006,7 +10061,7 @@
           <p:cNvPr id="25" name="Text 20">
             <a:extLst xmlns:a="http://schemas.openxmlformats.org/drawingml/2006/main">
               <a:ext uri="{FF2B5EF4-FFF2-40B4-BE49-F238E27FC236}">
-                <a16:creationId xmlns:a16="http://schemas.microsoft.com/office/drawing/2014/main" id="{F877B042-975C-4D28-A523-EE9D72183994}"/>
+                <a16:creationId xmlns:a16="http://schemas.microsoft.com/office/drawing/2014/main" id="{292077F8-AF2E-42D6-BECA-3E3F4F831087}"/>
               </a:ext>
             </a:extLst>
           </p:cNvPr>
@@ -10052,7 +10107,7 @@
           <p:cNvPr id="26" name="Text 21">
             <a:extLst xmlns:a="http://schemas.openxmlformats.org/drawingml/2006/main">
               <a:ext uri="{FF2B5EF4-FFF2-40B4-BE49-F238E27FC236}">
-                <a16:creationId xmlns:a16="http://schemas.microsoft.com/office/drawing/2014/main" id="{BA56A3B1-E83B-4853-BC24-382540354990}"/>
+                <a16:creationId xmlns:a16="http://schemas.microsoft.com/office/drawing/2014/main" id="{869E0954-1769-43FE-844C-281338A841FE}"/>
               </a:ext>
             </a:extLst>
           </p:cNvPr>
@@ -10087,7 +10142,29 @@
                 <a:ea typeface="Calibri"/>
                 <a:cs typeface="Calibri"/>
               </a:rPr>
-              <a:t>CAN backbone to SYSCTRL and the 10 lane rows · RS485 to DOORIO · Ethernet / Wi-Fi to the site.</a:t>
+              <a:t>CAN backbone to SYSCTRL and the 10 lane rows · RS485 to </a:t>
+            </a:r>
+            <a:r>
+              <a:rPr sz="1100">
+                <a:solidFill>
+                  <a:srgbClr val="1A1F24"/>
+                </a:solidFill>
+                <a:latin typeface="Calibri"/>
+                <a:ea typeface="Calibri"/>
+                <a:cs typeface="Calibri"/>
+              </a:rPr>
+              <a:t>IOCTRL</a:t>
+            </a:r>
+            <a:r>
+              <a:rPr sz="1100">
+                <a:solidFill>
+                  <a:srgbClr val="1A1F24"/>
+                </a:solidFill>
+                <a:latin typeface="Calibri"/>
+                <a:ea typeface="Calibri"/>
+                <a:cs typeface="Calibri"/>
+              </a:rPr>
+              <a:t> · Ethernet / Wi-Fi to the site.</a:t>
             </a:r>
             <a:endParaRPr sz="1100"/>
           </a:p>
@@ -10098,7 +10175,7 @@
           <p:cNvPr id="27" name="Shape 22">
             <a:extLst xmlns:a="http://schemas.openxmlformats.org/drawingml/2006/main">
               <a:ext uri="{FF2B5EF4-FFF2-40B4-BE49-F238E27FC236}">
-                <a16:creationId xmlns:a16="http://schemas.microsoft.com/office/drawing/2014/main" id="{0F4A1EB3-6386-46F6-A907-87C0EFE585EF}"/>
+                <a16:creationId xmlns:a16="http://schemas.microsoft.com/office/drawing/2014/main" id="{001B1D42-51F3-43C5-A22B-A60467776BEE}"/>
               </a:ext>
             </a:extLst>
           </p:cNvPr>
@@ -10135,7 +10212,7 @@
           <p:nvPr/>
         </p:nvPicPr>
         <p:blipFill>
-          <a:blip xmlns:r="http://schemas.openxmlformats.org/officeDocument/2006/relationships" xmlns:a="http://schemas.openxmlformats.org/drawingml/2006/main" r:embed="Ra80ace0eca5343ce"/>
+          <a:blip xmlns:r="http://schemas.openxmlformats.org/officeDocument/2006/relationships" xmlns:a="http://schemas.openxmlformats.org/drawingml/2006/main" r:embed="R84fd1c9b921c477e"/>
           <a:stretch xmlns:a="http://schemas.openxmlformats.org/drawingml/2006/main">
             <a:fillRect l="0" t="0" r="0" b="0"/>
           </a:stretch>
@@ -10155,7 +10232,7 @@
           <p:cNvPr id="29" name="Text 23">
             <a:extLst xmlns:a="http://schemas.openxmlformats.org/drawingml/2006/main">
               <a:ext uri="{FF2B5EF4-FFF2-40B4-BE49-F238E27FC236}">
-                <a16:creationId xmlns:a16="http://schemas.microsoft.com/office/drawing/2014/main" id="{46B6D5BA-46A8-4927-9D37-BF651B256B3F}"/>
+                <a16:creationId xmlns:a16="http://schemas.microsoft.com/office/drawing/2014/main" id="{D2E896CD-E153-4BBF-AF5D-689977BDF7BC}"/>
               </a:ext>
             </a:extLst>
           </p:cNvPr>
@@ -10201,7 +10278,7 @@
           <p:cNvPr id="30" name="Text 24">
             <a:extLst xmlns:a="http://schemas.openxmlformats.org/drawingml/2006/main">
               <a:ext uri="{FF2B5EF4-FFF2-40B4-BE49-F238E27FC236}">
-                <a16:creationId xmlns:a16="http://schemas.microsoft.com/office/drawing/2014/main" id="{96106B1E-CE4F-4F3B-8468-ECB2EC3EB0CF}"/>
+                <a16:creationId xmlns:a16="http://schemas.microsoft.com/office/drawing/2014/main" id="{977146B5-0FEB-4A2B-B73C-D1C59C39CBCB}"/>
               </a:ext>
             </a:extLst>
           </p:cNvPr>
@@ -10251,8 +10328,8 @@
           <p:nvPr/>
         </p:nvPicPr>
         <p:blipFill>
-          <a:blip xmlns:r="http://schemas.openxmlformats.org/officeDocument/2006/relationships" xmlns:a="http://schemas.openxmlformats.org/drawingml/2006/main" r:embed="Ra2d109eb47ac49cd"/>
-          <a:srcRect xmlns:a="http://schemas.openxmlformats.org/drawingml/2006/main" l="1719" t="0" r="1719" b="0"/>
+          <a:blip xmlns:r="http://schemas.openxmlformats.org/officeDocument/2006/relationships" xmlns:a="http://schemas.openxmlformats.org/drawingml/2006/main" r:embed="R9a926d043fcf456e"/>
+          <a:srcRect xmlns:a="http://schemas.openxmlformats.org/drawingml/2006/main" l="2473" t="0" r="2473" b="0"/>
           <a:stretch xmlns:a="http://schemas.openxmlformats.org/drawingml/2006/main">
             <a:fillRect l="0" t="0" r="0" b="0"/>
           </a:stretch>
@@ -10272,7 +10349,7 @@
           <p:cNvPr id="32" name="Text 25">
             <a:extLst xmlns:a="http://schemas.openxmlformats.org/drawingml/2006/main">
               <a:ext uri="{FF2B5EF4-FFF2-40B4-BE49-F238E27FC236}">
-                <a16:creationId xmlns:a16="http://schemas.microsoft.com/office/drawing/2014/main" id="{AE7DC5A8-EE51-4286-8F99-103D73CB86FF}"/>
+                <a16:creationId xmlns:a16="http://schemas.microsoft.com/office/drawing/2014/main" id="{01DA3F16-F9A6-4DC6-A30D-F65ED2207351}"/>
               </a:ext>
             </a:extLst>
           </p:cNvPr>
@@ -10322,7 +10399,7 @@
           <p:nvPr/>
         </p:nvPicPr>
         <p:blipFill>
-          <a:blip xmlns:r="http://schemas.openxmlformats.org/officeDocument/2006/relationships" xmlns:a="http://schemas.openxmlformats.org/drawingml/2006/main" r:embed="Rdf3c72fd99424953"/>
+          <a:blip xmlns:r="http://schemas.openxmlformats.org/officeDocument/2006/relationships" xmlns:a="http://schemas.openxmlformats.org/drawingml/2006/main" r:embed="R9e43e99c4b824f88"/>
           <a:stretch xmlns:a="http://schemas.openxmlformats.org/drawingml/2006/main">
             <a:fillRect l="0" t="0" r="0" b="0"/>
           </a:stretch>
@@ -10342,7 +10419,7 @@
           <p:cNvPr id="34" name="Text 26">
             <a:extLst xmlns:a="http://schemas.openxmlformats.org/drawingml/2006/main">
               <a:ext uri="{FF2B5EF4-FFF2-40B4-BE49-F238E27FC236}">
-                <a16:creationId xmlns:a16="http://schemas.microsoft.com/office/drawing/2014/main" id="{FEEAD4AB-F090-4442-B92F-1B2542737FED}"/>
+                <a16:creationId xmlns:a16="http://schemas.microsoft.com/office/drawing/2014/main" id="{A8A54546-995D-43AA-AA2F-AC275DB97D3F}"/>
               </a:ext>
             </a:extLst>
           </p:cNvPr>
@@ -10388,7 +10465,7 @@
           <p:cNvPr id="35" name="Text 27">
             <a:extLst xmlns:a="http://schemas.openxmlformats.org/drawingml/2006/main">
               <a:ext uri="{FF2B5EF4-FFF2-40B4-BE49-F238E27FC236}">
-                <a16:creationId xmlns:a16="http://schemas.microsoft.com/office/drawing/2014/main" id="{3D0FE6BE-5BD8-47A6-8074-F0DAED6E3575}"/>
+                <a16:creationId xmlns:a16="http://schemas.microsoft.com/office/drawing/2014/main" id="{8AA1D847-472F-4774-8376-338342B04F6B}"/>
               </a:ext>
             </a:extLst>
           </p:cNvPr>
@@ -10434,7 +10511,7 @@
           <p:cNvPr id="36" name="Text 28">
             <a:extLst xmlns:a="http://schemas.openxmlformats.org/drawingml/2006/main">
               <a:ext uri="{FF2B5EF4-FFF2-40B4-BE49-F238E27FC236}">
-                <a16:creationId xmlns:a16="http://schemas.microsoft.com/office/drawing/2014/main" id="{CCCC8846-155D-40F5-AADD-48CD7C4E8F0E}"/>
+                <a16:creationId xmlns:a16="http://schemas.microsoft.com/office/drawing/2014/main" id="{623455E2-B078-4D57-9A7E-34D389D93142}"/>
               </a:ext>
             </a:extLst>
           </p:cNvPr>
@@ -10478,7 +10555,7 @@
     </p:spTree>
     <p:extLst>
       <p:ext uri="{BB962C8B-B14F-4D97-AF65-F5344CB8AC3E}">
-        <p14:creationId xmlns:p14="http://schemas.microsoft.com/office/powerpoint/2010/main" val="1695179258"/>
+        <p14:creationId xmlns:p14="http://schemas.microsoft.com/office/powerpoint/2010/main" val="1791470051"/>
       </p:ext>
     </p:extLst>
   </p:cSld>
@@ -10509,7 +10586,7 @@
           <p:cNvPr id="2" name="Shape 0">
             <a:extLst xmlns:a="http://schemas.openxmlformats.org/drawingml/2006/main">
               <a:ext uri="{FF2B5EF4-FFF2-40B4-BE49-F238E27FC236}">
-                <a16:creationId xmlns:a16="http://schemas.microsoft.com/office/drawing/2014/main" id="{ACB07C61-4572-4313-B8E8-BAE82DD3D0D5}"/>
+                <a16:creationId xmlns:a16="http://schemas.microsoft.com/office/drawing/2014/main" id="{8F753E77-A8B9-4F63-8794-B710D9A9E165}"/>
               </a:ext>
             </a:extLst>
           </p:cNvPr>
@@ -10546,7 +10623,7 @@
           <p:nvPr/>
         </p:nvPicPr>
         <p:blipFill>
-          <a:blip xmlns:r="http://schemas.openxmlformats.org/officeDocument/2006/relationships" xmlns:a="http://schemas.openxmlformats.org/drawingml/2006/main" r:embed="R81e1977039664186"/>
+          <a:blip xmlns:r="http://schemas.openxmlformats.org/officeDocument/2006/relationships" xmlns:a="http://schemas.openxmlformats.org/drawingml/2006/main" r:embed="R618ac6c759044938"/>
           <a:stretch xmlns:a="http://schemas.openxmlformats.org/drawingml/2006/main">
             <a:fillRect l="0" t="0" r="0" b="0"/>
           </a:stretch>
@@ -10566,7 +10643,7 @@
           <p:cNvPr id="4" name="Text 1">
             <a:extLst xmlns:a="http://schemas.openxmlformats.org/drawingml/2006/main">
               <a:ext uri="{FF2B5EF4-FFF2-40B4-BE49-F238E27FC236}">
-                <a16:creationId xmlns:a16="http://schemas.microsoft.com/office/drawing/2014/main" id="{28A64B92-89A1-43C5-8E0D-EE778738593C}"/>
+                <a16:creationId xmlns:a16="http://schemas.microsoft.com/office/drawing/2014/main" id="{E7AB911B-E167-4439-BAD3-59BA3CE6CC0C}"/>
               </a:ext>
             </a:extLst>
           </p:cNvPr>
@@ -10612,7 +10689,7 @@
           <p:cNvPr id="5" name="Text 2">
             <a:extLst xmlns:a="http://schemas.openxmlformats.org/drawingml/2006/main">
               <a:ext uri="{FF2B5EF4-FFF2-40B4-BE49-F238E27FC236}">
-                <a16:creationId xmlns:a16="http://schemas.microsoft.com/office/drawing/2014/main" id="{D0127D01-D2D9-44A2-B39D-5BEFCD15494C}"/>
+                <a16:creationId xmlns:a16="http://schemas.microsoft.com/office/drawing/2014/main" id="{B37B639E-0AE5-4127-9181-95241258C018}"/>
               </a:ext>
             </a:extLst>
           </p:cNvPr>
@@ -10662,7 +10739,7 @@
           <p:nvPr/>
         </p:nvPicPr>
         <p:blipFill>
-          <a:blip xmlns:r="http://schemas.openxmlformats.org/officeDocument/2006/relationships" xmlns:a="http://schemas.openxmlformats.org/drawingml/2006/main" r:embed="Rda9e73f087324e97"/>
+          <a:blip xmlns:r="http://schemas.openxmlformats.org/officeDocument/2006/relationships" xmlns:a="http://schemas.openxmlformats.org/drawingml/2006/main" r:embed="R33e608722e4b43ff"/>
           <a:stretch xmlns:a="http://schemas.openxmlformats.org/drawingml/2006/main">
             <a:fillRect l="0" t="0" r="0" b="0"/>
           </a:stretch>
@@ -10682,7 +10759,7 @@
           <p:cNvPr id="7" name="Text 3">
             <a:extLst xmlns:a="http://schemas.openxmlformats.org/drawingml/2006/main">
               <a:ext uri="{FF2B5EF4-FFF2-40B4-BE49-F238E27FC236}">
-                <a16:creationId xmlns:a16="http://schemas.microsoft.com/office/drawing/2014/main" id="{C5766B85-63A3-45D3-8BD8-673F0EB03EA5}"/>
+                <a16:creationId xmlns:a16="http://schemas.microsoft.com/office/drawing/2014/main" id="{30878E21-64A1-4EDC-A298-1DA42DCBAB98}"/>
               </a:ext>
             </a:extLst>
           </p:cNvPr>
@@ -10728,7 +10805,7 @@
           <p:cNvPr id="8" name="Text 4">
             <a:extLst xmlns:a="http://schemas.openxmlformats.org/drawingml/2006/main">
               <a:ext uri="{FF2B5EF4-FFF2-40B4-BE49-F238E27FC236}">
-                <a16:creationId xmlns:a16="http://schemas.microsoft.com/office/drawing/2014/main" id="{58FF7B87-FDB2-48F0-BE2D-BF8E3E896F7A}"/>
+                <a16:creationId xmlns:a16="http://schemas.microsoft.com/office/drawing/2014/main" id="{6337EEDE-34D5-433C-8181-B02F2A266EC6}"/>
               </a:ext>
             </a:extLst>
           </p:cNvPr>
@@ -10820,7 +10897,7 @@
           <p:cNvPr id="9" name="Shape 5">
             <a:extLst xmlns:a="http://schemas.openxmlformats.org/drawingml/2006/main">
               <a:ext uri="{FF2B5EF4-FFF2-40B4-BE49-F238E27FC236}">
-                <a16:creationId xmlns:a16="http://schemas.microsoft.com/office/drawing/2014/main" id="{FCEB0A23-A3F1-4585-8EA2-07A66393CAD7}"/>
+                <a16:creationId xmlns:a16="http://schemas.microsoft.com/office/drawing/2014/main" id="{56269803-1396-4016-8BEF-72949B582736}"/>
               </a:ext>
             </a:extLst>
           </p:cNvPr>
@@ -10855,7 +10932,7 @@
           <p:cNvPr id="10" name="Shape 6">
             <a:extLst xmlns:a="http://schemas.openxmlformats.org/drawingml/2006/main">
               <a:ext uri="{FF2B5EF4-FFF2-40B4-BE49-F238E27FC236}">
-                <a16:creationId xmlns:a16="http://schemas.microsoft.com/office/drawing/2014/main" id="{6404BB98-FF2B-4187-9A28-6F51D8CCB2C5}"/>
+                <a16:creationId xmlns:a16="http://schemas.microsoft.com/office/drawing/2014/main" id="{515D0D61-0B1C-4E53-8188-E30D249D8A86}"/>
               </a:ext>
             </a:extLst>
           </p:cNvPr>
@@ -10892,7 +10969,7 @@
           <p:nvPr/>
         </p:nvPicPr>
         <p:blipFill>
-          <a:blip xmlns:r="http://schemas.openxmlformats.org/officeDocument/2006/relationships" xmlns:a="http://schemas.openxmlformats.org/drawingml/2006/main" r:embed="R3c649591272847ec"/>
+          <a:blip xmlns:r="http://schemas.openxmlformats.org/officeDocument/2006/relationships" xmlns:a="http://schemas.openxmlformats.org/drawingml/2006/main" r:embed="Ra416c98fb0d34eeb"/>
           <a:stretch xmlns:a="http://schemas.openxmlformats.org/drawingml/2006/main">
             <a:fillRect l="0" t="0" r="0" b="0"/>
           </a:stretch>
@@ -10912,7 +10989,7 @@
           <p:cNvPr id="12" name="Text 7">
             <a:extLst xmlns:a="http://schemas.openxmlformats.org/drawingml/2006/main">
               <a:ext uri="{FF2B5EF4-FFF2-40B4-BE49-F238E27FC236}">
-                <a16:creationId xmlns:a16="http://schemas.microsoft.com/office/drawing/2014/main" id="{D4B7223D-86BC-4053-8623-67F18B1FC832}"/>
+                <a16:creationId xmlns:a16="http://schemas.microsoft.com/office/drawing/2014/main" id="{D32F7D18-55FD-48D5-A44C-F01BE0B34C02}"/>
               </a:ext>
             </a:extLst>
           </p:cNvPr>
@@ -10958,7 +11035,7 @@
           <p:cNvPr id="13" name="Text 8">
             <a:extLst xmlns:a="http://schemas.openxmlformats.org/drawingml/2006/main">
               <a:ext uri="{FF2B5EF4-FFF2-40B4-BE49-F238E27FC236}">
-                <a16:creationId xmlns:a16="http://schemas.microsoft.com/office/drawing/2014/main" id="{48143DFF-C5AE-4EF7-B7D8-DA56812851F5}"/>
+                <a16:creationId xmlns:a16="http://schemas.microsoft.com/office/drawing/2014/main" id="{5BC0E2DA-E41E-4D6A-B942-4650CAAC2F79}"/>
               </a:ext>
             </a:extLst>
           </p:cNvPr>
@@ -11075,7 +11152,7 @@
           <p:cNvPr id="14" name="Text 9">
             <a:extLst xmlns:a="http://schemas.openxmlformats.org/drawingml/2006/main">
               <a:ext uri="{FF2B5EF4-FFF2-40B4-BE49-F238E27FC236}">
-                <a16:creationId xmlns:a16="http://schemas.microsoft.com/office/drawing/2014/main" id="{69A83E0F-56CD-4FD4-9D90-C1CD4444AECF}"/>
+                <a16:creationId xmlns:a16="http://schemas.microsoft.com/office/drawing/2014/main" id="{05791390-FE1F-49BE-AAA7-76EFB1972A71}"/>
               </a:ext>
             </a:extLst>
           </p:cNvPr>
@@ -11121,7 +11198,7 @@
           <p:cNvPr id="15" name="Text 10">
             <a:extLst xmlns:a="http://schemas.openxmlformats.org/drawingml/2006/main">
               <a:ext uri="{FF2B5EF4-FFF2-40B4-BE49-F238E27FC236}">
-                <a16:creationId xmlns:a16="http://schemas.microsoft.com/office/drawing/2014/main" id="{D27B6A5E-0963-4229-9FA9-5415BFB431E3}"/>
+                <a16:creationId xmlns:a16="http://schemas.microsoft.com/office/drawing/2014/main" id="{1D211AA2-D81B-47FF-A17C-5ADE7D868829}"/>
               </a:ext>
             </a:extLst>
           </p:cNvPr>
@@ -11167,7 +11244,7 @@
           <p:cNvPr id="16" name="Text 11">
             <a:extLst xmlns:a="http://schemas.openxmlformats.org/drawingml/2006/main">
               <a:ext uri="{FF2B5EF4-FFF2-40B4-BE49-F238E27FC236}">
-                <a16:creationId xmlns:a16="http://schemas.microsoft.com/office/drawing/2014/main" id="{2805E9B2-9016-438A-BD1F-60E848A699A4}"/>
+                <a16:creationId xmlns:a16="http://schemas.microsoft.com/office/drawing/2014/main" id="{24DB4700-334D-45A5-A7EB-B596C6FC8D1D}"/>
               </a:ext>
             </a:extLst>
           </p:cNvPr>
@@ -11211,7 +11288,7 @@
     </p:spTree>
     <p:extLst>
       <p:ext uri="{BB962C8B-B14F-4D97-AF65-F5344CB8AC3E}">
-        <p14:creationId xmlns:p14="http://schemas.microsoft.com/office/powerpoint/2010/main" val="563810967"/>
+        <p14:creationId xmlns:p14="http://schemas.microsoft.com/office/powerpoint/2010/main" val="1861221827"/>
       </p:ext>
     </p:extLst>
   </p:cSld>
@@ -11242,7 +11319,7 @@
           <p:cNvPr id="2" name="Shape 0">
             <a:extLst xmlns:a="http://schemas.openxmlformats.org/drawingml/2006/main">
               <a:ext uri="{FF2B5EF4-FFF2-40B4-BE49-F238E27FC236}">
-                <a16:creationId xmlns:a16="http://schemas.microsoft.com/office/drawing/2014/main" id="{553F4826-C696-4E63-92D2-142CBED98783}"/>
+                <a16:creationId xmlns:a16="http://schemas.microsoft.com/office/drawing/2014/main" id="{CFA26A03-45D8-44DF-B5EE-4847F0D34CF6}"/>
               </a:ext>
             </a:extLst>
           </p:cNvPr>
@@ -11279,7 +11356,7 @@
           <p:nvPr/>
         </p:nvPicPr>
         <p:blipFill>
-          <a:blip xmlns:r="http://schemas.openxmlformats.org/officeDocument/2006/relationships" xmlns:a="http://schemas.openxmlformats.org/drawingml/2006/main" r:embed="Ra76137d597504e95"/>
+          <a:blip xmlns:r="http://schemas.openxmlformats.org/officeDocument/2006/relationships" xmlns:a="http://schemas.openxmlformats.org/drawingml/2006/main" r:embed="R82a17682c7c746a2"/>
           <a:stretch xmlns:a="http://schemas.openxmlformats.org/drawingml/2006/main">
             <a:fillRect l="0" t="0" r="0" b="0"/>
           </a:stretch>
@@ -11299,7 +11376,7 @@
           <p:cNvPr id="4" name="Text 1">
             <a:extLst xmlns:a="http://schemas.openxmlformats.org/drawingml/2006/main">
               <a:ext uri="{FF2B5EF4-FFF2-40B4-BE49-F238E27FC236}">
-                <a16:creationId xmlns:a16="http://schemas.microsoft.com/office/drawing/2014/main" id="{EF32E437-ED99-448D-9996-0DB896C64C24}"/>
+                <a16:creationId xmlns:a16="http://schemas.microsoft.com/office/drawing/2014/main" id="{B400B723-F008-4CB0-B189-7174D3982A9B}"/>
               </a:ext>
             </a:extLst>
           </p:cNvPr>
@@ -11345,7 +11422,7 @@
           <p:cNvPr id="5" name="Text 2">
             <a:extLst xmlns:a="http://schemas.openxmlformats.org/drawingml/2006/main">
               <a:ext uri="{FF2B5EF4-FFF2-40B4-BE49-F238E27FC236}">
-                <a16:creationId xmlns:a16="http://schemas.microsoft.com/office/drawing/2014/main" id="{B9353A75-86AD-4607-9A51-F7FE7104CEEC}"/>
+                <a16:creationId xmlns:a16="http://schemas.microsoft.com/office/drawing/2014/main" id="{9F2ACAC3-7EE3-4EF3-8D09-FC3D31AD5476}"/>
               </a:ext>
             </a:extLst>
           </p:cNvPr>
@@ -11395,7 +11472,8 @@
           <p:nvPr/>
         </p:nvPicPr>
         <p:blipFill>
-          <a:blip xmlns:r="http://schemas.openxmlformats.org/officeDocument/2006/relationships" xmlns:a="http://schemas.openxmlformats.org/drawingml/2006/main" r:embed="R32c19e3ebddb4f63"/>
+          <a:blip xmlns:r="http://schemas.openxmlformats.org/officeDocument/2006/relationships" xmlns:a="http://schemas.openxmlformats.org/drawingml/2006/main" r:embed="R7f74ea82ecef4534"/>
+          <a:srcRect xmlns:a="http://schemas.openxmlformats.org/drawingml/2006/main" l="0" t="169" r="0" b="169"/>
           <a:stretch xmlns:a="http://schemas.openxmlformats.org/drawingml/2006/main">
             <a:fillRect l="0" t="0" r="0" b="0"/>
           </a:stretch>
@@ -11415,7 +11493,7 @@
           <p:cNvPr id="7" name="Text 3">
             <a:extLst xmlns:a="http://schemas.openxmlformats.org/drawingml/2006/main">
               <a:ext uri="{FF2B5EF4-FFF2-40B4-BE49-F238E27FC236}">
-                <a16:creationId xmlns:a16="http://schemas.microsoft.com/office/drawing/2014/main" id="{1A167960-3D67-4204-B4BA-9BD782C649A0}"/>
+                <a16:creationId xmlns:a16="http://schemas.microsoft.com/office/drawing/2014/main" id="{1C806BD8-620B-4CCB-9CF7-53511F2B1842}"/>
               </a:ext>
             </a:extLst>
           </p:cNvPr>
@@ -11461,7 +11539,7 @@
           <p:cNvPr id="8" name="Text 4">
             <a:extLst xmlns:a="http://schemas.openxmlformats.org/drawingml/2006/main">
               <a:ext uri="{FF2B5EF4-FFF2-40B4-BE49-F238E27FC236}">
-                <a16:creationId xmlns:a16="http://schemas.microsoft.com/office/drawing/2014/main" id="{79468721-01BC-4E80-91E9-DF012F6172D3}"/>
+                <a16:creationId xmlns:a16="http://schemas.microsoft.com/office/drawing/2014/main" id="{58FCFD8E-0CB7-4349-BC51-F0720DD66024}"/>
               </a:ext>
             </a:extLst>
           </p:cNvPr>
@@ -11553,7 +11631,7 @@
           <p:cNvPr id="9" name="Shape 5">
             <a:extLst xmlns:a="http://schemas.openxmlformats.org/drawingml/2006/main">
               <a:ext uri="{FF2B5EF4-FFF2-40B4-BE49-F238E27FC236}">
-                <a16:creationId xmlns:a16="http://schemas.microsoft.com/office/drawing/2014/main" id="{DCD7E217-4AF5-45D1-ADD3-75DEB9E7837F}"/>
+                <a16:creationId xmlns:a16="http://schemas.microsoft.com/office/drawing/2014/main" id="{64BC4BBF-50B4-480E-BF26-5561FC99A8BE}"/>
               </a:ext>
             </a:extLst>
           </p:cNvPr>
@@ -11588,7 +11666,7 @@
           <p:cNvPr id="10" name="Shape 6">
             <a:extLst xmlns:a="http://schemas.openxmlformats.org/drawingml/2006/main">
               <a:ext uri="{FF2B5EF4-FFF2-40B4-BE49-F238E27FC236}">
-                <a16:creationId xmlns:a16="http://schemas.microsoft.com/office/drawing/2014/main" id="{574F6BDE-2E55-431E-BC6B-A5CE1C4873FC}"/>
+                <a16:creationId xmlns:a16="http://schemas.microsoft.com/office/drawing/2014/main" id="{F11108FD-BE6D-49D5-B850-FF9DA4F13739}"/>
               </a:ext>
             </a:extLst>
           </p:cNvPr>
@@ -11625,7 +11703,7 @@
           <p:nvPr/>
         </p:nvPicPr>
         <p:blipFill>
-          <a:blip xmlns:r="http://schemas.openxmlformats.org/officeDocument/2006/relationships" xmlns:a="http://schemas.openxmlformats.org/drawingml/2006/main" r:embed="R7c41ff72bd074e08"/>
+          <a:blip xmlns:r="http://schemas.openxmlformats.org/officeDocument/2006/relationships" xmlns:a="http://schemas.openxmlformats.org/drawingml/2006/main" r:embed="Rd29b3b83a9e5412e"/>
           <a:stretch xmlns:a="http://schemas.openxmlformats.org/drawingml/2006/main">
             <a:fillRect l="0" t="0" r="0" b="0"/>
           </a:stretch>
@@ -11645,7 +11723,7 @@
           <p:cNvPr id="12" name="Text 7">
             <a:extLst xmlns:a="http://schemas.openxmlformats.org/drawingml/2006/main">
               <a:ext uri="{FF2B5EF4-FFF2-40B4-BE49-F238E27FC236}">
-                <a16:creationId xmlns:a16="http://schemas.microsoft.com/office/drawing/2014/main" id="{DCF295DF-E244-415C-8D70-5D82FC8F78E8}"/>
+                <a16:creationId xmlns:a16="http://schemas.microsoft.com/office/drawing/2014/main" id="{3DC9BE05-2FE0-4E58-99BE-A4A84D9980C6}"/>
               </a:ext>
             </a:extLst>
           </p:cNvPr>
@@ -11691,7 +11769,7 @@
           <p:cNvPr id="13" name="Text 8">
             <a:extLst xmlns:a="http://schemas.openxmlformats.org/drawingml/2006/main">
               <a:ext uri="{FF2B5EF4-FFF2-40B4-BE49-F238E27FC236}">
-                <a16:creationId xmlns:a16="http://schemas.microsoft.com/office/drawing/2014/main" id="{FF333F08-483E-4468-A67D-4A5B5CE42A6E}"/>
+                <a16:creationId xmlns:a16="http://schemas.microsoft.com/office/drawing/2014/main" id="{888B098C-B861-4275-A4DB-1DB20BFBAE88}"/>
               </a:ext>
             </a:extLst>
           </p:cNvPr>
@@ -11808,7 +11886,7 @@
           <p:cNvPr id="14" name="Text 9">
             <a:extLst xmlns:a="http://schemas.openxmlformats.org/drawingml/2006/main">
               <a:ext uri="{FF2B5EF4-FFF2-40B4-BE49-F238E27FC236}">
-                <a16:creationId xmlns:a16="http://schemas.microsoft.com/office/drawing/2014/main" id="{359D190C-BDDF-4D6F-9673-7897424A085A}"/>
+                <a16:creationId xmlns:a16="http://schemas.microsoft.com/office/drawing/2014/main" id="{F6649D30-9034-4841-BE88-3400A5FF5456}"/>
               </a:ext>
             </a:extLst>
           </p:cNvPr>
@@ -11854,7 +11932,7 @@
           <p:cNvPr id="15" name="Text 10">
             <a:extLst xmlns:a="http://schemas.openxmlformats.org/drawingml/2006/main">
               <a:ext uri="{FF2B5EF4-FFF2-40B4-BE49-F238E27FC236}">
-                <a16:creationId xmlns:a16="http://schemas.microsoft.com/office/drawing/2014/main" id="{69665593-FDDB-474E-A09A-B54C4C572951}"/>
+                <a16:creationId xmlns:a16="http://schemas.microsoft.com/office/drawing/2014/main" id="{BA019C88-1788-436C-8661-AF5B191998FF}"/>
               </a:ext>
             </a:extLst>
           </p:cNvPr>
@@ -11900,7 +11978,7 @@
           <p:cNvPr id="16" name="Text 11">
             <a:extLst xmlns:a="http://schemas.openxmlformats.org/drawingml/2006/main">
               <a:ext uri="{FF2B5EF4-FFF2-40B4-BE49-F238E27FC236}">
-                <a16:creationId xmlns:a16="http://schemas.microsoft.com/office/drawing/2014/main" id="{FC7DBDB8-6BA6-42E6-9745-AAF25AB53A5C}"/>
+                <a16:creationId xmlns:a16="http://schemas.microsoft.com/office/drawing/2014/main" id="{1E924929-2240-4720-9270-7332D4F860E8}"/>
               </a:ext>
             </a:extLst>
           </p:cNvPr>
@@ -11944,7 +12022,7 @@
     </p:spTree>
     <p:extLst>
       <p:ext uri="{BB962C8B-B14F-4D97-AF65-F5344CB8AC3E}">
-        <p14:creationId xmlns:p14="http://schemas.microsoft.com/office/powerpoint/2010/main" val="1167911681"/>
+        <p14:creationId xmlns:p14="http://schemas.microsoft.com/office/powerpoint/2010/main" val="1754769880"/>
       </p:ext>
     </p:extLst>
   </p:cSld>
@@ -11975,7 +12053,7 @@
           <p:cNvPr id="2" name="Shape 0">
             <a:extLst xmlns:a="http://schemas.openxmlformats.org/drawingml/2006/main">
               <a:ext uri="{FF2B5EF4-FFF2-40B4-BE49-F238E27FC236}">
-                <a16:creationId xmlns:a16="http://schemas.microsoft.com/office/drawing/2014/main" id="{7A599BA7-87AF-43AF-85DA-8DBB128522FE}"/>
+                <a16:creationId xmlns:a16="http://schemas.microsoft.com/office/drawing/2014/main" id="{3D78374E-123A-46C6-A50C-9BD08402A997}"/>
               </a:ext>
             </a:extLst>
           </p:cNvPr>
@@ -12012,7 +12090,7 @@
           <p:nvPr/>
         </p:nvPicPr>
         <p:blipFill>
-          <a:blip xmlns:r="http://schemas.openxmlformats.org/officeDocument/2006/relationships" xmlns:a="http://schemas.openxmlformats.org/drawingml/2006/main" r:embed="Rc95cd3315d554756"/>
+          <a:blip xmlns:r="http://schemas.openxmlformats.org/officeDocument/2006/relationships" xmlns:a="http://schemas.openxmlformats.org/drawingml/2006/main" r:embed="Rc127e786a11245be"/>
           <a:stretch xmlns:a="http://schemas.openxmlformats.org/drawingml/2006/main">
             <a:fillRect l="0" t="0" r="0" b="0"/>
           </a:stretch>
@@ -12032,7 +12110,7 @@
           <p:cNvPr id="4" name="Text 1">
             <a:extLst xmlns:a="http://schemas.openxmlformats.org/drawingml/2006/main">
               <a:ext uri="{FF2B5EF4-FFF2-40B4-BE49-F238E27FC236}">
-                <a16:creationId xmlns:a16="http://schemas.microsoft.com/office/drawing/2014/main" id="{2100B6DB-A57A-4763-8A23-458843782009}"/>
+                <a16:creationId xmlns:a16="http://schemas.microsoft.com/office/drawing/2014/main" id="{23E99660-E11A-4C67-A06A-A256ACF7F60D}"/>
               </a:ext>
             </a:extLst>
           </p:cNvPr>
@@ -12078,7 +12156,7 @@
           <p:cNvPr id="5" name="Text 2">
             <a:extLst xmlns:a="http://schemas.openxmlformats.org/drawingml/2006/main">
               <a:ext uri="{FF2B5EF4-FFF2-40B4-BE49-F238E27FC236}">
-                <a16:creationId xmlns:a16="http://schemas.microsoft.com/office/drawing/2014/main" id="{4F8936B9-BFFE-42C7-81A5-7133262F5552}"/>
+                <a16:creationId xmlns:a16="http://schemas.microsoft.com/office/drawing/2014/main" id="{0198644E-3755-4FDA-94B4-A2740967E2ED}"/>
               </a:ext>
             </a:extLst>
           </p:cNvPr>
@@ -12128,7 +12206,7 @@
           <p:nvPr/>
         </p:nvPicPr>
         <p:blipFill>
-          <a:blip xmlns:r="http://schemas.openxmlformats.org/officeDocument/2006/relationships" xmlns:a="http://schemas.openxmlformats.org/drawingml/2006/main" r:embed="R3def557d127446c2"/>
+          <a:blip xmlns:r="http://schemas.openxmlformats.org/officeDocument/2006/relationships" xmlns:a="http://schemas.openxmlformats.org/drawingml/2006/main" r:embed="Rc8fe97a841f242a3"/>
           <a:stretch xmlns:a="http://schemas.openxmlformats.org/drawingml/2006/main">
             <a:fillRect l="0" t="0" r="0" b="0"/>
           </a:stretch>
@@ -12148,7 +12226,7 @@
           <p:cNvPr id="7" name="Text 3">
             <a:extLst xmlns:a="http://schemas.openxmlformats.org/drawingml/2006/main">
               <a:ext uri="{FF2B5EF4-FFF2-40B4-BE49-F238E27FC236}">
-                <a16:creationId xmlns:a16="http://schemas.microsoft.com/office/drawing/2014/main" id="{2F16C801-6868-4DB6-BE61-B84FD1A8CE52}"/>
+                <a16:creationId xmlns:a16="http://schemas.microsoft.com/office/drawing/2014/main" id="{100B0247-153E-450D-8D7D-6938EBDFD2E4}"/>
               </a:ext>
             </a:extLst>
           </p:cNvPr>
@@ -12199,7 +12277,7 @@
           <p:cNvPr id="8" name="Text 4">
             <a:extLst xmlns:a="http://schemas.openxmlformats.org/drawingml/2006/main">
               <a:ext uri="{FF2B5EF4-FFF2-40B4-BE49-F238E27FC236}">
-                <a16:creationId xmlns:a16="http://schemas.microsoft.com/office/drawing/2014/main" id="{A2A95535-175D-4387-8165-BCCAEF677A4F}"/>
+                <a16:creationId xmlns:a16="http://schemas.microsoft.com/office/drawing/2014/main" id="{31BE93F5-F275-431E-A029-7DF7A115D0B4}"/>
               </a:ext>
             </a:extLst>
           </p:cNvPr>
@@ -12291,7 +12369,7 @@
           <p:cNvPr id="9" name="Shape 5">
             <a:extLst xmlns:a="http://schemas.openxmlformats.org/drawingml/2006/main">
               <a:ext uri="{FF2B5EF4-FFF2-40B4-BE49-F238E27FC236}">
-                <a16:creationId xmlns:a16="http://schemas.microsoft.com/office/drawing/2014/main" id="{836B389B-7B9A-49AD-80C2-8B2F18338052}"/>
+                <a16:creationId xmlns:a16="http://schemas.microsoft.com/office/drawing/2014/main" id="{830E1B74-3357-43D5-AA9C-B973036AFD35}"/>
               </a:ext>
             </a:extLst>
           </p:cNvPr>
@@ -12326,7 +12404,7 @@
           <p:cNvPr id="10" name="Shape 6">
             <a:extLst xmlns:a="http://schemas.openxmlformats.org/drawingml/2006/main">
               <a:ext uri="{FF2B5EF4-FFF2-40B4-BE49-F238E27FC236}">
-                <a16:creationId xmlns:a16="http://schemas.microsoft.com/office/drawing/2014/main" id="{A1D04FD8-2FA8-4D5D-A15E-353B1F6342E0}"/>
+                <a16:creationId xmlns:a16="http://schemas.microsoft.com/office/drawing/2014/main" id="{3DC84BDE-07B4-4C78-B500-C2D90C81E626}"/>
               </a:ext>
             </a:extLst>
           </p:cNvPr>
@@ -12363,7 +12441,7 @@
           <p:nvPr/>
         </p:nvPicPr>
         <p:blipFill>
-          <a:blip xmlns:r="http://schemas.openxmlformats.org/officeDocument/2006/relationships" xmlns:a="http://schemas.openxmlformats.org/drawingml/2006/main" r:embed="Rabb9cf727717440c"/>
+          <a:blip xmlns:r="http://schemas.openxmlformats.org/officeDocument/2006/relationships" xmlns:a="http://schemas.openxmlformats.org/drawingml/2006/main" r:embed="Rb6f1fc44aa854fb3"/>
           <a:stretch xmlns:a="http://schemas.openxmlformats.org/drawingml/2006/main">
             <a:fillRect l="0" t="0" r="0" b="0"/>
           </a:stretch>
@@ -12383,7 +12461,7 @@
           <p:cNvPr id="12" name="Text 7">
             <a:extLst xmlns:a="http://schemas.openxmlformats.org/drawingml/2006/main">
               <a:ext uri="{FF2B5EF4-FFF2-40B4-BE49-F238E27FC236}">
-                <a16:creationId xmlns:a16="http://schemas.microsoft.com/office/drawing/2014/main" id="{A63FC1E2-BF43-4418-B311-D1AE28D76D5E}"/>
+                <a16:creationId xmlns:a16="http://schemas.microsoft.com/office/drawing/2014/main" id="{55A96C80-E45C-4297-BD9C-F3DCBEFF9D21}"/>
               </a:ext>
             </a:extLst>
           </p:cNvPr>
@@ -12434,7 +12512,7 @@
           <p:cNvPr id="13" name="Text 8">
             <a:extLst xmlns:a="http://schemas.openxmlformats.org/drawingml/2006/main">
               <a:ext uri="{FF2B5EF4-FFF2-40B4-BE49-F238E27FC236}">
-                <a16:creationId xmlns:a16="http://schemas.microsoft.com/office/drawing/2014/main" id="{DACE73EF-3341-49F6-AAC9-A4FB5451C1AB}"/>
+                <a16:creationId xmlns:a16="http://schemas.microsoft.com/office/drawing/2014/main" id="{D1B9DB33-7499-4579-8843-9D6610031961}"/>
               </a:ext>
             </a:extLst>
           </p:cNvPr>
@@ -12544,7 +12622,7 @@
           <p:cNvPr id="14" name="Text 9">
             <a:extLst xmlns:a="http://schemas.openxmlformats.org/drawingml/2006/main">
               <a:ext uri="{FF2B5EF4-FFF2-40B4-BE49-F238E27FC236}">
-                <a16:creationId xmlns:a16="http://schemas.microsoft.com/office/drawing/2014/main" id="{F9DE407D-C31A-4AAA-BE0F-1CE8426BEF2F}"/>
+                <a16:creationId xmlns:a16="http://schemas.microsoft.com/office/drawing/2014/main" id="{0B5618D0-F960-4A08-A415-95D2BA4C8B23}"/>
               </a:ext>
             </a:extLst>
           </p:cNvPr>
@@ -12590,7 +12668,7 @@
           <p:cNvPr id="15" name="Text 10">
             <a:extLst xmlns:a="http://schemas.openxmlformats.org/drawingml/2006/main">
               <a:ext uri="{FF2B5EF4-FFF2-40B4-BE49-F238E27FC236}">
-                <a16:creationId xmlns:a16="http://schemas.microsoft.com/office/drawing/2014/main" id="{5C3BCA58-FD5B-4990-B113-5F990AF0349E}"/>
+                <a16:creationId xmlns:a16="http://schemas.microsoft.com/office/drawing/2014/main" id="{A71FBE94-0098-48B2-9460-51B87038B578}"/>
               </a:ext>
             </a:extLst>
           </p:cNvPr>
@@ -12636,7 +12714,7 @@
           <p:cNvPr id="16" name="Text 11">
             <a:extLst xmlns:a="http://schemas.openxmlformats.org/drawingml/2006/main">
               <a:ext uri="{FF2B5EF4-FFF2-40B4-BE49-F238E27FC236}">
-                <a16:creationId xmlns:a16="http://schemas.microsoft.com/office/drawing/2014/main" id="{B9477AAB-AA50-4F57-8834-900D05CAF686}"/>
+                <a16:creationId xmlns:a16="http://schemas.microsoft.com/office/drawing/2014/main" id="{40973BEE-BDF1-4580-B997-9BBA93615E77}"/>
               </a:ext>
             </a:extLst>
           </p:cNvPr>
@@ -12680,7 +12758,7 @@
     </p:spTree>
     <p:extLst>
       <p:ext uri="{BB962C8B-B14F-4D97-AF65-F5344CB8AC3E}">
-        <p14:creationId xmlns:p14="http://schemas.microsoft.com/office/powerpoint/2010/main" val="950705848"/>
+        <p14:creationId xmlns:p14="http://schemas.microsoft.com/office/powerpoint/2010/main" val="1349982635"/>
       </p:ext>
     </p:extLst>
   </p:cSld>
@@ -12711,7 +12789,7 @@
           <p:cNvPr id="2" name="Shape 0">
             <a:extLst xmlns:a="http://schemas.openxmlformats.org/drawingml/2006/main">
               <a:ext uri="{FF2B5EF4-FFF2-40B4-BE49-F238E27FC236}">
-                <a16:creationId xmlns:a16="http://schemas.microsoft.com/office/drawing/2014/main" id="{9D6F1625-642A-450F-A696-889C9686E1C3}"/>
+                <a16:creationId xmlns:a16="http://schemas.microsoft.com/office/drawing/2014/main" id="{369871F2-8DBB-41F4-B172-D5032152EFAB}"/>
               </a:ext>
             </a:extLst>
           </p:cNvPr>
@@ -12748,7 +12826,7 @@
           <p:nvPr/>
         </p:nvPicPr>
         <p:blipFill>
-          <a:blip xmlns:r="http://schemas.openxmlformats.org/officeDocument/2006/relationships" xmlns:a="http://schemas.openxmlformats.org/drawingml/2006/main" r:embed="R44daba9d239746a6"/>
+          <a:blip xmlns:r="http://schemas.openxmlformats.org/officeDocument/2006/relationships" xmlns:a="http://schemas.openxmlformats.org/drawingml/2006/main" r:embed="Racaca8b9799f48b8"/>
           <a:stretch xmlns:a="http://schemas.openxmlformats.org/drawingml/2006/main">
             <a:fillRect l="0" t="0" r="0" b="0"/>
           </a:stretch>
@@ -12768,7 +12846,7 @@
           <p:cNvPr id="4" name="Text 1">
             <a:extLst xmlns:a="http://schemas.openxmlformats.org/drawingml/2006/main">
               <a:ext uri="{FF2B5EF4-FFF2-40B4-BE49-F238E27FC236}">
-                <a16:creationId xmlns:a16="http://schemas.microsoft.com/office/drawing/2014/main" id="{BC2C34EA-4493-41D4-90A0-84645E135828}"/>
+                <a16:creationId xmlns:a16="http://schemas.microsoft.com/office/drawing/2014/main" id="{5103B658-DFA9-488E-9C54-12C533A2073D}"/>
               </a:ext>
             </a:extLst>
           </p:cNvPr>
@@ -12814,7 +12892,7 @@
           <p:cNvPr id="5" name="Text 2">
             <a:extLst xmlns:a="http://schemas.openxmlformats.org/drawingml/2006/main">
               <a:ext uri="{FF2B5EF4-FFF2-40B4-BE49-F238E27FC236}">
-                <a16:creationId xmlns:a16="http://schemas.microsoft.com/office/drawing/2014/main" id="{063DA096-FB1D-43E2-99AF-2F2EA9428CCE}"/>
+                <a16:creationId xmlns:a16="http://schemas.microsoft.com/office/drawing/2014/main" id="{24DCE4E2-32A4-4FCD-BD06-2E5B6B963467}"/>
               </a:ext>
             </a:extLst>
           </p:cNvPr>
@@ -12864,7 +12942,8 @@
           <p:nvPr/>
         </p:nvPicPr>
         <p:blipFill>
-          <a:blip xmlns:r="http://schemas.openxmlformats.org/officeDocument/2006/relationships" xmlns:a="http://schemas.openxmlformats.org/drawingml/2006/main" r:embed="R7545aac4c1784bc3"/>
+          <a:blip xmlns:r="http://schemas.openxmlformats.org/officeDocument/2006/relationships" xmlns:a="http://schemas.openxmlformats.org/drawingml/2006/main" r:embed="R4bacaba80d274d66"/>
+          <a:srcRect xmlns:a="http://schemas.openxmlformats.org/drawingml/2006/main" l="0" t="169" r="0" b="169"/>
           <a:stretch xmlns:a="http://schemas.openxmlformats.org/drawingml/2006/main">
             <a:fillRect l="0" t="0" r="0" b="0"/>
           </a:stretch>
@@ -12884,7 +12963,7 @@
           <p:cNvPr id="7" name="Text 3">
             <a:extLst xmlns:a="http://schemas.openxmlformats.org/drawingml/2006/main">
               <a:ext uri="{FF2B5EF4-FFF2-40B4-BE49-F238E27FC236}">
-                <a16:creationId xmlns:a16="http://schemas.microsoft.com/office/drawing/2014/main" id="{93EDF74B-DFFC-4378-BD1D-AB9E387D7AEA}"/>
+                <a16:creationId xmlns:a16="http://schemas.microsoft.com/office/drawing/2014/main" id="{D6399A62-182D-421C-A8EF-66386CA32C4F}"/>
               </a:ext>
             </a:extLst>
           </p:cNvPr>
@@ -12930,7 +13009,7 @@
           <p:cNvPr id="8" name="Text 4">
             <a:extLst xmlns:a="http://schemas.openxmlformats.org/drawingml/2006/main">
               <a:ext uri="{FF2B5EF4-FFF2-40B4-BE49-F238E27FC236}">
-                <a16:creationId xmlns:a16="http://schemas.microsoft.com/office/drawing/2014/main" id="{D00415E3-71ED-456D-B82C-0DE8C6B0D616}"/>
+                <a16:creationId xmlns:a16="http://schemas.microsoft.com/office/drawing/2014/main" id="{4D5CD6BF-6C41-4B12-A15D-D8BC7C37E7C3}"/>
               </a:ext>
             </a:extLst>
           </p:cNvPr>
@@ -13022,7 +13101,7 @@
           <p:cNvPr id="9" name="Shape 5">
             <a:extLst xmlns:a="http://schemas.openxmlformats.org/drawingml/2006/main">
               <a:ext uri="{FF2B5EF4-FFF2-40B4-BE49-F238E27FC236}">
-                <a16:creationId xmlns:a16="http://schemas.microsoft.com/office/drawing/2014/main" id="{8910C038-8429-4AAB-89F7-F825CDF14DA1}"/>
+                <a16:creationId xmlns:a16="http://schemas.microsoft.com/office/drawing/2014/main" id="{23995FD5-6558-4BA1-873A-4047E6E80214}"/>
               </a:ext>
             </a:extLst>
           </p:cNvPr>
@@ -13057,7 +13136,7 @@
           <p:cNvPr id="10" name="Shape 6">
             <a:extLst xmlns:a="http://schemas.openxmlformats.org/drawingml/2006/main">
               <a:ext uri="{FF2B5EF4-FFF2-40B4-BE49-F238E27FC236}">
-                <a16:creationId xmlns:a16="http://schemas.microsoft.com/office/drawing/2014/main" id="{DF708906-969C-4FA3-86E1-8F697E3F8257}"/>
+                <a16:creationId xmlns:a16="http://schemas.microsoft.com/office/drawing/2014/main" id="{7E745904-A55F-4B47-AE5B-8C08345AB0FD}"/>
               </a:ext>
             </a:extLst>
           </p:cNvPr>
@@ -13094,7 +13173,7 @@
           <p:nvPr/>
         </p:nvPicPr>
         <p:blipFill>
-          <a:blip xmlns:r="http://schemas.openxmlformats.org/officeDocument/2006/relationships" xmlns:a="http://schemas.openxmlformats.org/drawingml/2006/main" r:embed="Rd8a54c97cc444c40"/>
+          <a:blip xmlns:r="http://schemas.openxmlformats.org/officeDocument/2006/relationships" xmlns:a="http://schemas.openxmlformats.org/drawingml/2006/main" r:embed="R7129029d0feb4932"/>
           <a:stretch xmlns:a="http://schemas.openxmlformats.org/drawingml/2006/main">
             <a:fillRect l="0" t="0" r="0" b="0"/>
           </a:stretch>
@@ -13114,7 +13193,7 @@
           <p:cNvPr id="12" name="Text 7">
             <a:extLst xmlns:a="http://schemas.openxmlformats.org/drawingml/2006/main">
               <a:ext uri="{FF2B5EF4-FFF2-40B4-BE49-F238E27FC236}">
-                <a16:creationId xmlns:a16="http://schemas.microsoft.com/office/drawing/2014/main" id="{65EE2D16-4EC6-462B-9DF4-72218A7BB8F2}"/>
+                <a16:creationId xmlns:a16="http://schemas.microsoft.com/office/drawing/2014/main" id="{A99EA06D-A52A-4725-82B3-FA9FDD70E48D}"/>
               </a:ext>
             </a:extLst>
           </p:cNvPr>
@@ -13160,7 +13239,7 @@
           <p:cNvPr id="13" name="Text 8">
             <a:extLst xmlns:a="http://schemas.openxmlformats.org/drawingml/2006/main">
               <a:ext uri="{FF2B5EF4-FFF2-40B4-BE49-F238E27FC236}">
-                <a16:creationId xmlns:a16="http://schemas.microsoft.com/office/drawing/2014/main" id="{F3D486FF-7853-4CC6-87B1-BE4B466C6043}"/>
+                <a16:creationId xmlns:a16="http://schemas.microsoft.com/office/drawing/2014/main" id="{4677382C-2176-464D-93FA-3C0E1E80C4E6}"/>
               </a:ext>
             </a:extLst>
           </p:cNvPr>
@@ -13277,7 +13356,7 @@
           <p:cNvPr id="14" name="Text 9">
             <a:extLst xmlns:a="http://schemas.openxmlformats.org/drawingml/2006/main">
               <a:ext uri="{FF2B5EF4-FFF2-40B4-BE49-F238E27FC236}">
-                <a16:creationId xmlns:a16="http://schemas.microsoft.com/office/drawing/2014/main" id="{8E6AA9C2-432A-429F-8C58-6FB631104185}"/>
+                <a16:creationId xmlns:a16="http://schemas.microsoft.com/office/drawing/2014/main" id="{294A3B5F-1DD3-4B83-82B4-92D126DCC302}"/>
               </a:ext>
             </a:extLst>
           </p:cNvPr>
@@ -13323,7 +13402,7 @@
           <p:cNvPr id="15" name="Text 10">
             <a:extLst xmlns:a="http://schemas.openxmlformats.org/drawingml/2006/main">
               <a:ext uri="{FF2B5EF4-FFF2-40B4-BE49-F238E27FC236}">
-                <a16:creationId xmlns:a16="http://schemas.microsoft.com/office/drawing/2014/main" id="{E76AE3EA-C30E-41E3-9972-BF725B0354E0}"/>
+                <a16:creationId xmlns:a16="http://schemas.microsoft.com/office/drawing/2014/main" id="{B7580347-A790-43A2-B4EB-A79E4EE9F7DC}"/>
               </a:ext>
             </a:extLst>
           </p:cNvPr>
@@ -13369,7 +13448,7 @@
           <p:cNvPr id="16" name="Text 11">
             <a:extLst xmlns:a="http://schemas.openxmlformats.org/drawingml/2006/main">
               <a:ext uri="{FF2B5EF4-FFF2-40B4-BE49-F238E27FC236}">
-                <a16:creationId xmlns:a16="http://schemas.microsoft.com/office/drawing/2014/main" id="{ACEC0842-D647-4334-BCAD-07C3FBD21108}"/>
+                <a16:creationId xmlns:a16="http://schemas.microsoft.com/office/drawing/2014/main" id="{69068AC8-9B71-44B4-87C3-278FE4EEFF17}"/>
               </a:ext>
             </a:extLst>
           </p:cNvPr>
@@ -13413,7 +13492,7 @@
     </p:spTree>
     <p:extLst>
       <p:ext uri="{BB962C8B-B14F-4D97-AF65-F5344CB8AC3E}">
-        <p14:creationId xmlns:p14="http://schemas.microsoft.com/office/powerpoint/2010/main" val="1075059833"/>
+        <p14:creationId xmlns:p14="http://schemas.microsoft.com/office/powerpoint/2010/main" val="1057831439"/>
       </p:ext>
     </p:extLst>
   </p:cSld>
@@ -13444,7 +13523,7 @@
           <p:cNvPr id="2" name="Shape 0">
             <a:extLst xmlns:a="http://schemas.openxmlformats.org/drawingml/2006/main">
               <a:ext uri="{FF2B5EF4-FFF2-40B4-BE49-F238E27FC236}">
-                <a16:creationId xmlns:a16="http://schemas.microsoft.com/office/drawing/2014/main" id="{4D5AA942-2C2D-4AF4-ACBC-E96E51A218C4}"/>
+                <a16:creationId xmlns:a16="http://schemas.microsoft.com/office/drawing/2014/main" id="{C2484FA0-04CD-4EAE-9CC4-BFC41BBC5D23}"/>
               </a:ext>
             </a:extLst>
           </p:cNvPr>
@@ -13481,7 +13560,7 @@
           <p:nvPr/>
         </p:nvPicPr>
         <p:blipFill>
-          <a:blip xmlns:r="http://schemas.openxmlformats.org/officeDocument/2006/relationships" xmlns:a="http://schemas.openxmlformats.org/drawingml/2006/main" r:embed="R8bba864c496c4ac2"/>
+          <a:blip xmlns:r="http://schemas.openxmlformats.org/officeDocument/2006/relationships" xmlns:a="http://schemas.openxmlformats.org/drawingml/2006/main" r:embed="R586686b936c84f7c"/>
           <a:stretch xmlns:a="http://schemas.openxmlformats.org/drawingml/2006/main">
             <a:fillRect l="0" t="0" r="0" b="0"/>
           </a:stretch>
@@ -13501,7 +13580,7 @@
           <p:cNvPr id="4" name="Text 1">
             <a:extLst xmlns:a="http://schemas.openxmlformats.org/drawingml/2006/main">
               <a:ext uri="{FF2B5EF4-FFF2-40B4-BE49-F238E27FC236}">
-                <a16:creationId xmlns:a16="http://schemas.microsoft.com/office/drawing/2014/main" id="{345B74E6-873C-4BCF-9AA5-51C7667EF780}"/>
+                <a16:creationId xmlns:a16="http://schemas.microsoft.com/office/drawing/2014/main" id="{F0CB9887-071E-48A6-B064-6BF1B78109F7}"/>
               </a:ext>
             </a:extLst>
           </p:cNvPr>
@@ -13547,7 +13626,7 @@
           <p:cNvPr id="5" name="Text 2">
             <a:extLst xmlns:a="http://schemas.openxmlformats.org/drawingml/2006/main">
               <a:ext uri="{FF2B5EF4-FFF2-40B4-BE49-F238E27FC236}">
-                <a16:creationId xmlns:a16="http://schemas.microsoft.com/office/drawing/2014/main" id="{1036496E-C654-4F84-8B5E-27995CA4F2A5}"/>
+                <a16:creationId xmlns:a16="http://schemas.microsoft.com/office/drawing/2014/main" id="{7F4C9183-269D-40CF-BD40-3CB9AC2F3772}"/>
               </a:ext>
             </a:extLst>
           </p:cNvPr>
@@ -13597,7 +13676,7 @@
           <p:nvPr/>
         </p:nvPicPr>
         <p:blipFill>
-          <a:blip xmlns:r="http://schemas.openxmlformats.org/officeDocument/2006/relationships" xmlns:a="http://schemas.openxmlformats.org/drawingml/2006/main" r:embed="R6ceb982a07714924"/>
+          <a:blip xmlns:r="http://schemas.openxmlformats.org/officeDocument/2006/relationships" xmlns:a="http://schemas.openxmlformats.org/drawingml/2006/main" r:embed="R7695568d6a544f84"/>
           <a:stretch xmlns:a="http://schemas.openxmlformats.org/drawingml/2006/main">
             <a:fillRect l="0" t="0" r="0" b="0"/>
           </a:stretch>
@@ -13617,7 +13696,7 @@
           <p:cNvPr id="7" name="Text 3">
             <a:extLst xmlns:a="http://schemas.openxmlformats.org/drawingml/2006/main">
               <a:ext uri="{FF2B5EF4-FFF2-40B4-BE49-F238E27FC236}">
-                <a16:creationId xmlns:a16="http://schemas.microsoft.com/office/drawing/2014/main" id="{E502D307-E87B-4D6C-885E-147FB3F9A53A}"/>
+                <a16:creationId xmlns:a16="http://schemas.microsoft.com/office/drawing/2014/main" id="{D8A583FC-8434-40A7-8911-5306E900613D}"/>
               </a:ext>
             </a:extLst>
           </p:cNvPr>
@@ -13663,7 +13742,7 @@
           <p:cNvPr id="8" name="Text 4">
             <a:extLst xmlns:a="http://schemas.openxmlformats.org/drawingml/2006/main">
               <a:ext uri="{FF2B5EF4-FFF2-40B4-BE49-F238E27FC236}">
-                <a16:creationId xmlns:a16="http://schemas.microsoft.com/office/drawing/2014/main" id="{FB03C8CA-55E7-4EBD-A2E1-1F41553366F8}"/>
+                <a16:creationId xmlns:a16="http://schemas.microsoft.com/office/drawing/2014/main" id="{FA6D76BB-4BE9-41BB-A7DC-1F6E59005318}"/>
               </a:ext>
             </a:extLst>
           </p:cNvPr>
@@ -13755,7 +13834,7 @@
           <p:cNvPr id="9" name="Shape 5">
             <a:extLst xmlns:a="http://schemas.openxmlformats.org/drawingml/2006/main">
               <a:ext uri="{FF2B5EF4-FFF2-40B4-BE49-F238E27FC236}">
-                <a16:creationId xmlns:a16="http://schemas.microsoft.com/office/drawing/2014/main" id="{9BC018E2-C770-4537-9EFE-0042C83209E5}"/>
+                <a16:creationId xmlns:a16="http://schemas.microsoft.com/office/drawing/2014/main" id="{0E0B7433-8C99-4383-BB64-2DB195782246}"/>
               </a:ext>
             </a:extLst>
           </p:cNvPr>
@@ -13790,7 +13869,7 @@
           <p:cNvPr id="10" name="Shape 6">
             <a:extLst xmlns:a="http://schemas.openxmlformats.org/drawingml/2006/main">
               <a:ext uri="{FF2B5EF4-FFF2-40B4-BE49-F238E27FC236}">
-                <a16:creationId xmlns:a16="http://schemas.microsoft.com/office/drawing/2014/main" id="{1E1E1367-A2EB-4B70-BCD7-CA21F52F53BC}"/>
+                <a16:creationId xmlns:a16="http://schemas.microsoft.com/office/drawing/2014/main" id="{5B85FB8C-C81F-4DCD-BF33-395FB22E9602}"/>
               </a:ext>
             </a:extLst>
           </p:cNvPr>
@@ -13827,7 +13906,7 @@
           <p:nvPr/>
         </p:nvPicPr>
         <p:blipFill>
-          <a:blip xmlns:r="http://schemas.openxmlformats.org/officeDocument/2006/relationships" xmlns:a="http://schemas.openxmlformats.org/drawingml/2006/main" r:embed="R79427ad56dfe4836"/>
+          <a:blip xmlns:r="http://schemas.openxmlformats.org/officeDocument/2006/relationships" xmlns:a="http://schemas.openxmlformats.org/drawingml/2006/main" r:embed="R8b154ea7bd0d4070"/>
           <a:stretch xmlns:a="http://schemas.openxmlformats.org/drawingml/2006/main">
             <a:fillRect l="0" t="0" r="0" b="0"/>
           </a:stretch>
@@ -13847,7 +13926,7 @@
           <p:cNvPr id="12" name="Text 7">
             <a:extLst xmlns:a="http://schemas.openxmlformats.org/drawingml/2006/main">
               <a:ext uri="{FF2B5EF4-FFF2-40B4-BE49-F238E27FC236}">
-                <a16:creationId xmlns:a16="http://schemas.microsoft.com/office/drawing/2014/main" id="{5F9DE50F-3D9F-432A-A2D5-AFB4D9F03A7C}"/>
+                <a16:creationId xmlns:a16="http://schemas.microsoft.com/office/drawing/2014/main" id="{B29959FB-0B48-4846-AFC1-089A02A9FC62}"/>
               </a:ext>
             </a:extLst>
           </p:cNvPr>
@@ -13898,7 +13977,7 @@
           <p:cNvPr id="13" name="Text 8">
             <a:extLst xmlns:a="http://schemas.openxmlformats.org/drawingml/2006/main">
               <a:ext uri="{FF2B5EF4-FFF2-40B4-BE49-F238E27FC236}">
-                <a16:creationId xmlns:a16="http://schemas.microsoft.com/office/drawing/2014/main" id="{1C1E208A-A55D-470F-B07F-BA64167F35D6}"/>
+                <a16:creationId xmlns:a16="http://schemas.microsoft.com/office/drawing/2014/main" id="{663AAD00-4FEC-4BEE-B488-39B269D1E858}"/>
               </a:ext>
             </a:extLst>
           </p:cNvPr>
@@ -14008,7 +14087,7 @@
           <p:cNvPr id="14" name="Text 9">
             <a:extLst xmlns:a="http://schemas.openxmlformats.org/drawingml/2006/main">
               <a:ext uri="{FF2B5EF4-FFF2-40B4-BE49-F238E27FC236}">
-                <a16:creationId xmlns:a16="http://schemas.microsoft.com/office/drawing/2014/main" id="{E855F591-64B2-4993-97DF-3EAD8E053366}"/>
+                <a16:creationId xmlns:a16="http://schemas.microsoft.com/office/drawing/2014/main" id="{6B6BC5C2-5606-4B45-9489-0FF3BF6D9A6D}"/>
               </a:ext>
             </a:extLst>
           </p:cNvPr>
@@ -14054,7 +14133,7 @@
           <p:cNvPr id="15" name="Text 10">
             <a:extLst xmlns:a="http://schemas.openxmlformats.org/drawingml/2006/main">
               <a:ext uri="{FF2B5EF4-FFF2-40B4-BE49-F238E27FC236}">
-                <a16:creationId xmlns:a16="http://schemas.microsoft.com/office/drawing/2014/main" id="{F7EDC78F-F5DA-4CD2-B112-B31CBF0B2C37}"/>
+                <a16:creationId xmlns:a16="http://schemas.microsoft.com/office/drawing/2014/main" id="{D4F36DFC-2492-45E3-8D97-9F1F1123BA11}"/>
               </a:ext>
             </a:extLst>
           </p:cNvPr>
@@ -14100,7 +14179,7 @@
           <p:cNvPr id="16" name="Text 11">
             <a:extLst xmlns:a="http://schemas.openxmlformats.org/drawingml/2006/main">
               <a:ext uri="{FF2B5EF4-FFF2-40B4-BE49-F238E27FC236}">
-                <a16:creationId xmlns:a16="http://schemas.microsoft.com/office/drawing/2014/main" id="{3BDA513B-B708-40B3-AA9B-E59E527CE442}"/>
+                <a16:creationId xmlns:a16="http://schemas.microsoft.com/office/drawing/2014/main" id="{8D3AB931-0981-4C13-AD83-6E82DECE73AB}"/>
               </a:ext>
             </a:extLst>
           </p:cNvPr>
@@ -14144,7 +14223,7 @@
     </p:spTree>
     <p:extLst>
       <p:ext uri="{BB962C8B-B14F-4D97-AF65-F5344CB8AC3E}">
-        <p14:creationId xmlns:p14="http://schemas.microsoft.com/office/powerpoint/2010/main" val="1150778487"/>
+        <p14:creationId xmlns:p14="http://schemas.microsoft.com/office/powerpoint/2010/main" val="564506525"/>
       </p:ext>
     </p:extLst>
   </p:cSld>
@@ -14175,7 +14254,7 @@
           <p:cNvPr id="2" name="Shape 0">
             <a:extLst xmlns:a="http://schemas.openxmlformats.org/drawingml/2006/main">
               <a:ext uri="{FF2B5EF4-FFF2-40B4-BE49-F238E27FC236}">
-                <a16:creationId xmlns:a16="http://schemas.microsoft.com/office/drawing/2014/main" id="{154CC30C-2C20-4345-A035-F7C1898EDFEB}"/>
+                <a16:creationId xmlns:a16="http://schemas.microsoft.com/office/drawing/2014/main" id="{F2131615-37FC-4B25-A6AD-F4594410C172}"/>
               </a:ext>
             </a:extLst>
           </p:cNvPr>
@@ -14212,7 +14291,7 @@
           <p:nvPr/>
         </p:nvPicPr>
         <p:blipFill>
-          <a:blip xmlns:r="http://schemas.openxmlformats.org/officeDocument/2006/relationships" xmlns:a="http://schemas.openxmlformats.org/drawingml/2006/main" r:embed="R2656983fc298497f"/>
+          <a:blip xmlns:r="http://schemas.openxmlformats.org/officeDocument/2006/relationships" xmlns:a="http://schemas.openxmlformats.org/drawingml/2006/main" r:embed="R74996991e3374fe3"/>
           <a:stretch xmlns:a="http://schemas.openxmlformats.org/drawingml/2006/main">
             <a:fillRect l="0" t="0" r="0" b="0"/>
           </a:stretch>
@@ -14232,7 +14311,7 @@
           <p:cNvPr id="4" name="Text 1">
             <a:extLst xmlns:a="http://schemas.openxmlformats.org/drawingml/2006/main">
               <a:ext uri="{FF2B5EF4-FFF2-40B4-BE49-F238E27FC236}">
-                <a16:creationId xmlns:a16="http://schemas.microsoft.com/office/drawing/2014/main" id="{C6D84E4B-8E12-4881-B01B-C57B1B7CD726}"/>
+                <a16:creationId xmlns:a16="http://schemas.microsoft.com/office/drawing/2014/main" id="{0C46032D-3D2F-46C9-8FFE-32A363FB39F3}"/>
               </a:ext>
             </a:extLst>
           </p:cNvPr>
@@ -14278,7 +14357,7 @@
           <p:cNvPr id="5" name="Text 2">
             <a:extLst xmlns:a="http://schemas.openxmlformats.org/drawingml/2006/main">
               <a:ext uri="{FF2B5EF4-FFF2-40B4-BE49-F238E27FC236}">
-                <a16:creationId xmlns:a16="http://schemas.microsoft.com/office/drawing/2014/main" id="{D4355AF1-9E7E-4B0A-B82C-FC46A2E42D38}"/>
+                <a16:creationId xmlns:a16="http://schemas.microsoft.com/office/drawing/2014/main" id="{64C042C8-4940-4DCF-BB9C-4092F7211805}"/>
               </a:ext>
             </a:extLst>
           </p:cNvPr>
@@ -14328,7 +14407,7 @@
           <p:nvPr/>
         </p:nvPicPr>
         <p:blipFill>
-          <a:blip xmlns:r="http://schemas.openxmlformats.org/officeDocument/2006/relationships" xmlns:a="http://schemas.openxmlformats.org/drawingml/2006/main" r:embed="R9d75a717c52843eb"/>
+          <a:blip xmlns:r="http://schemas.openxmlformats.org/officeDocument/2006/relationships" xmlns:a="http://schemas.openxmlformats.org/drawingml/2006/main" r:embed="Rfe870e2a03334357"/>
           <a:stretch xmlns:a="http://schemas.openxmlformats.org/drawingml/2006/main">
             <a:fillRect l="0" t="0" r="0" b="0"/>
           </a:stretch>
@@ -14348,7 +14427,7 @@
           <p:cNvPr id="7" name="Text 3">
             <a:extLst xmlns:a="http://schemas.openxmlformats.org/drawingml/2006/main">
               <a:ext uri="{FF2B5EF4-FFF2-40B4-BE49-F238E27FC236}">
-                <a16:creationId xmlns:a16="http://schemas.microsoft.com/office/drawing/2014/main" id="{C632F5F8-4CA3-4D5D-AC3F-C80FA4D286FC}"/>
+                <a16:creationId xmlns:a16="http://schemas.microsoft.com/office/drawing/2014/main" id="{0AF38D4E-D431-42E5-8BAE-151FA1DEB132}"/>
               </a:ext>
             </a:extLst>
           </p:cNvPr>
@@ -14394,7 +14473,7 @@
           <p:cNvPr id="8" name="Text 4">
             <a:extLst xmlns:a="http://schemas.openxmlformats.org/drawingml/2006/main">
               <a:ext uri="{FF2B5EF4-FFF2-40B4-BE49-F238E27FC236}">
-                <a16:creationId xmlns:a16="http://schemas.microsoft.com/office/drawing/2014/main" id="{E1E6D770-BE39-4DEC-A9AC-8C7C2F8C7657}"/>
+                <a16:creationId xmlns:a16="http://schemas.microsoft.com/office/drawing/2014/main" id="{8051C6A9-C3ED-4FD6-B1EF-B002CBA45DF0}"/>
               </a:ext>
             </a:extLst>
           </p:cNvPr>
@@ -14486,7 +14565,7 @@
           <p:cNvPr id="9" name="Shape 5">
             <a:extLst xmlns:a="http://schemas.openxmlformats.org/drawingml/2006/main">
               <a:ext uri="{FF2B5EF4-FFF2-40B4-BE49-F238E27FC236}">
-                <a16:creationId xmlns:a16="http://schemas.microsoft.com/office/drawing/2014/main" id="{FE9BB33A-9891-4E23-9B2F-34EA12B096ED}"/>
+                <a16:creationId xmlns:a16="http://schemas.microsoft.com/office/drawing/2014/main" id="{A89450C2-DEFE-4A47-89D3-4CC3E333077C}"/>
               </a:ext>
             </a:extLst>
           </p:cNvPr>
@@ -14521,7 +14600,7 @@
           <p:cNvPr id="10" name="Shape 6">
             <a:extLst xmlns:a="http://schemas.openxmlformats.org/drawingml/2006/main">
               <a:ext uri="{FF2B5EF4-FFF2-40B4-BE49-F238E27FC236}">
-                <a16:creationId xmlns:a16="http://schemas.microsoft.com/office/drawing/2014/main" id="{1D8A7837-D617-41D5-AC80-12FDE22FE744}"/>
+                <a16:creationId xmlns:a16="http://schemas.microsoft.com/office/drawing/2014/main" id="{62237518-FC95-4F09-A585-F107555C8B0A}"/>
               </a:ext>
             </a:extLst>
           </p:cNvPr>
@@ -14558,7 +14637,7 @@
           <p:nvPr/>
         </p:nvPicPr>
         <p:blipFill>
-          <a:blip xmlns:r="http://schemas.openxmlformats.org/officeDocument/2006/relationships" xmlns:a="http://schemas.openxmlformats.org/drawingml/2006/main" r:embed="Rdba24d56d1b24a7f"/>
+          <a:blip xmlns:r="http://schemas.openxmlformats.org/officeDocument/2006/relationships" xmlns:a="http://schemas.openxmlformats.org/drawingml/2006/main" r:embed="R07ab09cbc37c48ed"/>
           <a:stretch xmlns:a="http://schemas.openxmlformats.org/drawingml/2006/main">
             <a:fillRect l="0" t="0" r="0" b="0"/>
           </a:stretch>
@@ -14578,7 +14657,7 @@
           <p:cNvPr id="12" name="Text 7">
             <a:extLst xmlns:a="http://schemas.openxmlformats.org/drawingml/2006/main">
               <a:ext uri="{FF2B5EF4-FFF2-40B4-BE49-F238E27FC236}">
-                <a16:creationId xmlns:a16="http://schemas.microsoft.com/office/drawing/2014/main" id="{83025F1A-6AD1-48D2-99FE-2175A6394417}"/>
+                <a16:creationId xmlns:a16="http://schemas.microsoft.com/office/drawing/2014/main" id="{925AE48B-9849-49DA-B8AC-0C672B9BB73F}"/>
               </a:ext>
             </a:extLst>
           </p:cNvPr>
@@ -14624,7 +14703,7 @@
           <p:cNvPr id="13" name="Text 8">
             <a:extLst xmlns:a="http://schemas.openxmlformats.org/drawingml/2006/main">
               <a:ext uri="{FF2B5EF4-FFF2-40B4-BE49-F238E27FC236}">
-                <a16:creationId xmlns:a16="http://schemas.microsoft.com/office/drawing/2014/main" id="{35A43D6F-BE36-42A0-91F5-3202B7150E1B}"/>
+                <a16:creationId xmlns:a16="http://schemas.microsoft.com/office/drawing/2014/main" id="{49057546-D1ED-4F48-A77D-4994FAB709EE}"/>
               </a:ext>
             </a:extLst>
           </p:cNvPr>
@@ -14741,7 +14820,7 @@
           <p:cNvPr id="14" name="Text 9">
             <a:extLst xmlns:a="http://schemas.openxmlformats.org/drawingml/2006/main">
               <a:ext uri="{FF2B5EF4-FFF2-40B4-BE49-F238E27FC236}">
-                <a16:creationId xmlns:a16="http://schemas.microsoft.com/office/drawing/2014/main" id="{E2A75F12-A083-4DCD-97C8-21E1E93250B6}"/>
+                <a16:creationId xmlns:a16="http://schemas.microsoft.com/office/drawing/2014/main" id="{B9C4ADAE-8D90-4A27-944D-7CA1ECBD7DBE}"/>
               </a:ext>
             </a:extLst>
           </p:cNvPr>
@@ -14787,7 +14866,7 @@
           <p:cNvPr id="15" name="Text 10">
             <a:extLst xmlns:a="http://schemas.openxmlformats.org/drawingml/2006/main">
               <a:ext uri="{FF2B5EF4-FFF2-40B4-BE49-F238E27FC236}">
-                <a16:creationId xmlns:a16="http://schemas.microsoft.com/office/drawing/2014/main" id="{2AD23FE8-19C3-4F73-A1E5-71255C619A3F}"/>
+                <a16:creationId xmlns:a16="http://schemas.microsoft.com/office/drawing/2014/main" id="{AAE3246F-60C3-4E4F-8019-7A61E7C66E5B}"/>
               </a:ext>
             </a:extLst>
           </p:cNvPr>
@@ -14833,7 +14912,7 @@
           <p:cNvPr id="16" name="Text 11">
             <a:extLst xmlns:a="http://schemas.openxmlformats.org/drawingml/2006/main">
               <a:ext uri="{FF2B5EF4-FFF2-40B4-BE49-F238E27FC236}">
-                <a16:creationId xmlns:a16="http://schemas.microsoft.com/office/drawing/2014/main" id="{EC2D9C18-2735-4949-A544-83C63F017513}"/>
+                <a16:creationId xmlns:a16="http://schemas.microsoft.com/office/drawing/2014/main" id="{EA90806D-7AB8-4F3B-B8A2-BFFBFE88A99B}"/>
               </a:ext>
             </a:extLst>
           </p:cNvPr>
@@ -14877,7 +14956,7 @@
     </p:spTree>
     <p:extLst>
       <p:ext uri="{BB962C8B-B14F-4D97-AF65-F5344CB8AC3E}">
-        <p14:creationId xmlns:p14="http://schemas.microsoft.com/office/powerpoint/2010/main" val="1781714140"/>
+        <p14:creationId xmlns:p14="http://schemas.microsoft.com/office/powerpoint/2010/main" val="24686911"/>
       </p:ext>
     </p:extLst>
   </p:cSld>
